--- a/presentation/cpp-statelessness-compendium.pptx
+++ b/presentation/cpp-statelessness-compendium.pptx
@@ -10917,7 +10917,7 @@
         <p:spPr>
           <a:xfrm>
             <a:off x="6217920" y="1554480"/>
-            <a:ext cx="5486400" cy="2984988"/>
+            <a:ext cx="5486400" cy="2988033"/>
           </a:xfrm>
           <a:prstGeom prst="rect">
             <a:avLst/>
@@ -14512,7 +14512,7 @@
         <p:spPr>
           <a:xfrm>
             <a:off x="6217920" y="1554480"/>
-            <a:ext cx="5486400" cy="2984988"/>
+            <a:ext cx="5486400" cy="2988033"/>
           </a:xfrm>
           <a:prstGeom prst="rect">
             <a:avLst/>
@@ -16440,7 +16440,7 @@
         <p:spPr>
           <a:xfrm>
             <a:off x="6217920" y="1554480"/>
-            <a:ext cx="5486400" cy="2866292"/>
+            <a:ext cx="5486400" cy="2866510"/>
           </a:xfrm>
           <a:prstGeom prst="rect">
             <a:avLst/>
@@ -19096,7 +19096,7 @@
         <p:spPr>
           <a:xfrm>
             <a:off x="6217920" y="1554480"/>
-            <a:ext cx="5486400" cy="2923442"/>
+            <a:ext cx="5486400" cy="2927271"/>
           </a:xfrm>
           <a:prstGeom prst="rect">
             <a:avLst/>
@@ -20997,7 +20997,7 @@
         <p:spPr>
           <a:xfrm>
             <a:off x="6217920" y="1554480"/>
-            <a:ext cx="5486400" cy="2866292"/>
+            <a:ext cx="5486400" cy="2866510"/>
           </a:xfrm>
           <a:prstGeom prst="rect">
             <a:avLst/>
@@ -24337,7 +24337,7 @@
         <p:spPr>
           <a:xfrm>
             <a:off x="6217920" y="1554480"/>
-            <a:ext cx="5486400" cy="2897065"/>
+            <a:ext cx="5486400" cy="2898678"/>
           </a:xfrm>
           <a:prstGeom prst="rect">
             <a:avLst/>
@@ -26043,7 +26043,7 @@
         <p:spPr>
           <a:xfrm>
             <a:off x="6217920" y="1554480"/>
-            <a:ext cx="5486400" cy="2984988"/>
+            <a:ext cx="5486400" cy="2988033"/>
           </a:xfrm>
           <a:prstGeom prst="rect">
             <a:avLst/>
@@ -26459,7 +26459,7 @@
         <p:spPr>
           <a:xfrm>
             <a:off x="6217920" y="1554480"/>
-            <a:ext cx="5486400" cy="2897065"/>
+            <a:ext cx="5486400" cy="2898678"/>
           </a:xfrm>
           <a:prstGeom prst="rect">
             <a:avLst/>
@@ -28573,7 +28573,7 @@
         <p:spPr>
           <a:xfrm>
             <a:off x="6217920" y="1554480"/>
-            <a:ext cx="5486400" cy="2897065"/>
+            <a:ext cx="5486400" cy="2898678"/>
           </a:xfrm>
           <a:prstGeom prst="rect">
             <a:avLst/>
@@ -31309,7 +31309,7 @@
         <p:spPr>
           <a:xfrm>
             <a:off x="6217920" y="1554480"/>
-            <a:ext cx="5486400" cy="2897065"/>
+            <a:ext cx="5486400" cy="2898678"/>
           </a:xfrm>
           <a:prstGeom prst="rect">
             <a:avLst/>
@@ -34055,7 +34055,7 @@
         <p:spPr>
           <a:xfrm>
             <a:off x="6217920" y="1554480"/>
-            <a:ext cx="5486400" cy="2984988"/>
+            <a:ext cx="5486400" cy="2988033"/>
           </a:xfrm>
           <a:prstGeom prst="rect">
             <a:avLst/>

--- a/presentation/cpp-statelessness-compendium.pptx
+++ b/presentation/cpp-statelessness-compendium.pptx
@@ -794,7 +794,7 @@
           <a:p>
             <a:r>
               <a:rPr sz="1200"/>
-              <a:t>RAII has no inherent cost — it's just scope-bound destruction. But the per-request object runs its constructor on every request, so what you put in it matters. A short std::string member fits in the small-string buffer and costs nothing; a std::map member allocates per node. This is where the PMR arena (next section) earns its keep — the per-request containers allocate from a buffer that's already there.</a:t>
+              <a:t>RAII has no inherent cost — it's just scope-bound destruction. But the per-request object runs its constructor on every request, so what you put in it matters. A short std::string member fits in the small-string buffer and costs nothing; a std::map member allocates per node. This is where the PMR arena (next section) pays off — the per-request containers allocate from a buffer that's already there.</a:t>
             </a:r>
           </a:p>
         </p:txBody>
@@ -1291,7 +1291,7 @@
           <a:p>
             <a:r>
               <a:rPr sz="1200"/>
-              <a:t>Two things to watch: the timing difference between per-element free and bulk arena reclamation, and then the deliberate lifetime bug — the demo builds it, runs under ASan, and ASan prints the use-after-free with a stack trace. That's the safety net the dev profile gives you for free.</a:t>
+              <a:t>Two things to watch: the timing difference between per-element free and bulk arena reclamation, and then the deliberate lifetime bug — the demo builds it, runs under ASan, and ASan prints the use-after-free with a stack trace. That's the safety net the dev profile gives you automatically.</a:t>
             </a:r>
           </a:p>
         </p:txBody>
@@ -1936,7 +1936,7 @@
           <a:p>
             <a:r>
               <a:rPr sz="1200"/>
-              <a:t>Thread-local storage is process-scoped but per-thread, which makes it a natural home for things like the active span — until coroutines. After a co_await, the coroutine may resume on a different thread, so anything you stashed in TLS before the suspension is gone. The fix is to capture request-scoped context into the coroutine frame. This is why the capstone's RequestContext holds the span scope as a member rather than relying on TLS.</a:t>
+              <a:t>Thread-local storage is process-scoped but per-thread, which makes it a natural home for things like the active span — until coroutines. After a co_await, the coroutine may resume on a different thread, so anything you stashed in TLS before the suspension is gone. The fix is to capture request-scoped context into the coroutine frame. This is why the end-to-end example's RequestContext holds the span scope as a member rather than relying on TLS.</a:t>
             </a:r>
           </a:p>
         </p:txBody>
@@ -2007,7 +2007,7 @@
           <a:p>
             <a:r>
               <a:rPr sz="1200"/>
-              <a:t>The gRPC sync server is convenient but has a configuration trap: a blocking handler occupies a thread for its whole duration, so the server's thread pool size caps your concurrency. The ResourceQuota max-threads and the poller settings need to be sized from the CPU budget — too few and you serialize, too many and you throttle. The capstone shows the configuration; this is the knob people miss.</a:t>
+              <a:t>The gRPC sync server is convenient but has a configuration trap: a blocking handler occupies a thread for its whole duration, so the server's thread pool size caps your concurrency. The ResourceQuota max-threads and the poller settings need to be sized from the CPU budget — too few and you serialize, too many and you throttle. The end-to-end example shows the configuration; this is the knob people miss.</a:t>
             </a:r>
           </a:p>
         </p:txBody>
@@ -2362,7 +2362,7 @@
           <a:p>
             <a:r>
               <a:rPr sz="1200"/>
-              <a:t>The twelve-factor app methodology was written for interpreted, garbage-collected services. Most factors map onto C++ cleanly; three collide with C++ idioms and are worth dwelling on: Config, Processes, and Disposability.</a:t>
+              <a:t>The twelve-factor app methodology was written for interpreted, garbage-collected services. Most factors map onto C++ cleanly; three collide with C++ idioms: Config, Processes, and Disposability.</a:t>
             </a:r>
           </a:p>
         </p:txBody>
@@ -4214,7 +4214,7 @@
           <a:p>
             <a:r>
               <a:rPr sz="1200"/>
-              <a:t>Twelve numbered steps in main(), every one mapping back to a prior document. The point of the capstone isn't new ideas — it's showing that the patterns compose without friction. The handler reads a customer and product prices from Postgres, calls the tax service over gRPC with the request deadline propagated, and returns a priced order — idempotent on the client's key.</a:t>
+              <a:t>Twelve numbered steps in main(), every one mapping back to a prior document. The point of this example isn't new ideas — it's showing that the patterns compose without friction. The handler reads a customer and product prices from Postgres, calls the tax service over gRPC with the request deadline propagated, and returns a priced order — idempotent on the client's key.</a:t>
             </a:r>
           </a:p>
         </p:txBody>
@@ -4285,7 +4285,7 @@
           <a:p>
             <a:r>
               <a:rPr sz="1200"/>
-              <a:t>Honesty slide. The compendium document presents the full design including the OpenTelemetry tracing pipeline. The runnable companion stays on the verified gRPC trio and so represents some of that design as documented seams rather than built dependencies — most importantly, it emits no spans, so nothing reaches Tempo. The composition it DOES prove is the real value: request, process, and external scope fitting together with deadline propagation and idempotency.</a:t>
+              <a:t>Scope note. The compendium document presents the full design including the OpenTelemetry tracing pipeline. The runnable companion stays on the verified gRPC trio and so represents some of that design as documented seams rather than built dependencies — most importantly, it emits no spans, so nothing reaches Tempo. The composition it DOES prove is the real value: request, process, and external scope fitting together with deadline propagation and idempotency.</a:t>
             </a:r>
           </a:p>
         </p:txBody>
@@ -4356,7 +4356,7 @@
           <a:p>
             <a:r>
               <a:rPr sz="1200"/>
-              <a:t>The capstone's main() is twelve steps and every one maps to a prior document — config from 12-factor, CPU budget from threading, pools from externalization, the composition root from process scope, the staged health flip and signal handling from health &amp; shutdown. The shape is the same for any gRPC service in this stack; only the specific subsystems change. That reusability is the payoff of building the patterns in isolation first.</a:t>
+              <a:t>This example's main() is twelve steps and every one maps to a prior document — config from 12-factor, CPU budget from threading, pools from externalization, the composition root from process scope, the staged health flip and signal handling from health &amp; shutdown. The shape is the same for any gRPC service in this stack; only the specific subsystems change. That reusability is the payoff of building the patterns in isolation first.</a:t>
             </a:r>
           </a:p>
         </p:txBody>
@@ -5143,7 +5143,7 @@
           <a:p>
             <a:r>
               <a:rPr sz="1200"/>
-              <a:t>The State Architecture Table is the practical heart of the process-scope section, introduced here. The exercise is mechanical and clarifying: list every piece of state your service touches, and for each one decide its scope deliberately. Anything authoritative goes to deploy-time scope. Anything that's pure performance infrastructure — pools, caches, channels — is process scope, bounded and owned in main(). Anything per-request is request scope. Get this table right and statelessness falls out.</a:t>
+              <a:t>The State Architecture Table is the practical heart of the process-scope section, introduced here. The exercise is mechanical and clarifying: list every piece of state your service touches, and for each one decide its scope. Anything authoritative goes to deploy-time scope. Anything that's pure performance infrastructure — pools, caches, channels — is process scope, bounded and owned in main(). Anything per-request is request scope. Get this table right and statelessness falls out.</a:t>
             </a:r>
           </a:p>
         </p:txBody>
@@ -5285,7 +5285,7 @@
           <a:p>
             <a:r>
               <a:rPr sz="1200"/>
-              <a:t>The RequestContext is the single most reused pattern in the compendium — it shows up again in the PMR doc (the arena lives in it), the threading doc (the span scope is TLS-bound to it), and the capstone (the handler builds one per call). The key discipline: the destructor is the contract. You never write cleanup code in the handler body; you let scope exit run it.</a:t>
+              <a:t>The RequestContext is the single most reused pattern in the compendium — it shows up again in the PMR doc (the arena lives in it), the threading doc (the span scope is TLS-bound to it), and the end-to-end example (the handler builds one per call). The key discipline: the destructor is the contract. You never write cleanup code in the handler body; you let scope exit run it.</a:t>
             </a:r>
           </a:p>
         </p:txBody>
@@ -8634,7 +8634,7 @@
                 </a:solidFill>
                 <a:latin typeface="Consolas"/>
               </a:rPr>
-              <a:t>github.com/patterncatalyst/cpp-container-optimization-tutorial</a:t>
+              <a:t>github.com/patterncatalyst/cpp-statelessness</a:t>
             </a:r>
           </a:p>
         </p:txBody>
@@ -9621,7 +9621,7 @@
                 </a:solidFill>
                 <a:latin typeface="Calibri"/>
               </a:rPr>
-              <a:t>RAII gives you the basic guarantee for free; the strong guarantee is a design choice (copy-and-swap, build-then-commit).</a:t>
+              <a:t>RAII gives you the basic guarantee automatically; the strong guarantee is a design choice (copy-and-swap, build-then-commit).</a:t>
             </a:r>
           </a:p>
         </p:txBody>
@@ -10302,7 +10302,7 @@
                 </a:solidFill>
                 <a:latin typeface="Consolas"/>
               </a:rPr>
-              <a:t>  source on site: patterncatalyst.github.io/cpp-container-optimization-tutorial/examples/statelessness-02-raii/</a:t>
+              <a:t>  source on site: patterncatalyst.github.io/cpp-statelessness/examples/statelessness-02-raii/</a:t>
             </a:r>
           </a:p>
         </p:txBody>
@@ -12400,7 +12400,7 @@
                 </a:solidFill>
                 <a:latin typeface="Consolas"/>
               </a:rPr>
-              <a:t>  source on site: patterncatalyst.github.io/cpp-container-optimization-tutorial/examples/statelessness-03-pmr/</a:t>
+              <a:t>  source on site: patterncatalyst.github.io/cpp-statelessness/examples/statelessness-03-pmr/</a:t>
             </a:r>
           </a:p>
         </p:txBody>
@@ -13819,7 +13819,7 @@
                 </a:solidFill>
                 <a:latin typeface="Calibri"/>
               </a:rPr>
-              <a:t>The gRPC capstone</a:t>
+              <a:t>The gRPC end-to-end example</a:t>
             </a:r>
           </a:p>
         </p:txBody>
@@ -14474,7 +14474,7 @@
                 </a:solidFill>
                 <a:latin typeface="Calibri"/>
               </a:rPr>
-              <a:t>•  Reverse-order destruction at scope exit — teardown for free from RAII</a:t>
+              <a:t>•  Reverse-order destruction at scope exit — automatic teardown from RAII</a:t>
             </a:r>
           </a:p>
           <a:p>
@@ -18465,7 +18465,7 @@
                 </a:solidFill>
                 <a:latin typeface="Consolas"/>
               </a:rPr>
-              <a:t>  source on site: patterncatalyst.github.io/cpp-container-optimization-tutorial/examples/statelessness-05-threading/</a:t>
+              <a:t>  source on site: patterncatalyst.github.io/cpp-statelessness/examples/statelessness-05-threading/</a:t>
             </a:r>
           </a:p>
         </p:txBody>
@@ -21680,7 +21680,7 @@
                 </a:solidFill>
                 <a:latin typeface="Calibri"/>
               </a:rPr>
-              <a:t>Why statelessness is the load-bearing property</a:t>
+              <a:t>Why statelessness is the property everything depends on</a:t>
             </a:r>
           </a:p>
         </p:txBody>
@@ -23722,7 +23722,7 @@
                 </a:solidFill>
                 <a:latin typeface="Consolas"/>
               </a:rPr>
-              <a:t>  source on site: patterncatalyst.github.io/cpp-container-optimization-tutorial/examples/statelessness-07-outbox-pattern/</a:t>
+              <a:t>  source on site: patterncatalyst.github.io/cpp-statelessness/examples/statelessness-07-outbox-pattern/</a:t>
             </a:r>
           </a:p>
         </p:txBody>
@@ -25428,7 +25428,7 @@
                 </a:solidFill>
                 <a:latin typeface="Consolas"/>
               </a:rPr>
-              <a:t>  source on site: patterncatalyst.github.io/cpp-container-optimization-tutorial/examples/statelessness-08-ephemeral-filesystem/</a:t>
+              <a:t>  source on site: patterncatalyst.github.io/cpp-statelessness/examples/statelessness-08-ephemeral-filesystem/</a:t>
             </a:r>
           </a:p>
         </p:txBody>
@@ -27942,7 +27942,7 @@
                 </a:solidFill>
                 <a:latin typeface="Consolas"/>
               </a:rPr>
-              <a:t>  source on site: patterncatalyst.github.io/cpp-container-optimization-tutorial/examples/statelessness-09-health-checks/</a:t>
+              <a:t>  source on site: patterncatalyst.github.io/cpp-statelessness/examples/statelessness-09-health-checks/</a:t>
             </a:r>
           </a:p>
         </p:txBody>
@@ -28073,7 +28073,7 @@
                 </a:solidFill>
                 <a:latin typeface="Calibri"/>
               </a:rPr>
-              <a:t>The gRPC capstone</a:t>
+              <a:t>The gRPC end-to-end example</a:t>
             </a:r>
           </a:p>
         </p:txBody>
@@ -28247,7 +28247,7 @@
                 </a:solidFill>
                 <a:latin typeface="Calibri"/>
               </a:rPr>
-              <a:t>The gRPC capstone</a:t>
+              <a:t>The gRPC end-to-end example</a:t>
             </a:r>
           </a:p>
         </p:txBody>
@@ -28362,7 +28362,7 @@
                 </a:solidFill>
                 <a:latin typeface="Calibri"/>
               </a:rPr>
-              <a:t>Optimizing Modern C++ with Containers   |   The gRPC capstone</a:t>
+              <a:t>Optimizing Modern C++ with Containers   |   The gRPC end-to-end example</a:t>
             </a:r>
           </a:p>
         </p:txBody>
@@ -28679,7 +28679,7 @@
                 </a:solidFill>
                 <a:latin typeface="Calibri"/>
               </a:rPr>
-              <a:t>The gRPC capstone</a:t>
+              <a:t>The gRPC end-to-end example</a:t>
             </a:r>
           </a:p>
         </p:txBody>
@@ -28794,7 +28794,7 @@
                 </a:solidFill>
                 <a:latin typeface="Calibri"/>
               </a:rPr>
-              <a:t>Optimizing Modern C++ with Containers   |   The gRPC capstone</a:t>
+              <a:t>Optimizing Modern C++ with Containers   |   The gRPC end-to-end example</a:t>
             </a:r>
           </a:p>
         </p:txBody>
@@ -29087,7 +29087,7 @@
                 </a:solidFill>
                 <a:latin typeface="Calibri"/>
               </a:rPr>
-              <a:t>The gRPC capstone</a:t>
+              <a:t>The gRPC end-to-end example</a:t>
             </a:r>
           </a:p>
         </p:txBody>
@@ -29202,7 +29202,7 @@
                 </a:solidFill>
                 <a:latin typeface="Calibri"/>
               </a:rPr>
-              <a:t>Optimizing Modern C++ with Containers   |   The gRPC capstone</a:t>
+              <a:t>Optimizing Modern C++ with Containers   |   The gRPC end-to-end example</a:t>
             </a:r>
           </a:p>
         </p:txBody>
@@ -29677,7 +29677,7 @@
                 </a:solidFill>
                 <a:latin typeface="Calibri"/>
               </a:rPr>
-              <a:t>The gRPC capstone</a:t>
+              <a:t>The gRPC end-to-end example</a:t>
             </a:r>
           </a:p>
         </p:txBody>
@@ -29792,7 +29792,7 @@
                 </a:solidFill>
                 <a:latin typeface="Calibri"/>
               </a:rPr>
-              <a:t>Optimizing Modern C++ with Containers   |   The gRPC capstone</a:t>
+              <a:t>Optimizing Modern C++ with Containers   |   The gRPC end-to-end example</a:t>
             </a:r>
           </a:p>
         </p:txBody>
@@ -30530,7 +30530,7 @@
                 </a:solidFill>
                 <a:latin typeface="Calibri"/>
               </a:rPr>
-              <a:t>Demo — gRPC capstone</a:t>
+              <a:t>Demo — gRPC end-to-end example</a:t>
             </a:r>
           </a:p>
         </p:txBody>
@@ -30678,7 +30678,7 @@
                 </a:solidFill>
                 <a:latin typeface="Consolas"/>
               </a:rPr>
-              <a:t>  source on site: patterncatalyst.github.io/cpp-container-optimization-tutorial/examples/statelessness-10-grpc-microservices/</a:t>
+              <a:t>  source on site: patterncatalyst.github.io/cpp-statelessness/examples/statelessness-10-grpc-microservices/</a:t>
             </a:r>
           </a:p>
         </p:txBody>
@@ -32792,7 +32792,7 @@
                 </a:solidFill>
                 <a:latin typeface="Consolas"/>
               </a:rPr>
-              <a:t>  source on site: patterncatalyst.github.io/cpp-container-optimization-tutorial/examples/statelessness-11-build-tooling/</a:t>
+              <a:t>  source on site: patterncatalyst.github.io/cpp-statelessness/examples/statelessness-11-build-tooling/</a:t>
             </a:r>
           </a:p>
         </p:txBody>
@@ -33035,7 +33035,7 @@
                 </a:solidFill>
                 <a:latin typeface="Consolas"/>
               </a:rPr>
-              <a:t>github.com/patterncatalyst/cpp-container-optimization-tutorial</a:t>
+              <a:t>github.com/patterncatalyst/cpp-statelessness</a:t>
             </a:r>
           </a:p>
         </p:txBody>
@@ -33459,7 +33459,7 @@
                 </a:solidFill>
                 <a:latin typeface="Calibri"/>
               </a:rPr>
-              <a:t>The table is the design exercise: enumerate every piece of state and assign it a scope on purpose.</a:t>
+              <a:t>The table is the design exercise: enumerate every piece of state and assign it a scope.</a:t>
             </a:r>
           </a:p>
         </p:txBody>
@@ -34001,7 +34001,7 @@
                 </a:solidFill>
                 <a:latin typeface="Calibri"/>
               </a:rPr>
-              <a:t>•  Members destruct in reverse declaration order — cleanup ordering for free</a:t>
+              <a:t>•  Members destruct in reverse declaration order — cleanup ordering built in</a:t>
             </a:r>
           </a:p>
           <a:p>

--- a/presentation/cpp-statelessness-compendium.pptx
+++ b/presentation/cpp-statelessness-compendium.pptx
@@ -581,7 +581,7 @@
           <a:p>
             <a:r>
               <a:rPr sz="1200"/>
-              <a:t>Every pattern here has a runnable Podman demo, and examples 2 through 11 are host-verified end to end on Fedora 44. We'll cue each demo at the point its pattern is introduced.</a:t>
+              <a:t>Every pattern here has a runnable Docker demo, and examples 2 through 11 are host-verified end to end on Fedora 44. We'll cue each demo at the point its pattern is introduced.</a:t>
             </a:r>
           </a:p>
         </p:txBody>
@@ -3498,7 +3498,7 @@
           <a:p>
             <a:r>
               <a:rPr sz="1200"/>
-              <a:t>The flip side of the ephemeral-filesystem constraint is that it's a feature. Because nothing local accretes, a restart always returns you to a known-clean state — no half-written files, no disk slowly filling with logs, no drift between replicas. Rootless Podman adds a UID-mapping wrinkle for the writes you do allow, and Kubernetes lets you budget ephemeral-storage so a runaway tmpfs can't take the node down.</a:t>
+              <a:t>The flip side of the ephemeral-filesystem constraint is that it's a feature. Because nothing local accretes, a restart always returns you to a known-clean state — no half-written files, no disk slowly filling with logs, no drift between replicas. Rootless Docker adds a UID-mapping wrinkle for the writes you do allow, and Kubernetes lets you budget ephemeral-storage so a runaway tmpfs can't take the node down.</a:t>
             </a:r>
           </a:p>
         </p:txBody>
@@ -8287,7 +8287,7 @@
     <p:bg>
       <p:bgPr>
         <a:solidFill>
-          <a:srgbClr val="1A2B3C"/>
+          <a:srgbClr val="151515"/>
         </a:solidFill>
         <a:effectLst/>
       </p:bgPr>
@@ -8314,7 +8314,7 @@
             <a:avLst/>
           </a:prstGeom>
           <a:solidFill>
-            <a:srgbClr val="00BCD4"/>
+            <a:srgbClr val="EE0000"/>
           </a:solidFill>
           <a:ln>
             <a:noFill/>
@@ -8357,7 +8357,7 @@
             <a:avLst/>
           </a:prstGeom>
           <a:solidFill>
-            <a:srgbClr val="27AE60"/>
+            <a:srgbClr val="006E6E"/>
           </a:solidFill>
           <a:ln>
             <a:noFill/>
@@ -8400,7 +8400,7 @@
             <a:avLst/>
           </a:prstGeom>
           <a:solidFill>
-            <a:srgbClr val="9B59B6"/>
+            <a:srgbClr val="6A1B9A"/>
           </a:solidFill>
           <a:ln>
             <a:noFill/>
@@ -8454,9 +8454,9 @@
             <a:r>
               <a:rPr sz="2000" b="1" i="0">
                 <a:solidFill>
-                  <a:srgbClr val="00BCD4"/>
-                </a:solidFill>
-                <a:latin typeface="Calibri"/>
+                  <a:srgbClr val="EE0000"/>
+                </a:solidFill>
+                <a:latin typeface="Red Hat Display"/>
               </a:rPr>
               <a:t>STATELESSNESS COMPENDIUM</a:t>
             </a:r>
@@ -8491,7 +8491,7 @@
                 <a:solidFill>
                   <a:srgbClr val="FFFFFF"/>
                 </a:solidFill>
-                <a:latin typeface="Calibri"/>
+                <a:latin typeface="Red Hat Display"/>
               </a:rPr>
               <a:t>Stateless C++ Services
 Under Container Orchestration</a:t>
@@ -8525,9 +8525,9 @@
             <a:r>
               <a:rPr sz="1600" b="0" i="0">
                 <a:solidFill>
-                  <a:srgbClr val="ECF0F1"/>
-                </a:solidFill>
-                <a:latin typeface="Calibri"/>
+                  <a:srgbClr val="F4F4F4"/>
+                </a:solidFill>
+                <a:latin typeface="Red Hat Text"/>
               </a:rPr>
               <a:t>Request / process / deploy-time scope  •  RAII  •  PMR  •  pools  •  health &amp; shutdown  •  the gRPC capstone</a:t>
             </a:r>
@@ -8560,9 +8560,9 @@
             <a:r>
               <a:rPr sz="1400" b="0" i="1">
                 <a:solidFill>
-                  <a:srgbClr val="90A4AE"/>
-                </a:solidFill>
-                <a:latin typeface="Calibri"/>
+                  <a:srgbClr val="8A8A8A"/>
+                </a:solidFill>
+                <a:latin typeface="Red Hat Text"/>
               </a:rPr>
               <a:t>Companion deck to “Optimizing Modern C++ with Containers”  —  Docs 01–11</a:t>
             </a:r>
@@ -8595,11 +8595,11 @@
             <a:r>
               <a:rPr sz="1400" b="0" i="0">
                 <a:solidFill>
-                  <a:srgbClr val="00BCD4"/>
-                </a:solidFill>
-                <a:latin typeface="Calibri"/>
-              </a:rPr>
-              <a:t>Every pattern has a runnable Podman demo  —  02–11 host-verified</a:t>
+                  <a:srgbClr val="EE0000"/>
+                </a:solidFill>
+                <a:latin typeface="Red Hat Text"/>
+              </a:rPr>
+              <a:t>Every pattern has a runnable Docker demo  —  02–11 host-verified</a:t>
             </a:r>
           </a:p>
         </p:txBody>
@@ -8630,9 +8630,9 @@
             <a:r>
               <a:rPr sz="1100" b="0" i="0">
                 <a:solidFill>
-                  <a:srgbClr val="90A4AE"/>
-                </a:solidFill>
-                <a:latin typeface="Consolas"/>
+                  <a:srgbClr val="8A8A8A"/>
+                </a:solidFill>
+                <a:latin typeface="Red Hat Mono"/>
               </a:rPr>
               <a:t>github.com/patterncatalyst/cpp-statelessness</a:t>
             </a:r>
@@ -8680,7 +8680,7 @@
             <a:avLst/>
           </a:prstGeom>
           <a:solidFill>
-            <a:srgbClr val="1E6FC8"/>
+            <a:srgbClr val="EE0000"/>
           </a:solidFill>
           <a:ln>
             <a:noFill/>
@@ -8736,7 +8736,7 @@
                 <a:solidFill>
                   <a:srgbClr val="FFFFFF"/>
                 </a:solidFill>
-                <a:latin typeface="Calibri"/>
+                <a:latin typeface="Red Hat Display"/>
               </a:rPr>
               <a:t>RAII as the foundation</a:t>
             </a:r>
@@ -8760,7 +8760,7 @@
             </a:avLst>
           </a:prstGeom>
           <a:solidFill>
-            <a:srgbClr val="1A2B3C"/>
+            <a:srgbClr val="151515"/>
           </a:solidFill>
           <a:ln>
             <a:noFill/>
@@ -8816,7 +8816,7 @@
                 <a:solidFill>
                   <a:srgbClr val="FFFFFF"/>
                 </a:solidFill>
-                <a:latin typeface="Calibri"/>
+                <a:latin typeface="Red Hat Display"/>
               </a:rPr>
               <a:t>§2</a:t>
             </a:r>
@@ -8849,11 +8849,11 @@
             <a:r>
               <a:rPr sz="1100" b="0" i="0">
                 <a:solidFill>
-                  <a:srgbClr val="90A4AE"/>
-                </a:solidFill>
-                <a:latin typeface="Calibri"/>
-              </a:rPr>
-              <a:t>Optimizing Modern C++ with Containers   |   RAII as the foundation</a:t>
+                  <a:srgbClr val="8A8A8A"/>
+                </a:solidFill>
+                <a:latin typeface="Red Hat Text"/>
+              </a:rPr>
+              <a:t>Stateless C++ Services   |   RAII as the foundation</a:t>
             </a:r>
           </a:p>
         </p:txBody>
@@ -8884,9 +8884,9 @@
             <a:r>
               <a:rPr sz="1100" b="0" i="0">
                 <a:solidFill>
-                  <a:srgbClr val="90A4AE"/>
-                </a:solidFill>
-                <a:latin typeface="Calibri"/>
+                  <a:srgbClr val="8A8A8A"/>
+                </a:solidFill>
+                <a:latin typeface="Red Hat Text"/>
               </a:rPr>
               <a:t>10 / 67</a:t>
             </a:r>
@@ -8919,9 +8919,9 @@
             <a:r>
               <a:rPr sz="2800" b="1" i="0">
                 <a:solidFill>
-                  <a:srgbClr val="1A2B3C"/>
-                </a:solidFill>
-                <a:latin typeface="Calibri"/>
+                  <a:srgbClr val="151515"/>
+                </a:solidFill>
+                <a:latin typeface="Red Hat Display"/>
               </a:rPr>
               <a:t>Common RAII mistakes</a:t>
             </a:r>
@@ -8960,7 +8960,7 @@
                 <a:solidFill>
                   <a:srgbClr val="E84855"/>
                 </a:solidFill>
-                <a:latin typeface="Calibri"/>
+                <a:latin typeface="Red Hat Text"/>
               </a:rPr>
               <a:t>What breaks the guarantee</a:t>
             </a:r>
@@ -8976,7 +8976,7 @@
                 <a:solidFill>
                   <a:srgbClr val="1A2B3C"/>
                 </a:solidFill>
-                <a:latin typeface="Calibri"/>
+                <a:latin typeface="Red Hat Text"/>
               </a:rPr>
               <a:t>•  Throwing destructors — terminate() during stack unwind</a:t>
             </a:r>
@@ -8992,7 +8992,7 @@
                 <a:solidFill>
                   <a:srgbClr val="1A2B3C"/>
                 </a:solidFill>
-                <a:latin typeface="Calibri"/>
+                <a:latin typeface="Red Hat Text"/>
               </a:rPr>
               <a:t>•  Raw owning pointers — leak on the exception path</a:t>
             </a:r>
@@ -9008,7 +9008,7 @@
                 <a:solidFill>
                   <a:srgbClr val="1A2B3C"/>
                 </a:solidFill>
-                <a:latin typeface="Calibri"/>
+                <a:latin typeface="Red Hat Text"/>
               </a:rPr>
               <a:t>•  Manual try/catch cleanup — misses paths RAII wouldn't</a:t>
             </a:r>
@@ -9024,7 +9024,7 @@
                 <a:solidFill>
                   <a:srgbClr val="1A2B3C"/>
                 </a:solidFill>
-                <a:latin typeface="Calibri"/>
+                <a:latin typeface="Red Hat Text"/>
               </a:rPr>
               <a:t>•  Missing noexcept moves — silent pessimization or UB</a:t>
             </a:r>
@@ -9040,7 +9040,7 @@
                 <a:solidFill>
                   <a:srgbClr val="1A2B3C"/>
                 </a:solidFill>
-                <a:latin typeface="Calibri"/>
+                <a:latin typeface="Red Hat Text"/>
               </a:rPr>
               <a:t>•  Locks held across co_await — UB after suspension (the threading section)</a:t>
             </a:r>
@@ -9062,7 +9062,7 @@
             <a:avLst/>
           </a:prstGeom>
           <a:solidFill>
-            <a:srgbClr val="0D2137"/>
+            <a:srgbClr val="151515"/>
           </a:solidFill>
           <a:ln>
             <a:noFill/>
@@ -9115,9 +9115,9 @@
             <a:r>
               <a:rPr sz="1200">
                 <a:solidFill>
-                  <a:srgbClr val="ECF0F1"/>
-                </a:solidFill>
-                <a:latin typeface="Consolas"/>
+                  <a:srgbClr val="F4F4F4"/>
+                </a:solidFill>
+                <a:latin typeface="Red Hat Mono"/>
               </a:rPr>
               <a:t>// The shape that always cleans up:</a:t>
             </a:r>
@@ -9126,9 +9126,9 @@
             <a:r>
               <a:rPr sz="1200">
                 <a:solidFill>
-                  <a:srgbClr val="ECF0F1"/>
-                </a:solidFill>
-                <a:latin typeface="Consolas"/>
+                  <a:srgbClr val="F4F4F4"/>
+                </a:solidFill>
+                <a:latin typeface="Red Hat Mono"/>
               </a:rPr>
               <a:t>grpc::Status Handler(ServerContext* ctx,</a:t>
             </a:r>
@@ -9137,9 +9137,9 @@
             <a:r>
               <a:rPr sz="1200">
                 <a:solidFill>
-                  <a:srgbClr val="ECF0F1"/>
-                </a:solidFill>
-                <a:latin typeface="Consolas"/>
+                  <a:srgbClr val="F4F4F4"/>
+                </a:solidFill>
+                <a:latin typeface="Red Hat Mono"/>
               </a:rPr>
               <a:t>                     const Req* req, Resp* resp) {</a:t>
             </a:r>
@@ -9148,9 +9148,9 @@
             <a:r>
               <a:rPr sz="1200">
                 <a:solidFill>
-                  <a:srgbClr val="ECF0F1"/>
-                </a:solidFill>
-                <a:latin typeface="Consolas"/>
+                  <a:srgbClr val="F4F4F4"/>
+                </a:solidFill>
+                <a:latin typeface="Red Hat Mono"/>
               </a:rPr>
               <a:t>  try {</a:t>
             </a:r>
@@ -9159,9 +9159,9 @@
             <a:r>
               <a:rPr sz="1200">
                 <a:solidFill>
-                  <a:srgbClr val="ECF0F1"/>
-                </a:solidFill>
-                <a:latin typeface="Consolas"/>
+                  <a:srgbClr val="F4F4F4"/>
+                </a:solidFill>
+                <a:latin typeface="Red Hat Mono"/>
               </a:rPr>
               <a:t>    RequestContext rc{*ctx, req-&gt;correlation_id()};</a:t>
             </a:r>
@@ -9170,9 +9170,9 @@
             <a:r>
               <a:rPr sz="1200">
                 <a:solidFill>
-                  <a:srgbClr val="ECF0F1"/>
-                </a:solidFill>
-                <a:latin typeface="Consolas"/>
+                  <a:srgbClr val="F4F4F4"/>
+                </a:solidFill>
+                <a:latin typeface="Red Hat Mono"/>
               </a:rPr>
               <a:t>    // ... work; may throw grpc::Status or std::exception</a:t>
             </a:r>
@@ -9181,9 +9181,9 @@
             <a:r>
               <a:rPr sz="1200">
                 <a:solidFill>
-                  <a:srgbClr val="ECF0F1"/>
-                </a:solidFill>
-                <a:latin typeface="Consolas"/>
+                  <a:srgbClr val="F4F4F4"/>
+                </a:solidFill>
+                <a:latin typeface="Red Hat Mono"/>
               </a:rPr>
               <a:t>    return grpc::Status::OK;       // rc destructs here</a:t>
             </a:r>
@@ -9192,9 +9192,9 @@
             <a:r>
               <a:rPr sz="1200">
                 <a:solidFill>
-                  <a:srgbClr val="ECF0F1"/>
-                </a:solidFill>
-                <a:latin typeface="Consolas"/>
+                  <a:srgbClr val="F4F4F4"/>
+                </a:solidFill>
+                <a:latin typeface="Red Hat Mono"/>
               </a:rPr>
               <a:t>  } catch (const grpc::Status&amp; s) {  // ...and here</a:t>
             </a:r>
@@ -9203,9 +9203,9 @@
             <a:r>
               <a:rPr sz="1200">
                 <a:solidFill>
-                  <a:srgbClr val="ECF0F1"/>
-                </a:solidFill>
-                <a:latin typeface="Consolas"/>
+                  <a:srgbClr val="F4F4F4"/>
+                </a:solidFill>
+                <a:latin typeface="Red Hat Mono"/>
               </a:rPr>
               <a:t>    return s;                        // ...and here</a:t>
             </a:r>
@@ -9214,9 +9214,9 @@
             <a:r>
               <a:rPr sz="1200">
                 <a:solidFill>
-                  <a:srgbClr val="ECF0F1"/>
-                </a:solidFill>
-                <a:latin typeface="Consolas"/>
+                  <a:srgbClr val="F4F4F4"/>
+                </a:solidFill>
+                <a:latin typeface="Red Hat Mono"/>
               </a:rPr>
               <a:t>  }</a:t>
             </a:r>
@@ -9225,9 +9225,9 @@
             <a:r>
               <a:rPr sz="1200">
                 <a:solidFill>
-                  <a:srgbClr val="ECF0F1"/>
-                </a:solidFill>
-                <a:latin typeface="Consolas"/>
+                  <a:srgbClr val="F4F4F4"/>
+                </a:solidFill>
+                <a:latin typeface="Red Hat Mono"/>
               </a:rPr>
               <a:t>}  // destructor runs on EVERY path</a:t>
             </a:r>
@@ -9275,7 +9275,7 @@
             <a:avLst/>
           </a:prstGeom>
           <a:solidFill>
-            <a:srgbClr val="1E6FC8"/>
+            <a:srgbClr val="EE0000"/>
           </a:solidFill>
           <a:ln>
             <a:noFill/>
@@ -9331,7 +9331,7 @@
                 <a:solidFill>
                   <a:srgbClr val="FFFFFF"/>
                 </a:solidFill>
-                <a:latin typeface="Calibri"/>
+                <a:latin typeface="Red Hat Display"/>
               </a:rPr>
               <a:t>RAII as the foundation</a:t>
             </a:r>
@@ -9355,7 +9355,7 @@
             </a:avLst>
           </a:prstGeom>
           <a:solidFill>
-            <a:srgbClr val="1A2B3C"/>
+            <a:srgbClr val="151515"/>
           </a:solidFill>
           <a:ln>
             <a:noFill/>
@@ -9411,7 +9411,7 @@
                 <a:solidFill>
                   <a:srgbClr val="FFFFFF"/>
                 </a:solidFill>
-                <a:latin typeface="Calibri"/>
+                <a:latin typeface="Red Hat Display"/>
               </a:rPr>
               <a:t>§2</a:t>
             </a:r>
@@ -9444,11 +9444,11 @@
             <a:r>
               <a:rPr sz="1100" b="0" i="0">
                 <a:solidFill>
-                  <a:srgbClr val="90A4AE"/>
-                </a:solidFill>
-                <a:latin typeface="Calibri"/>
-              </a:rPr>
-              <a:t>Optimizing Modern C++ with Containers   |   RAII as the foundation</a:t>
+                  <a:srgbClr val="8A8A8A"/>
+                </a:solidFill>
+                <a:latin typeface="Red Hat Text"/>
+              </a:rPr>
+              <a:t>Stateless C++ Services   |   RAII as the foundation</a:t>
             </a:r>
           </a:p>
         </p:txBody>
@@ -9479,9 +9479,9 @@
             <a:r>
               <a:rPr sz="1100" b="0" i="0">
                 <a:solidFill>
-                  <a:srgbClr val="90A4AE"/>
-                </a:solidFill>
-                <a:latin typeface="Calibri"/>
+                  <a:srgbClr val="8A8A8A"/>
+                </a:solidFill>
+                <a:latin typeface="Red Hat Text"/>
               </a:rPr>
               <a:t>11 / 67</a:t>
             </a:r>
@@ -9514,9 +9514,9 @@
             <a:r>
               <a:rPr sz="2800" b="1" i="0">
                 <a:solidFill>
-                  <a:srgbClr val="1A2B3C"/>
-                </a:solidFill>
-                <a:latin typeface="Calibri"/>
+                  <a:srgbClr val="151515"/>
+                </a:solidFill>
+                <a:latin typeface="Red Hat Display"/>
               </a:rPr>
               <a:t>The three exception-safety guarantees</a:t>
             </a:r>
@@ -9555,7 +9555,7 @@
                 <a:solidFill>
                   <a:srgbClr val="27AE60"/>
                 </a:solidFill>
-                <a:latin typeface="Calibri"/>
+                <a:latin typeface="Red Hat Text"/>
               </a:rPr>
               <a:t>What a function promises when it throws</a:t>
             </a:r>
@@ -9571,7 +9571,7 @@
                 <a:solidFill>
                   <a:srgbClr val="1A2B3C"/>
                 </a:solidFill>
-                <a:latin typeface="Calibri"/>
+                <a:latin typeface="Red Hat Text"/>
               </a:rPr>
               <a:t>•  Nothrow — never throws (destructors, swap, moves); the strongest</a:t>
             </a:r>
@@ -9587,7 +9587,7 @@
                 <a:solidFill>
                   <a:srgbClr val="1A2B3C"/>
                 </a:solidFill>
-                <a:latin typeface="Calibri"/>
+                <a:latin typeface="Red Hat Text"/>
               </a:rPr>
               <a:t>•  Strong — throws → state unchanged, as if the call never happened</a:t>
             </a:r>
@@ -9603,7 +9603,7 @@
                 <a:solidFill>
                   <a:srgbClr val="1A2B3C"/>
                 </a:solidFill>
-                <a:latin typeface="Calibri"/>
+                <a:latin typeface="Red Hat Text"/>
               </a:rPr>
               <a:t>•  Basic — throws → invariants hold, no leaks, but state may have moved</a:t>
             </a:r>
@@ -9619,7 +9619,7 @@
                 <a:solidFill>
                   <a:srgbClr val="90A4AE"/>
                 </a:solidFill>
-                <a:latin typeface="Calibri"/>
+                <a:latin typeface="Red Hat Text"/>
               </a:rPr>
               <a:t>RAII gives you the basic guarantee automatically; the strong guarantee is a design choice (copy-and-swap, build-then-commit).</a:t>
             </a:r>
@@ -9667,7 +9667,7 @@
             <a:avLst/>
           </a:prstGeom>
           <a:solidFill>
-            <a:srgbClr val="1E6FC8"/>
+            <a:srgbClr val="EE0000"/>
           </a:solidFill>
           <a:ln>
             <a:noFill/>
@@ -9723,7 +9723,7 @@
                 <a:solidFill>
                   <a:srgbClr val="FFFFFF"/>
                 </a:solidFill>
-                <a:latin typeface="Calibri"/>
+                <a:latin typeface="Red Hat Display"/>
               </a:rPr>
               <a:t>RAII as the foundation</a:t>
             </a:r>
@@ -9747,7 +9747,7 @@
             </a:avLst>
           </a:prstGeom>
           <a:solidFill>
-            <a:srgbClr val="1A2B3C"/>
+            <a:srgbClr val="151515"/>
           </a:solidFill>
           <a:ln>
             <a:noFill/>
@@ -9803,7 +9803,7 @@
                 <a:solidFill>
                   <a:srgbClr val="FFFFFF"/>
                 </a:solidFill>
-                <a:latin typeface="Calibri"/>
+                <a:latin typeface="Red Hat Display"/>
               </a:rPr>
               <a:t>§2</a:t>
             </a:r>
@@ -9836,11 +9836,11 @@
             <a:r>
               <a:rPr sz="1100" b="0" i="0">
                 <a:solidFill>
-                  <a:srgbClr val="90A4AE"/>
-                </a:solidFill>
-                <a:latin typeface="Calibri"/>
-              </a:rPr>
-              <a:t>Optimizing Modern C++ with Containers   |   RAII as the foundation</a:t>
+                  <a:srgbClr val="8A8A8A"/>
+                </a:solidFill>
+                <a:latin typeface="Red Hat Text"/>
+              </a:rPr>
+              <a:t>Stateless C++ Services   |   RAII as the foundation</a:t>
             </a:r>
           </a:p>
         </p:txBody>
@@ -9871,9 +9871,9 @@
             <a:r>
               <a:rPr sz="1100" b="0" i="0">
                 <a:solidFill>
-                  <a:srgbClr val="90A4AE"/>
-                </a:solidFill>
-                <a:latin typeface="Calibri"/>
+                  <a:srgbClr val="8A8A8A"/>
+                </a:solidFill>
+                <a:latin typeface="Red Hat Text"/>
               </a:rPr>
               <a:t>12 / 67</a:t>
             </a:r>
@@ -9906,9 +9906,9 @@
             <a:r>
               <a:rPr sz="2800" b="1" i="0">
                 <a:solidFill>
-                  <a:srgbClr val="1A2B3C"/>
-                </a:solidFill>
-                <a:latin typeface="Calibri"/>
+                  <a:srgbClr val="151515"/>
+                </a:solidFill>
+                <a:latin typeface="Red Hat Display"/>
               </a:rPr>
               <a:t>Construction cost on the hot path</a:t>
             </a:r>
@@ -9947,7 +9947,7 @@
                 <a:solidFill>
                   <a:srgbClr val="F5A623"/>
                 </a:solidFill>
-                <a:latin typeface="Calibri"/>
+                <a:latin typeface="Red Hat Text"/>
               </a:rPr>
               <a:t>RAII is free; what you put in it may not be</a:t>
             </a:r>
@@ -9963,7 +9963,7 @@
                 <a:solidFill>
                   <a:srgbClr val="1A2B3C"/>
                 </a:solidFill>
-                <a:latin typeface="Calibri"/>
+                <a:latin typeface="Red Hat Text"/>
               </a:rPr>
               <a:t>•  The RequestContext itself is near-zero — members init in place</a:t>
             </a:r>
@@ -9979,7 +9979,7 @@
                 <a:solidFill>
                   <a:srgbClr val="1A2B3C"/>
                 </a:solidFill>
-                <a:latin typeface="Calibri"/>
+                <a:latin typeface="Red Hat Text"/>
               </a:rPr>
               <a:t>•  A std::string member under 15 bytes (libstdc++ SBO) costs no allocation</a:t>
             </a:r>
@@ -9995,7 +9995,7 @@
                 <a:solidFill>
                   <a:srgbClr val="1A2B3C"/>
                 </a:solidFill>
-                <a:latin typeface="Calibri"/>
+                <a:latin typeface="Red Hat Text"/>
               </a:rPr>
               <a:t>•  A std::map member allocates a node per insert; prefer flat/pmr</a:t>
             </a:r>
@@ -10011,7 +10011,7 @@
                 <a:solidFill>
                   <a:srgbClr val="1A2B3C"/>
                 </a:solidFill>
-                <a:latin typeface="Calibri"/>
+                <a:latin typeface="Red Hat Text"/>
               </a:rPr>
               <a:t>•  Measure the constructor: it runs on every request, in the latency path</a:t>
             </a:r>
@@ -10032,7 +10032,7 @@
     <p:bg>
       <p:bgPr>
         <a:solidFill>
-          <a:srgbClr val="0A1628"/>
+          <a:srgbClr val="AB0000"/>
         </a:solidFill>
         <a:effectLst/>
       </p:bgPr>
@@ -10061,7 +10061,7 @@
             </a:avLst>
           </a:prstGeom>
           <a:solidFill>
-            <a:srgbClr val="27AE60"/>
+            <a:srgbClr val="FFA000"/>
           </a:solidFill>
           <a:ln>
             <a:noFill/>
@@ -10117,7 +10117,7 @@
                 <a:solidFill>
                   <a:srgbClr val="FFFFFF"/>
                 </a:solidFill>
-                <a:latin typeface="Calibri"/>
+                <a:latin typeface="Red Hat Display"/>
               </a:rPr>
               <a:t>▶ DEMO 02</a:t>
             </a:r>
@@ -10152,7 +10152,7 @@
                 <a:solidFill>
                   <a:srgbClr val="FFFFFF"/>
                 </a:solidFill>
-                <a:latin typeface="Calibri"/>
+                <a:latin typeface="Red Hat Display"/>
               </a:rPr>
               <a:t>Demo — RequestContext RAII</a:t>
             </a:r>
@@ -10185,9 +10185,9 @@
             <a:r>
               <a:rPr sz="2000" b="0" i="0">
                 <a:solidFill>
-                  <a:srgbClr val="ECF0F1"/>
-                </a:solidFill>
-                <a:latin typeface="Calibri"/>
+                  <a:srgbClr val="F4F4F4"/>
+                </a:solidFill>
+                <a:latin typeface="Red Hat Text"/>
               </a:rPr>
               <a:t>A gRPC handler builds a RequestContext on entry, then takes one of three exit paths — normal return, early return, and throw. Logging in the destructor proves it fires on all three. RAII cleanup made visible.</a:t>
             </a:r>
@@ -10209,7 +10209,7 @@
             <a:avLst/>
           </a:prstGeom>
           <a:solidFill>
-            <a:srgbClr val="0D2137"/>
+            <a:srgbClr val="151515"/>
           </a:solidFill>
           <a:ln>
             <a:noFill/>
@@ -10263,9 +10263,9 @@
             <a:r>
               <a:rPr sz="1800" b="0" i="0">
                 <a:solidFill>
-                  <a:srgbClr val="00BCD4"/>
-                </a:solidFill>
-                <a:latin typeface="Consolas"/>
+                  <a:srgbClr val="EE0000"/>
+                </a:solidFill>
+                <a:latin typeface="Red Hat Mono"/>
               </a:rPr>
               <a:t>$ cd examples/statelessness/02-raii &amp;&amp; ./demo.sh</a:t>
             </a:r>
@@ -10298,9 +10298,9 @@
             <a:r>
               <a:rPr sz="1100" b="0" i="0">
                 <a:solidFill>
-                  <a:srgbClr val="90A4AE"/>
-                </a:solidFill>
-                <a:latin typeface="Consolas"/>
+                  <a:srgbClr val="8A8A8A"/>
+                </a:solidFill>
+                <a:latin typeface="Red Hat Mono"/>
               </a:rPr>
               <a:t>  source on site: patterncatalyst.github.io/cpp-statelessness/examples/statelessness-02-raii/</a:t>
             </a:r>
@@ -10333,9 +10333,9 @@
             <a:r>
               <a:rPr sz="1100" b="0" i="0">
                 <a:solidFill>
-                  <a:srgbClr val="90A4AE"/>
-                </a:solidFill>
-                <a:latin typeface="Calibri"/>
+                  <a:srgbClr val="8A8A8A"/>
+                </a:solidFill>
+                <a:latin typeface="Red Hat Text"/>
               </a:rPr>
               <a:t>13 / 67</a:t>
             </a:r>
@@ -10356,7 +10356,7 @@
     <p:bg>
       <p:bgPr>
         <a:solidFill>
-          <a:srgbClr val="0A1628"/>
+          <a:srgbClr val="AB0000"/>
         </a:solidFill>
         <a:effectLst/>
       </p:bgPr>
@@ -10394,9 +10394,9 @@
             <a:r>
               <a:rPr sz="18000" b="1" i="0">
                 <a:solidFill>
-                  <a:srgbClr val="00BCD4"/>
-                </a:solidFill>
-                <a:latin typeface="Calibri"/>
+                  <a:srgbClr val="EE0000"/>
+                </a:solidFill>
+                <a:latin typeface="Red Hat Display"/>
               </a:rPr>
               <a:t>§3</a:t>
             </a:r>
@@ -10431,7 +10431,7 @@
                 <a:solidFill>
                   <a:srgbClr val="FFFFFF"/>
                 </a:solidFill>
-                <a:latin typeface="Calibri"/>
+                <a:latin typeface="Red Hat Display"/>
               </a:rPr>
               <a:t>PMR: request brings its own memory</a:t>
             </a:r>
@@ -10464,9 +10464,9 @@
             <a:r>
               <a:rPr sz="2000" b="0" i="1">
                 <a:solidFill>
-                  <a:srgbClr val="90A4AE"/>
-                </a:solidFill>
-                <a:latin typeface="Calibri"/>
+                  <a:srgbClr val="8A8A8A"/>
+                </a:solidFill>
+                <a:latin typeface="Red Hat Text"/>
               </a:rPr>
               <a:t>monotonic_buffer_resource as architectural statelessness.</a:t>
             </a:r>
@@ -10499,9 +10499,9 @@
             <a:r>
               <a:rPr sz="1100" b="0" i="0">
                 <a:solidFill>
-                  <a:srgbClr val="90A4AE"/>
-                </a:solidFill>
-                <a:latin typeface="Calibri"/>
+                  <a:srgbClr val="8A8A8A"/>
+                </a:solidFill>
+                <a:latin typeface="Red Hat Text"/>
               </a:rPr>
               <a:t>14 / 67</a:t>
             </a:r>
@@ -10549,7 +10549,7 @@
             <a:avLst/>
           </a:prstGeom>
           <a:solidFill>
-            <a:srgbClr val="1E6FC8"/>
+            <a:srgbClr val="EE0000"/>
           </a:solidFill>
           <a:ln>
             <a:noFill/>
@@ -10605,7 +10605,7 @@
                 <a:solidFill>
                   <a:srgbClr val="FFFFFF"/>
                 </a:solidFill>
-                <a:latin typeface="Calibri"/>
+                <a:latin typeface="Red Hat Display"/>
               </a:rPr>
               <a:t>PMR: request brings its own memory</a:t>
             </a:r>
@@ -10629,7 +10629,7 @@
             </a:avLst>
           </a:prstGeom>
           <a:solidFill>
-            <a:srgbClr val="1A2B3C"/>
+            <a:srgbClr val="151515"/>
           </a:solidFill>
           <a:ln>
             <a:noFill/>
@@ -10685,7 +10685,7 @@
                 <a:solidFill>
                   <a:srgbClr val="FFFFFF"/>
                 </a:solidFill>
-                <a:latin typeface="Calibri"/>
+                <a:latin typeface="Red Hat Display"/>
               </a:rPr>
               <a:t>§3</a:t>
             </a:r>
@@ -10718,11 +10718,11 @@
             <a:r>
               <a:rPr sz="1100" b="0" i="0">
                 <a:solidFill>
-                  <a:srgbClr val="90A4AE"/>
-                </a:solidFill>
-                <a:latin typeface="Calibri"/>
-              </a:rPr>
-              <a:t>Optimizing Modern C++ with Containers   |   PMR: request brings its own memory</a:t>
+                  <a:srgbClr val="8A8A8A"/>
+                </a:solidFill>
+                <a:latin typeface="Red Hat Text"/>
+              </a:rPr>
+              <a:t>Stateless C++ Services   |   PMR: request brings its own memory</a:t>
             </a:r>
           </a:p>
         </p:txBody>
@@ -10753,9 +10753,9 @@
             <a:r>
               <a:rPr sz="1100" b="0" i="0">
                 <a:solidFill>
-                  <a:srgbClr val="90A4AE"/>
-                </a:solidFill>
-                <a:latin typeface="Calibri"/>
+                  <a:srgbClr val="8A8A8A"/>
+                </a:solidFill>
+                <a:latin typeface="Red Hat Text"/>
               </a:rPr>
               <a:t>15 / 67</a:t>
             </a:r>
@@ -10788,9 +10788,9 @@
             <a:r>
               <a:rPr sz="2800" b="1" i="0">
                 <a:solidFill>
-                  <a:srgbClr val="1A2B3C"/>
-                </a:solidFill>
-                <a:latin typeface="Calibri"/>
+                  <a:srgbClr val="151515"/>
+                </a:solidFill>
+                <a:latin typeface="Red Hat Display"/>
               </a:rPr>
               <a:t>The layered arena recipe</a:t>
             </a:r>
@@ -10829,7 +10829,7 @@
                 <a:solidFill>
                   <a:srgbClr val="1E6FC8"/>
                 </a:solidFill>
-                <a:latin typeface="Calibri"/>
+                <a:latin typeface="Red Hat Text"/>
               </a:rPr>
               <a:t>monotonic buffer + pool resource</a:t>
             </a:r>
@@ -10845,7 +10845,7 @@
                 <a:solidFill>
                   <a:srgbClr val="1A2B3C"/>
                 </a:solidFill>
-                <a:latin typeface="Calibri"/>
+                <a:latin typeface="Red Hat Text"/>
               </a:rPr>
               <a:t>•  A fixed on-stack/in-object buffer fronts a monotonic_buffer_resource</a:t>
             </a:r>
@@ -10861,7 +10861,7 @@
                 <a:solidFill>
                   <a:srgbClr val="1A2B3C"/>
                 </a:solidFill>
-                <a:latin typeface="Calibri"/>
+                <a:latin typeface="Red Hat Text"/>
               </a:rPr>
               <a:t>•  An unsynchronized_pool_resource layers on top for varied block sizes</a:t>
             </a:r>
@@ -10877,7 +10877,7 @@
                 <a:solidFill>
                   <a:srgbClr val="1A2B3C"/>
                 </a:solidFill>
-                <a:latin typeface="Calibri"/>
+                <a:latin typeface="Red Hat Text"/>
               </a:rPr>
               <a:t>•  Per-request pmr::vector / pmr::string allocate from the arena</a:t>
             </a:r>
@@ -10893,7 +10893,7 @@
                 <a:solidFill>
                   <a:srgbClr val="1A2B3C"/>
                 </a:solidFill>
-                <a:latin typeface="Calibri"/>
+                <a:latin typeface="Red Hat Text"/>
               </a:rPr>
               <a:t>•  Destruction asymmetry: individual frees are no-ops; the whole arena is reclaimed at once</a:t>
             </a:r>
@@ -10965,7 +10965,7 @@
             <a:avLst/>
           </a:prstGeom>
           <a:solidFill>
-            <a:srgbClr val="1E6FC8"/>
+            <a:srgbClr val="EE0000"/>
           </a:solidFill>
           <a:ln>
             <a:noFill/>
@@ -11021,7 +11021,7 @@
                 <a:solidFill>
                   <a:srgbClr val="FFFFFF"/>
                 </a:solidFill>
-                <a:latin typeface="Calibri"/>
+                <a:latin typeface="Red Hat Display"/>
               </a:rPr>
               <a:t>PMR: request brings its own memory</a:t>
             </a:r>
@@ -11045,7 +11045,7 @@
             </a:avLst>
           </a:prstGeom>
           <a:solidFill>
-            <a:srgbClr val="1A2B3C"/>
+            <a:srgbClr val="151515"/>
           </a:solidFill>
           <a:ln>
             <a:noFill/>
@@ -11101,7 +11101,7 @@
                 <a:solidFill>
                   <a:srgbClr val="FFFFFF"/>
                 </a:solidFill>
-                <a:latin typeface="Calibri"/>
+                <a:latin typeface="Red Hat Display"/>
               </a:rPr>
               <a:t>§3</a:t>
             </a:r>
@@ -11134,11 +11134,11 @@
             <a:r>
               <a:rPr sz="1100" b="0" i="0">
                 <a:solidFill>
-                  <a:srgbClr val="90A4AE"/>
-                </a:solidFill>
-                <a:latin typeface="Calibri"/>
-              </a:rPr>
-              <a:t>Optimizing Modern C++ with Containers   |   PMR: request brings its own memory</a:t>
+                  <a:srgbClr val="8A8A8A"/>
+                </a:solidFill>
+                <a:latin typeface="Red Hat Text"/>
+              </a:rPr>
+              <a:t>Stateless C++ Services   |   PMR: request brings its own memory</a:t>
             </a:r>
           </a:p>
         </p:txBody>
@@ -11169,9 +11169,9 @@
             <a:r>
               <a:rPr sz="1100" b="0" i="0">
                 <a:solidFill>
-                  <a:srgbClr val="90A4AE"/>
-                </a:solidFill>
-                <a:latin typeface="Calibri"/>
+                  <a:srgbClr val="8A8A8A"/>
+                </a:solidFill>
+                <a:latin typeface="Red Hat Text"/>
               </a:rPr>
               <a:t>16 / 67</a:t>
             </a:r>
@@ -11204,9 +11204,9 @@
             <a:r>
               <a:rPr sz="2800" b="1" i="0">
                 <a:solidFill>
-                  <a:srgbClr val="1A2B3C"/>
-                </a:solidFill>
-                <a:latin typeface="Calibri"/>
+                  <a:srgbClr val="151515"/>
+                </a:solidFill>
+                <a:latin typeface="Red Hat Display"/>
               </a:rPr>
               <a:t>The lifetime trap</a:t>
             </a:r>
@@ -11245,7 +11245,7 @@
                 <a:solidFill>
                   <a:srgbClr val="E84855"/>
                 </a:solidFill>
-                <a:latin typeface="Calibri"/>
+                <a:latin typeface="Red Hat Text"/>
               </a:rPr>
               <a:t>The one rule PMR makes easy to break</a:t>
             </a:r>
@@ -11261,7 +11261,7 @@
                 <a:solidFill>
                   <a:srgbClr val="1A2B3C"/>
                 </a:solidFill>
-                <a:latin typeface="Calibri"/>
+                <a:latin typeface="Red Hat Text"/>
               </a:rPr>
               <a:t>•  A pmr container must not outlive its memory_resource</a:t>
             </a:r>
@@ -11277,7 +11277,7 @@
                 <a:solidFill>
                   <a:srgbClr val="1A2B3C"/>
                 </a:solidFill>
-                <a:latin typeface="Calibri"/>
+                <a:latin typeface="Red Hat Text"/>
               </a:rPr>
               <a:t>•  Return a pmr::string built in a request arena → dangling after the arena dies</a:t>
             </a:r>
@@ -11293,7 +11293,7 @@
                 <a:solidFill>
                   <a:srgbClr val="1A2B3C"/>
                 </a:solidFill>
-                <a:latin typeface="Calibri"/>
+                <a:latin typeface="Red Hat Text"/>
               </a:rPr>
               <a:t>•  Caught immediately under AddressSanitizer (the dev profile)</a:t>
             </a:r>
@@ -11309,7 +11309,7 @@
                 <a:solidFill>
                   <a:srgbClr val="90A4AE"/>
                 </a:solidFill>
-                <a:latin typeface="Calibri"/>
+                <a:latin typeface="Red Hat Text"/>
               </a:rPr>
               <a:t>Fix: return owning std:: types across the scope boundary, or keep the value inside the arena's lifetime.</a:t>
             </a:r>
@@ -11357,7 +11357,7 @@
             <a:avLst/>
           </a:prstGeom>
           <a:solidFill>
-            <a:srgbClr val="1E6FC8"/>
+            <a:srgbClr val="EE0000"/>
           </a:solidFill>
           <a:ln>
             <a:noFill/>
@@ -11413,7 +11413,7 @@
                 <a:solidFill>
                   <a:srgbClr val="FFFFFF"/>
                 </a:solidFill>
-                <a:latin typeface="Calibri"/>
+                <a:latin typeface="Red Hat Display"/>
               </a:rPr>
               <a:t>PMR: request brings its own memory</a:t>
             </a:r>
@@ -11437,7 +11437,7 @@
             </a:avLst>
           </a:prstGeom>
           <a:solidFill>
-            <a:srgbClr val="1A2B3C"/>
+            <a:srgbClr val="151515"/>
           </a:solidFill>
           <a:ln>
             <a:noFill/>
@@ -11493,7 +11493,7 @@
                 <a:solidFill>
                   <a:srgbClr val="FFFFFF"/>
                 </a:solidFill>
-                <a:latin typeface="Calibri"/>
+                <a:latin typeface="Red Hat Display"/>
               </a:rPr>
               <a:t>§3</a:t>
             </a:r>
@@ -11526,11 +11526,11 @@
             <a:r>
               <a:rPr sz="1100" b="0" i="0">
                 <a:solidFill>
-                  <a:srgbClr val="90A4AE"/>
-                </a:solidFill>
-                <a:latin typeface="Calibri"/>
-              </a:rPr>
-              <a:t>Optimizing Modern C++ with Containers   |   PMR: request brings its own memory</a:t>
+                  <a:srgbClr val="8A8A8A"/>
+                </a:solidFill>
+                <a:latin typeface="Red Hat Text"/>
+              </a:rPr>
+              <a:t>Stateless C++ Services   |   PMR: request brings its own memory</a:t>
             </a:r>
           </a:p>
         </p:txBody>
@@ -11561,9 +11561,9 @@
             <a:r>
               <a:rPr sz="1100" b="0" i="0">
                 <a:solidFill>
-                  <a:srgbClr val="90A4AE"/>
-                </a:solidFill>
-                <a:latin typeface="Calibri"/>
+                  <a:srgbClr val="8A8A8A"/>
+                </a:solidFill>
+                <a:latin typeface="Red Hat Text"/>
               </a:rPr>
               <a:t>17 / 67</a:t>
             </a:r>
@@ -11596,9 +11596,9 @@
             <a:r>
               <a:rPr sz="2800" b="1" i="0">
                 <a:solidFill>
-                  <a:srgbClr val="1A2B3C"/>
-                </a:solidFill>
-                <a:latin typeface="Calibri"/>
+                  <a:srgbClr val="151515"/>
+                </a:solidFill>
+                <a:latin typeface="Red Hat Display"/>
               </a:rPr>
               <a:t>Which container, on PMR?</a:t>
             </a:r>
@@ -11637,7 +11637,7 @@
                 <a:solidFill>
                   <a:srgbClr val="27AE60"/>
                 </a:solidFill>
-                <a:latin typeface="Calibri"/>
+                <a:latin typeface="Red Hat Text"/>
               </a:rPr>
               <a:t>std:: containers that take a memory_resource</a:t>
             </a:r>
@@ -11653,7 +11653,7 @@
                 <a:solidFill>
                   <a:srgbClr val="1A2B3C"/>
                 </a:solidFill>
-                <a:latin typeface="Calibri"/>
+                <a:latin typeface="Red Hat Text"/>
               </a:rPr>
               <a:t>•  pmr::vector — the workhorse; contiguous, arena-allocated</a:t>
             </a:r>
@@ -11669,7 +11669,7 @@
                 <a:solidFill>
                   <a:srgbClr val="1A2B3C"/>
                 </a:solidFill>
-                <a:latin typeface="Calibri"/>
+                <a:latin typeface="Red Hat Text"/>
               </a:rPr>
               <a:t>•  pmr::string — short ids and scratch text without the global allocator</a:t>
             </a:r>
@@ -11685,7 +11685,7 @@
                 <a:solidFill>
                   <a:srgbClr val="1A2B3C"/>
                 </a:solidFill>
-                <a:latin typeface="Calibri"/>
+                <a:latin typeface="Red Hat Text"/>
               </a:rPr>
               <a:t>•  pmr::unordered_map — per-request lookups; nodes in the arena</a:t>
             </a:r>
@@ -11701,7 +11701,7 @@
                 <a:solidFill>
                   <a:srgbClr val="1A2B3C"/>
                 </a:solidFill>
-                <a:latin typeface="Calibri"/>
+                <a:latin typeface="Red Hat Text"/>
               </a:rPr>
               <a:t>•  pmr::flat_map (C++23) — sorted, cache-friendly, fewer allocations</a:t>
             </a:r>
@@ -11717,7 +11717,7 @@
                 <a:solidFill>
                   <a:srgbClr val="90A4AE"/>
                 </a:solidFill>
-                <a:latin typeface="Calibri"/>
+                <a:latin typeface="Red Hat Text"/>
               </a:rPr>
               <a:t>Same familiar std:: types; the allocator is just plumbed to the request arena via the polymorphic resource.</a:t>
             </a:r>
@@ -11765,7 +11765,7 @@
             <a:avLst/>
           </a:prstGeom>
           <a:solidFill>
-            <a:srgbClr val="1E6FC8"/>
+            <a:srgbClr val="EE0000"/>
           </a:solidFill>
           <a:ln>
             <a:noFill/>
@@ -11821,7 +11821,7 @@
                 <a:solidFill>
                   <a:srgbClr val="FFFFFF"/>
                 </a:solidFill>
-                <a:latin typeface="Calibri"/>
+                <a:latin typeface="Red Hat Display"/>
               </a:rPr>
               <a:t>PMR: request brings its own memory</a:t>
             </a:r>
@@ -11845,7 +11845,7 @@
             </a:avLst>
           </a:prstGeom>
           <a:solidFill>
-            <a:srgbClr val="1A2B3C"/>
+            <a:srgbClr val="151515"/>
           </a:solidFill>
           <a:ln>
             <a:noFill/>
@@ -11901,7 +11901,7 @@
                 <a:solidFill>
                   <a:srgbClr val="FFFFFF"/>
                 </a:solidFill>
-                <a:latin typeface="Calibri"/>
+                <a:latin typeface="Red Hat Display"/>
               </a:rPr>
               <a:t>§3</a:t>
             </a:r>
@@ -11934,11 +11934,11 @@
             <a:r>
               <a:rPr sz="1100" b="0" i="0">
                 <a:solidFill>
-                  <a:srgbClr val="90A4AE"/>
-                </a:solidFill>
-                <a:latin typeface="Calibri"/>
-              </a:rPr>
-              <a:t>Optimizing Modern C++ with Containers   |   PMR: request brings its own memory</a:t>
+                  <a:srgbClr val="8A8A8A"/>
+                </a:solidFill>
+                <a:latin typeface="Red Hat Text"/>
+              </a:rPr>
+              <a:t>Stateless C++ Services   |   PMR: request brings its own memory</a:t>
             </a:r>
           </a:p>
         </p:txBody>
@@ -11969,9 +11969,9 @@
             <a:r>
               <a:rPr sz="1100" b="0" i="0">
                 <a:solidFill>
-                  <a:srgbClr val="90A4AE"/>
-                </a:solidFill>
-                <a:latin typeface="Calibri"/>
+                  <a:srgbClr val="8A8A8A"/>
+                </a:solidFill>
+                <a:latin typeface="Red Hat Text"/>
               </a:rPr>
               <a:t>18 / 67</a:t>
             </a:r>
@@ -12004,9 +12004,9 @@
             <a:r>
               <a:rPr sz="2800" b="1" i="0">
                 <a:solidFill>
-                  <a:srgbClr val="1A2B3C"/>
-                </a:solidFill>
-                <a:latin typeface="Calibri"/>
+                  <a:srgbClr val="151515"/>
+                </a:solidFill>
+                <a:latin typeface="Red Hat Display"/>
               </a:rPr>
               <a:t>Why the asymmetry is the whole point</a:t>
             </a:r>
@@ -12045,7 +12045,7 @@
                 <a:solidFill>
                   <a:srgbClr val="1E6FC8"/>
                 </a:solidFill>
-                <a:latin typeface="Calibri"/>
+                <a:latin typeface="Red Hat Text"/>
               </a:rPr>
               <a:t>Allocation vs. deallocation cost</a:t>
             </a:r>
@@ -12061,7 +12061,7 @@
                 <a:solidFill>
                   <a:srgbClr val="1A2B3C"/>
                 </a:solidFill>
-                <a:latin typeface="Calibri"/>
+                <a:latin typeface="Red Hat Text"/>
               </a:rPr>
               <a:t>•  Allocation: a pointer bump in the monotonic buffer — a few instructions</a:t>
             </a:r>
@@ -12077,7 +12077,7 @@
                 <a:solidFill>
                   <a:srgbClr val="1A2B3C"/>
                 </a:solidFill>
-                <a:latin typeface="Calibri"/>
+                <a:latin typeface="Red Hat Text"/>
               </a:rPr>
               <a:t>•  Per-object deallocation: a NO-OP (monotonic do_deallocate does nothing)</a:t>
             </a:r>
@@ -12093,7 +12093,7 @@
                 <a:solidFill>
                   <a:srgbClr val="1A2B3C"/>
                 </a:solidFill>
-                <a:latin typeface="Calibri"/>
+                <a:latin typeface="Red Hat Text"/>
               </a:rPr>
               <a:t>•  Reclamation: one buffer reset when the RequestContext destructs</a:t>
             </a:r>
@@ -12109,7 +12109,7 @@
                 <a:solidFill>
                   <a:srgbClr val="1A2B3C"/>
                 </a:solidFill>
-                <a:latin typeface="Calibri"/>
+                <a:latin typeface="Red Hat Text"/>
               </a:rPr>
               <a:t>•  Net: thousands of tiny per-request frees collapse into a single reset</a:t>
             </a:r>
@@ -12130,7 +12130,7 @@
     <p:bg>
       <p:bgPr>
         <a:solidFill>
-          <a:srgbClr val="0A1628"/>
+          <a:srgbClr val="AB0000"/>
         </a:solidFill>
         <a:effectLst/>
       </p:bgPr>
@@ -12159,7 +12159,7 @@
             </a:avLst>
           </a:prstGeom>
           <a:solidFill>
-            <a:srgbClr val="27AE60"/>
+            <a:srgbClr val="FFA000"/>
           </a:solidFill>
           <a:ln>
             <a:noFill/>
@@ -12215,7 +12215,7 @@
                 <a:solidFill>
                   <a:srgbClr val="FFFFFF"/>
                 </a:solidFill>
-                <a:latin typeface="Calibri"/>
+                <a:latin typeface="Red Hat Display"/>
               </a:rPr>
               <a:t>▶ DEMO 03</a:t>
             </a:r>
@@ -12250,7 +12250,7 @@
                 <a:solidFill>
                   <a:srgbClr val="FFFFFF"/>
                 </a:solidFill>
-                <a:latin typeface="Calibri"/>
+                <a:latin typeface="Red Hat Display"/>
               </a:rPr>
               <a:t>Demo — PMR request arena</a:t>
             </a:r>
@@ -12283,9 +12283,9 @@
             <a:r>
               <a:rPr sz="2000" b="0" i="0">
                 <a:solidFill>
-                  <a:srgbClr val="ECF0F1"/>
-                </a:solidFill>
-                <a:latin typeface="Calibri"/>
+                  <a:srgbClr val="F4F4F4"/>
+                </a:solidFill>
+                <a:latin typeface="Red Hat Text"/>
               </a:rPr>
               <a:t>The layered monotonic + pool arena in action: per-request allocation freed in bulk, the release-cost asymmetry measured, and the lifetime trap caught live by AddressSanitizer.</a:t>
             </a:r>
@@ -12307,7 +12307,7 @@
             <a:avLst/>
           </a:prstGeom>
           <a:solidFill>
-            <a:srgbClr val="0D2137"/>
+            <a:srgbClr val="151515"/>
           </a:solidFill>
           <a:ln>
             <a:noFill/>
@@ -12361,9 +12361,9 @@
             <a:r>
               <a:rPr sz="1800" b="0" i="0">
                 <a:solidFill>
-                  <a:srgbClr val="00BCD4"/>
-                </a:solidFill>
-                <a:latin typeface="Consolas"/>
+                  <a:srgbClr val="EE0000"/>
+                </a:solidFill>
+                <a:latin typeface="Red Hat Mono"/>
               </a:rPr>
               <a:t>$ cd examples/statelessness/03-pmr &amp;&amp; ./demo.sh</a:t>
             </a:r>
@@ -12396,9 +12396,9 @@
             <a:r>
               <a:rPr sz="1100" b="0" i="0">
                 <a:solidFill>
-                  <a:srgbClr val="90A4AE"/>
-                </a:solidFill>
-                <a:latin typeface="Consolas"/>
+                  <a:srgbClr val="8A8A8A"/>
+                </a:solidFill>
+                <a:latin typeface="Red Hat Mono"/>
               </a:rPr>
               <a:t>  source on site: patterncatalyst.github.io/cpp-statelessness/examples/statelessness-03-pmr/</a:t>
             </a:r>
@@ -12431,9 +12431,9 @@
             <a:r>
               <a:rPr sz="1100" b="0" i="0">
                 <a:solidFill>
-                  <a:srgbClr val="90A4AE"/>
-                </a:solidFill>
-                <a:latin typeface="Calibri"/>
+                  <a:srgbClr val="8A8A8A"/>
+                </a:solidFill>
+                <a:latin typeface="Red Hat Text"/>
               </a:rPr>
               <a:t>19 / 67</a:t>
             </a:r>
@@ -12481,7 +12481,7 @@
             <a:avLst/>
           </a:prstGeom>
           <a:solidFill>
-            <a:srgbClr val="1E6FC8"/>
+            <a:srgbClr val="EE0000"/>
           </a:solidFill>
           <a:ln>
             <a:noFill/>
@@ -12537,7 +12537,7 @@
                 <a:solidFill>
                   <a:srgbClr val="FFFFFF"/>
                 </a:solidFill>
-                <a:latin typeface="Calibri"/>
+                <a:latin typeface="Red Hat Display"/>
               </a:rPr>
               <a:t>Agenda — the eleven documents</a:t>
             </a:r>
@@ -12561,7 +12561,7 @@
             </a:avLst>
           </a:prstGeom>
           <a:solidFill>
-            <a:srgbClr val="1A2B3C"/>
+            <a:srgbClr val="151515"/>
           </a:solidFill>
           <a:ln>
             <a:noFill/>
@@ -12617,7 +12617,7 @@
                 <a:solidFill>
                   <a:srgbClr val="FFFFFF"/>
                 </a:solidFill>
-                <a:latin typeface="Calibri"/>
+                <a:latin typeface="Red Hat Display"/>
               </a:rPr>
               <a:t>Overview</a:t>
             </a:r>
@@ -12650,11 +12650,11 @@
             <a:r>
               <a:rPr sz="1100" b="0" i="0">
                 <a:solidFill>
-                  <a:srgbClr val="90A4AE"/>
-                </a:solidFill>
-                <a:latin typeface="Calibri"/>
-              </a:rPr>
-              <a:t>Optimizing Modern C++ with Containers   |   Agenda</a:t>
+                  <a:srgbClr val="8A8A8A"/>
+                </a:solidFill>
+                <a:latin typeface="Red Hat Text"/>
+              </a:rPr>
+              <a:t>Stateless C++ Services   |   Agenda</a:t>
             </a:r>
           </a:p>
         </p:txBody>
@@ -12685,9 +12685,9 @@
             <a:r>
               <a:rPr sz="1100" b="0" i="0">
                 <a:solidFill>
-                  <a:srgbClr val="90A4AE"/>
-                </a:solidFill>
-                <a:latin typeface="Calibri"/>
+                  <a:srgbClr val="8A8A8A"/>
+                </a:solidFill>
+                <a:latin typeface="Red Hat Text"/>
               </a:rPr>
               <a:t>2 / 67</a:t>
             </a:r>
@@ -12709,7 +12709,7 @@
             <a:avLst/>
           </a:prstGeom>
           <a:solidFill>
-            <a:srgbClr val="E84855"/>
+            <a:srgbClr val="B71C1C"/>
           </a:solidFill>
           <a:ln>
             <a:noFill/>
@@ -12765,7 +12765,7 @@
                 <a:solidFill>
                   <a:srgbClr val="FFFFFF"/>
                 </a:solidFill>
-                <a:latin typeface="Calibri"/>
+                <a:latin typeface="Red Hat Display"/>
               </a:rPr>
               <a:t>1</a:t>
             </a:r>
@@ -12798,9 +12798,9 @@
             <a:r>
               <a:rPr sz="1500" b="0" i="0">
                 <a:solidFill>
-                  <a:srgbClr val="1A2B3C"/>
-                </a:solidFill>
-                <a:latin typeface="Calibri"/>
+                  <a:srgbClr val="151515"/>
+                </a:solidFill>
+                <a:latin typeface="Red Hat Text"/>
               </a:rPr>
               <a:t>Statelessness as deployment posture</a:t>
             </a:r>
@@ -12822,7 +12822,7 @@
             <a:avLst/>
           </a:prstGeom>
           <a:solidFill>
-            <a:srgbClr val="F5A623"/>
+            <a:srgbClr val="B36B00"/>
           </a:solidFill>
           <a:ln>
             <a:noFill/>
@@ -12878,7 +12878,7 @@
                 <a:solidFill>
                   <a:srgbClr val="FFFFFF"/>
                 </a:solidFill>
-                <a:latin typeface="Calibri"/>
+                <a:latin typeface="Red Hat Display"/>
               </a:rPr>
               <a:t>2</a:t>
             </a:r>
@@ -12911,9 +12911,9 @@
             <a:r>
               <a:rPr sz="1500" b="0" i="0">
                 <a:solidFill>
-                  <a:srgbClr val="1A2B3C"/>
-                </a:solidFill>
-                <a:latin typeface="Calibri"/>
+                  <a:srgbClr val="151515"/>
+                </a:solidFill>
+                <a:latin typeface="Red Hat Text"/>
               </a:rPr>
               <a:t>RAII as the foundation</a:t>
             </a:r>
@@ -12935,7 +12935,7 @@
             <a:avLst/>
           </a:prstGeom>
           <a:solidFill>
-            <a:srgbClr val="1E6FC8"/>
+            <a:srgbClr val="0066CC"/>
           </a:solidFill>
           <a:ln>
             <a:noFill/>
@@ -12991,7 +12991,7 @@
                 <a:solidFill>
                   <a:srgbClr val="FFFFFF"/>
                 </a:solidFill>
-                <a:latin typeface="Calibri"/>
+                <a:latin typeface="Red Hat Display"/>
               </a:rPr>
               <a:t>3</a:t>
             </a:r>
@@ -13024,9 +13024,9 @@
             <a:r>
               <a:rPr sz="1500" b="0" i="0">
                 <a:solidFill>
-                  <a:srgbClr val="1A2B3C"/>
-                </a:solidFill>
-                <a:latin typeface="Calibri"/>
+                  <a:srgbClr val="151515"/>
+                </a:solidFill>
+                <a:latin typeface="Red Hat Text"/>
               </a:rPr>
               <a:t>PMR: request brings its own memory</a:t>
             </a:r>
@@ -13048,7 +13048,7 @@
             <a:avLst/>
           </a:prstGeom>
           <a:solidFill>
-            <a:srgbClr val="27AE60"/>
+            <a:srgbClr val="006E6E"/>
           </a:solidFill>
           <a:ln>
             <a:noFill/>
@@ -13104,7 +13104,7 @@
                 <a:solidFill>
                   <a:srgbClr val="FFFFFF"/>
                 </a:solidFill>
-                <a:latin typeface="Calibri"/>
+                <a:latin typeface="Red Hat Display"/>
               </a:rPr>
               <a:t>4</a:t>
             </a:r>
@@ -13137,9 +13137,9 @@
             <a:r>
               <a:rPr sz="1500" b="0" i="0">
                 <a:solidFill>
-                  <a:srgbClr val="1A2B3C"/>
-                </a:solidFill>
-                <a:latin typeface="Calibri"/>
+                  <a:srgbClr val="151515"/>
+                </a:solidFill>
+                <a:latin typeface="Red Hat Text"/>
               </a:rPr>
               <a:t>Process-scoped state, owned in main()</a:t>
             </a:r>
@@ -13161,7 +13161,7 @@
             <a:avLst/>
           </a:prstGeom>
           <a:solidFill>
-            <a:srgbClr val="00BCD4"/>
+            <a:srgbClr val="EE0000"/>
           </a:solidFill>
           <a:ln>
             <a:noFill/>
@@ -13217,7 +13217,7 @@
                 <a:solidFill>
                   <a:srgbClr val="FFFFFF"/>
                 </a:solidFill>
-                <a:latin typeface="Calibri"/>
+                <a:latin typeface="Red Hat Display"/>
               </a:rPr>
               <a:t>5</a:t>
             </a:r>
@@ -13250,9 +13250,9 @@
             <a:r>
               <a:rPr sz="1500" b="0" i="0">
                 <a:solidFill>
-                  <a:srgbClr val="1A2B3C"/>
-                </a:solidFill>
-                <a:latin typeface="Calibri"/>
+                  <a:srgbClr val="151515"/>
+                </a:solidFill>
+                <a:latin typeface="Red Hat Text"/>
               </a:rPr>
               <a:t>Threading under a CPU quota</a:t>
             </a:r>
@@ -13274,7 +13274,7 @@
             <a:avLst/>
           </a:prstGeom>
           <a:solidFill>
-            <a:srgbClr val="9B59B6"/>
+            <a:srgbClr val="6A1B9A"/>
           </a:solidFill>
           <a:ln>
             <a:noFill/>
@@ -13330,7 +13330,7 @@
                 <a:solidFill>
                   <a:srgbClr val="FFFFFF"/>
                 </a:solidFill>
-                <a:latin typeface="Calibri"/>
+                <a:latin typeface="Red Hat Display"/>
               </a:rPr>
               <a:t>6</a:t>
             </a:r>
@@ -13363,9 +13363,9 @@
             <a:r>
               <a:rPr sz="1500" b="0" i="0">
                 <a:solidFill>
-                  <a:srgbClr val="1A2B3C"/>
-                </a:solidFill>
-                <a:latin typeface="Calibri"/>
+                  <a:srgbClr val="151515"/>
+                </a:solidFill>
+                <a:latin typeface="Red Hat Text"/>
               </a:rPr>
               <a:t>12-Factor adapted to C++</a:t>
             </a:r>
@@ -13387,7 +13387,7 @@
             <a:avLst/>
           </a:prstGeom>
           <a:solidFill>
-            <a:srgbClr val="E84855"/>
+            <a:srgbClr val="B71C1C"/>
           </a:solidFill>
           <a:ln>
             <a:noFill/>
@@ -13443,7 +13443,7 @@
                 <a:solidFill>
                   <a:srgbClr val="FFFFFF"/>
                 </a:solidFill>
-                <a:latin typeface="Calibri"/>
+                <a:latin typeface="Red Hat Display"/>
               </a:rPr>
               <a:t>7</a:t>
             </a:r>
@@ -13476,9 +13476,9 @@
             <a:r>
               <a:rPr sz="1500" b="0" i="0">
                 <a:solidFill>
-                  <a:srgbClr val="1A2B3C"/>
-                </a:solidFill>
-                <a:latin typeface="Calibri"/>
+                  <a:srgbClr val="151515"/>
+                </a:solidFill>
+                <a:latin typeface="Red Hat Text"/>
               </a:rPr>
               <a:t>State externalization</a:t>
             </a:r>
@@ -13500,7 +13500,7 @@
             <a:avLst/>
           </a:prstGeom>
           <a:solidFill>
-            <a:srgbClr val="F5A623"/>
+            <a:srgbClr val="B36B00"/>
           </a:solidFill>
           <a:ln>
             <a:noFill/>
@@ -13556,7 +13556,7 @@
                 <a:solidFill>
                   <a:srgbClr val="FFFFFF"/>
                 </a:solidFill>
-                <a:latin typeface="Calibri"/>
+                <a:latin typeface="Red Hat Display"/>
               </a:rPr>
               <a:t>8</a:t>
             </a:r>
@@ -13589,9 +13589,9 @@
             <a:r>
               <a:rPr sz="1500" b="0" i="0">
                 <a:solidFill>
-                  <a:srgbClr val="1A2B3C"/>
-                </a:solidFill>
-                <a:latin typeface="Calibri"/>
+                  <a:srgbClr val="151515"/>
+                </a:solidFill>
+                <a:latin typeface="Red Hat Text"/>
               </a:rPr>
               <a:t>The ephemeral filesystem</a:t>
             </a:r>
@@ -13613,7 +13613,7 @@
             <a:avLst/>
           </a:prstGeom>
           <a:solidFill>
-            <a:srgbClr val="1E6FC8"/>
+            <a:srgbClr val="0066CC"/>
           </a:solidFill>
           <a:ln>
             <a:noFill/>
@@ -13669,7 +13669,7 @@
                 <a:solidFill>
                   <a:srgbClr val="FFFFFF"/>
                 </a:solidFill>
-                <a:latin typeface="Calibri"/>
+                <a:latin typeface="Red Hat Display"/>
               </a:rPr>
               <a:t>9</a:t>
             </a:r>
@@ -13702,9 +13702,9 @@
             <a:r>
               <a:rPr sz="1500" b="0" i="0">
                 <a:solidFill>
-                  <a:srgbClr val="1A2B3C"/>
-                </a:solidFill>
-                <a:latin typeface="Calibri"/>
+                  <a:srgbClr val="151515"/>
+                </a:solidFill>
+                <a:latin typeface="Red Hat Text"/>
               </a:rPr>
               <a:t>Health checks &amp; graceful shutdown</a:t>
             </a:r>
@@ -13726,7 +13726,7 @@
             <a:avLst/>
           </a:prstGeom>
           <a:solidFill>
-            <a:srgbClr val="27AE60"/>
+            <a:srgbClr val="006E6E"/>
           </a:solidFill>
           <a:ln>
             <a:noFill/>
@@ -13782,7 +13782,7 @@
                 <a:solidFill>
                   <a:srgbClr val="FFFFFF"/>
                 </a:solidFill>
-                <a:latin typeface="Calibri"/>
+                <a:latin typeface="Red Hat Display"/>
               </a:rPr>
               <a:t>10</a:t>
             </a:r>
@@ -13815,9 +13815,9 @@
             <a:r>
               <a:rPr sz="1500" b="0" i="0">
                 <a:solidFill>
-                  <a:srgbClr val="1A2B3C"/>
-                </a:solidFill>
-                <a:latin typeface="Calibri"/>
+                  <a:srgbClr val="151515"/>
+                </a:solidFill>
+                <a:latin typeface="Red Hat Text"/>
               </a:rPr>
               <a:t>The gRPC end-to-end example</a:t>
             </a:r>
@@ -13839,7 +13839,7 @@
             <a:avLst/>
           </a:prstGeom>
           <a:solidFill>
-            <a:srgbClr val="00BCD4"/>
+            <a:srgbClr val="EE0000"/>
           </a:solidFill>
           <a:ln>
             <a:noFill/>
@@ -13895,7 +13895,7 @@
                 <a:solidFill>
                   <a:srgbClr val="FFFFFF"/>
                 </a:solidFill>
-                <a:latin typeface="Calibri"/>
+                <a:latin typeface="Red Hat Display"/>
               </a:rPr>
               <a:t>11</a:t>
             </a:r>
@@ -13928,9 +13928,9 @@
             <a:r>
               <a:rPr sz="1500" b="0" i="0">
                 <a:solidFill>
-                  <a:srgbClr val="1A2B3C"/>
-                </a:solidFill>
-                <a:latin typeface="Calibri"/>
+                  <a:srgbClr val="151515"/>
+                </a:solidFill>
+                <a:latin typeface="Red Hat Text"/>
               </a:rPr>
               <a:t>Build tooling &amp; vendored helpers</a:t>
             </a:r>
@@ -13951,7 +13951,7 @@
     <p:bg>
       <p:bgPr>
         <a:solidFill>
-          <a:srgbClr val="0A1628"/>
+          <a:srgbClr val="AB0000"/>
         </a:solidFill>
         <a:effectLst/>
       </p:bgPr>
@@ -13989,9 +13989,9 @@
             <a:r>
               <a:rPr sz="18000" b="1" i="0">
                 <a:solidFill>
-                  <a:srgbClr val="00BCD4"/>
-                </a:solidFill>
-                <a:latin typeface="Calibri"/>
+                  <a:srgbClr val="EE0000"/>
+                </a:solidFill>
+                <a:latin typeface="Red Hat Display"/>
               </a:rPr>
               <a:t>§4</a:t>
             </a:r>
@@ -14026,7 +14026,7 @@
                 <a:solidFill>
                   <a:srgbClr val="FFFFFF"/>
                 </a:solidFill>
-                <a:latin typeface="Calibri"/>
+                <a:latin typeface="Red Hat Display"/>
               </a:rPr>
               <a:t>Process-scoped state, owned in main()</a:t>
             </a:r>
@@ -14059,9 +14059,9 @@
             <a:r>
               <a:rPr sz="2000" b="0" i="1">
                 <a:solidFill>
-                  <a:srgbClr val="90A4AE"/>
-                </a:solidFill>
-                <a:latin typeface="Calibri"/>
+                  <a:srgbClr val="8A8A8A"/>
+                </a:solidFill>
+                <a:latin typeface="Red Hat Text"/>
               </a:rPr>
               <a:t>Some state legitimately lives for the process — own it explicitly.</a:t>
             </a:r>
@@ -14094,9 +14094,9 @@
             <a:r>
               <a:rPr sz="1100" b="0" i="0">
                 <a:solidFill>
-                  <a:srgbClr val="90A4AE"/>
-                </a:solidFill>
-                <a:latin typeface="Calibri"/>
+                  <a:srgbClr val="8A8A8A"/>
+                </a:solidFill>
+                <a:latin typeface="Red Hat Text"/>
               </a:rPr>
               <a:t>20 / 67</a:t>
             </a:r>
@@ -14144,7 +14144,7 @@
             <a:avLst/>
           </a:prstGeom>
           <a:solidFill>
-            <a:srgbClr val="1E6FC8"/>
+            <a:srgbClr val="EE0000"/>
           </a:solidFill>
           <a:ln>
             <a:noFill/>
@@ -14200,7 +14200,7 @@
                 <a:solidFill>
                   <a:srgbClr val="FFFFFF"/>
                 </a:solidFill>
-                <a:latin typeface="Calibri"/>
+                <a:latin typeface="Red Hat Display"/>
               </a:rPr>
               <a:t>Process-scoped state, owned in main()</a:t>
             </a:r>
@@ -14224,7 +14224,7 @@
             </a:avLst>
           </a:prstGeom>
           <a:solidFill>
-            <a:srgbClr val="1A2B3C"/>
+            <a:srgbClr val="151515"/>
           </a:solidFill>
           <a:ln>
             <a:noFill/>
@@ -14280,7 +14280,7 @@
                 <a:solidFill>
                   <a:srgbClr val="FFFFFF"/>
                 </a:solidFill>
-                <a:latin typeface="Calibri"/>
+                <a:latin typeface="Red Hat Display"/>
               </a:rPr>
               <a:t>§4</a:t>
             </a:r>
@@ -14313,11 +14313,11 @@
             <a:r>
               <a:rPr sz="1100" b="0" i="0">
                 <a:solidFill>
-                  <a:srgbClr val="90A4AE"/>
-                </a:solidFill>
-                <a:latin typeface="Calibri"/>
-              </a:rPr>
-              <a:t>Optimizing Modern C++ with Containers   |   Process-scoped state, owned in main()</a:t>
+                  <a:srgbClr val="8A8A8A"/>
+                </a:solidFill>
+                <a:latin typeface="Red Hat Text"/>
+              </a:rPr>
+              <a:t>Stateless C++ Services   |   Process-scoped state, owned in main()</a:t>
             </a:r>
           </a:p>
         </p:txBody>
@@ -14348,9 +14348,9 @@
             <a:r>
               <a:rPr sz="1100" b="0" i="0">
                 <a:solidFill>
-                  <a:srgbClr val="90A4AE"/>
-                </a:solidFill>
-                <a:latin typeface="Calibri"/>
+                  <a:srgbClr val="8A8A8A"/>
+                </a:solidFill>
+                <a:latin typeface="Red Hat Text"/>
               </a:rPr>
               <a:t>21 / 67</a:t>
             </a:r>
@@ -14383,9 +14383,9 @@
             <a:r>
               <a:rPr sz="2800" b="1" i="0">
                 <a:solidFill>
-                  <a:srgbClr val="1A2B3C"/>
-                </a:solidFill>
-                <a:latin typeface="Calibri"/>
+                  <a:srgbClr val="151515"/>
+                </a:solidFill>
+                <a:latin typeface="Red Hat Display"/>
               </a:rPr>
               <a:t>The composition root</a:t>
             </a:r>
@@ -14424,7 +14424,7 @@
                 <a:solidFill>
                   <a:srgbClr val="1E6FC8"/>
                 </a:solidFill>
-                <a:latin typeface="Calibri"/>
+                <a:latin typeface="Red Hat Text"/>
               </a:rPr>
               <a:t>main() constructs everything by name</a:t>
             </a:r>
@@ -14440,7 +14440,7 @@
                 <a:solidFill>
                   <a:srgbClr val="1A2B3C"/>
                 </a:solidFill>
-                <a:latin typeface="Calibri"/>
+                <a:latin typeface="Red Hat Text"/>
               </a:rPr>
               <a:t>•  Parsed config, pools, channel cache, caches — built once, in order</a:t>
             </a:r>
@@ -14456,7 +14456,7 @@
                 <a:solidFill>
                   <a:srgbClr val="1A2B3C"/>
                 </a:solidFill>
-                <a:latin typeface="Calibri"/>
+                <a:latin typeface="Red Hat Text"/>
               </a:rPr>
               <a:t>•  Injected into services by reference; no global singletons</a:t>
             </a:r>
@@ -14472,7 +14472,7 @@
                 <a:solidFill>
                   <a:srgbClr val="1A2B3C"/>
                 </a:solidFill>
-                <a:latin typeface="Calibri"/>
+                <a:latin typeface="Red Hat Text"/>
               </a:rPr>
               <a:t>•  Reverse-order destruction at scope exit — automatic teardown from RAII</a:t>
             </a:r>
@@ -14488,7 +14488,7 @@
                 <a:solidFill>
                   <a:srgbClr val="1A2B3C"/>
                 </a:solidFill>
-                <a:latin typeface="Calibri"/>
+                <a:latin typeface="Red Hat Text"/>
               </a:rPr>
               <a:t>•  The State Architecture Table: what's process-scoped vs externalized</a:t>
             </a:r>
@@ -14560,7 +14560,7 @@
             <a:avLst/>
           </a:prstGeom>
           <a:solidFill>
-            <a:srgbClr val="1E6FC8"/>
+            <a:srgbClr val="EE0000"/>
           </a:solidFill>
           <a:ln>
             <a:noFill/>
@@ -14616,7 +14616,7 @@
                 <a:solidFill>
                   <a:srgbClr val="FFFFFF"/>
                 </a:solidFill>
-                <a:latin typeface="Calibri"/>
+                <a:latin typeface="Red Hat Display"/>
               </a:rPr>
               <a:t>Process-scoped state, owned in main()</a:t>
             </a:r>
@@ -14640,7 +14640,7 @@
             </a:avLst>
           </a:prstGeom>
           <a:solidFill>
-            <a:srgbClr val="1A2B3C"/>
+            <a:srgbClr val="151515"/>
           </a:solidFill>
           <a:ln>
             <a:noFill/>
@@ -14696,7 +14696,7 @@
                 <a:solidFill>
                   <a:srgbClr val="FFFFFF"/>
                 </a:solidFill>
-                <a:latin typeface="Calibri"/>
+                <a:latin typeface="Red Hat Display"/>
               </a:rPr>
               <a:t>§4</a:t>
             </a:r>
@@ -14729,11 +14729,11 @@
             <a:r>
               <a:rPr sz="1100" b="0" i="0">
                 <a:solidFill>
-                  <a:srgbClr val="90A4AE"/>
-                </a:solidFill>
-                <a:latin typeface="Calibri"/>
-              </a:rPr>
-              <a:t>Optimizing Modern C++ with Containers   |   Process-scoped state, owned in main()</a:t>
+                  <a:srgbClr val="8A8A8A"/>
+                </a:solidFill>
+                <a:latin typeface="Red Hat Text"/>
+              </a:rPr>
+              <a:t>Stateless C++ Services   |   Process-scoped state, owned in main()</a:t>
             </a:r>
           </a:p>
         </p:txBody>
@@ -14764,9 +14764,9 @@
             <a:r>
               <a:rPr sz="1100" b="0" i="0">
                 <a:solidFill>
-                  <a:srgbClr val="90A4AE"/>
-                </a:solidFill>
-                <a:latin typeface="Calibri"/>
+                  <a:srgbClr val="8A8A8A"/>
+                </a:solidFill>
+                <a:latin typeface="Red Hat Text"/>
               </a:rPr>
               <a:t>22 / 67</a:t>
             </a:r>
@@ -14799,9 +14799,9 @@
             <a:r>
               <a:rPr sz="2800" b="1" i="0">
                 <a:solidFill>
-                  <a:srgbClr val="1A2B3C"/>
-                </a:solidFill>
-                <a:latin typeface="Calibri"/>
+                  <a:srgbClr val="151515"/>
+                </a:solidFill>
+                <a:latin typeface="Red Hat Display"/>
               </a:rPr>
               <a:t>Size process-scoped state from the budget</a:t>
             </a:r>
@@ -14840,7 +14840,7 @@
                 <a:solidFill>
                   <a:srgbClr val="F5A623"/>
                 </a:solidFill>
-                <a:latin typeface="Calibri"/>
+                <a:latin typeface="Red Hat Text"/>
               </a:rPr>
               <a:t>The cgroup is the budget</a:t>
             </a:r>
@@ -14856,7 +14856,7 @@
                 <a:solidFill>
                   <a:srgbClr val="1A2B3C"/>
                 </a:solidFill>
-                <a:latin typeface="Calibri"/>
+                <a:latin typeface="Red Hat Text"/>
               </a:rPr>
               <a:t>•  Bounded caches sized against memory.max, not host RAM</a:t>
             </a:r>
@@ -14872,7 +14872,7 @@
                 <a:solidFill>
                   <a:srgbClr val="1A2B3C"/>
                 </a:solidFill>
-                <a:latin typeface="Calibri"/>
+                <a:latin typeface="Red Hat Text"/>
               </a:rPr>
               <a:t>•  An unbounded cache is a slow OOM under a memory cgroup</a:t>
             </a:r>
@@ -14888,7 +14888,7 @@
                 <a:solidFill>
                   <a:srgbClr val="1A2B3C"/>
                 </a:solidFill>
-                <a:latin typeface="Calibri"/>
+                <a:latin typeface="Red Hat Text"/>
               </a:rPr>
               <a:t>•  Pool sizes and arena counts scale from the CPU quota (threading)</a:t>
             </a:r>
@@ -14904,7 +14904,7 @@
                 <a:solidFill>
                   <a:srgbClr val="1A2B3C"/>
                 </a:solidFill>
-                <a:latin typeface="Calibri"/>
+                <a:latin typeface="Red Hat Text"/>
               </a:rPr>
               <a:t>•  Bounded structures everywhere: LRU caps, pool maxima, queue limits</a:t>
             </a:r>
@@ -14952,7 +14952,7 @@
             <a:avLst/>
           </a:prstGeom>
           <a:solidFill>
-            <a:srgbClr val="1E6FC8"/>
+            <a:srgbClr val="EE0000"/>
           </a:solidFill>
           <a:ln>
             <a:noFill/>
@@ -15008,7 +15008,7 @@
                 <a:solidFill>
                   <a:srgbClr val="FFFFFF"/>
                 </a:solidFill>
-                <a:latin typeface="Calibri"/>
+                <a:latin typeface="Red Hat Display"/>
               </a:rPr>
               <a:t>Process-scoped state, owned in main()</a:t>
             </a:r>
@@ -15032,7 +15032,7 @@
             </a:avLst>
           </a:prstGeom>
           <a:solidFill>
-            <a:srgbClr val="1A2B3C"/>
+            <a:srgbClr val="151515"/>
           </a:solidFill>
           <a:ln>
             <a:noFill/>
@@ -15088,7 +15088,7 @@
                 <a:solidFill>
                   <a:srgbClr val="FFFFFF"/>
                 </a:solidFill>
-                <a:latin typeface="Calibri"/>
+                <a:latin typeface="Red Hat Display"/>
               </a:rPr>
               <a:t>§4</a:t>
             </a:r>
@@ -15121,11 +15121,11 @@
             <a:r>
               <a:rPr sz="1100" b="0" i="0">
                 <a:solidFill>
-                  <a:srgbClr val="90A4AE"/>
-                </a:solidFill>
-                <a:latin typeface="Calibri"/>
-              </a:rPr>
-              <a:t>Optimizing Modern C++ with Containers   |   Process-scoped state, owned in main()</a:t>
+                  <a:srgbClr val="8A8A8A"/>
+                </a:solidFill>
+                <a:latin typeface="Red Hat Text"/>
+              </a:rPr>
+              <a:t>Stateless C++ Services   |   Process-scoped state, owned in main()</a:t>
             </a:r>
           </a:p>
         </p:txBody>
@@ -15156,9 +15156,9 @@
             <a:r>
               <a:rPr sz="1100" b="0" i="0">
                 <a:solidFill>
-                  <a:srgbClr val="90A4AE"/>
-                </a:solidFill>
-                <a:latin typeface="Calibri"/>
+                  <a:srgbClr val="8A8A8A"/>
+                </a:solidFill>
+                <a:latin typeface="Red Hat Text"/>
               </a:rPr>
               <a:t>23 / 67</a:t>
             </a:r>
@@ -15191,9 +15191,9 @@
             <a:r>
               <a:rPr sz="2800" b="1" i="0">
                 <a:solidFill>
-                  <a:srgbClr val="1A2B3C"/>
-                </a:solidFill>
-                <a:latin typeface="Calibri"/>
+                  <a:srgbClr val="151515"/>
+                </a:solidFill>
+                <a:latin typeface="Red Hat Display"/>
               </a:rPr>
               <a:t>Dependency injection over singletons</a:t>
             </a:r>
@@ -15232,7 +15232,7 @@
                 <a:solidFill>
                   <a:srgbClr val="9B59B6"/>
                 </a:solidFill>
-                <a:latin typeface="Calibri"/>
+                <a:latin typeface="Red Hat Text"/>
               </a:rPr>
               <a:t>Inject by reference; don't reach for a singleton</a:t>
             </a:r>
@@ -15248,7 +15248,7 @@
                 <a:solidFill>
                   <a:srgbClr val="1A2B3C"/>
                 </a:solidFill>
-                <a:latin typeface="Calibri"/>
+                <a:latin typeface="Red Hat Text"/>
               </a:rPr>
               <a:t>•  The Meyers singleton hides ownership and lifetime</a:t>
             </a:r>
@@ -15264,7 +15264,7 @@
                 <a:solidFill>
                   <a:srgbClr val="1A2B3C"/>
                 </a:solidFill>
-                <a:latin typeface="Calibri"/>
+                <a:latin typeface="Red Hat Text"/>
               </a:rPr>
               <a:t>•  Pass collaborators in by const&amp; or &amp;; the service owns nothing global</a:t>
             </a:r>
@@ -15280,7 +15280,7 @@
                 <a:solidFill>
                   <a:srgbClr val="1A2B3C"/>
                 </a:solidFill>
-                <a:latin typeface="Calibri"/>
+                <a:latin typeface="Red Hat Text"/>
               </a:rPr>
               <a:t>•  Testable: substitute a fake pool or channel at the seam</a:t>
             </a:r>
@@ -15296,7 +15296,7 @@
                 <a:solidFill>
                   <a:srgbClr val="1A2B3C"/>
                 </a:solidFill>
-                <a:latin typeface="Calibri"/>
+                <a:latin typeface="Red Hat Text"/>
               </a:rPr>
               <a:t>•  Iglberger's DI chapter is the architectural underpinning</a:t>
             </a:r>
@@ -15318,7 +15318,7 @@
             <a:avLst/>
           </a:prstGeom>
           <a:solidFill>
-            <a:srgbClr val="0D2137"/>
+            <a:srgbClr val="151515"/>
           </a:solidFill>
           <a:ln>
             <a:noFill/>
@@ -15371,9 +15371,9 @@
             <a:r>
               <a:rPr sz="1200">
                 <a:solidFill>
-                  <a:srgbClr val="ECF0F1"/>
-                </a:solidFill>
-                <a:latin typeface="Consolas"/>
+                  <a:srgbClr val="F4F4F4"/>
+                </a:solidFill>
+                <a:latin typeface="Red Hat Mono"/>
               </a:rPr>
               <a:t>int main() {</a:t>
             </a:r>
@@ -15382,9 +15382,9 @@
             <a:r>
               <a:rPr sz="1200">
                 <a:solidFill>
-                  <a:srgbClr val="ECF0F1"/>
-                </a:solidFill>
-                <a:latin typeface="Consolas"/>
+                  <a:srgbClr val="F4F4F4"/>
+                </a:solidFill>
+                <a:latin typeface="Red Hat Mono"/>
               </a:rPr>
               <a:t>  const Config cfg = parse_config();</a:t>
             </a:r>
@@ -15393,9 +15393,9 @@
             <a:r>
               <a:rPr sz="1200">
                 <a:solidFill>
-                  <a:srgbClr val="ECF0F1"/>
-                </a:solidFill>
-                <a:latin typeface="Consolas"/>
+                  <a:srgbClr val="F4F4F4"/>
+                </a:solidFill>
+                <a:latin typeface="Red Hat Mono"/>
               </a:rPr>
               <a:t>  PgPool       pg{cfg.pg_conninfo, cfg.pg_pool_size};</a:t>
             </a:r>
@@ -15404,9 +15404,9 @@
             <a:r>
               <a:rPr sz="1200">
                 <a:solidFill>
-                  <a:srgbClr val="ECF0F1"/>
-                </a:solidFill>
-                <a:latin typeface="Consolas"/>
+                  <a:srgbClr val="F4F4F4"/>
+                </a:solidFill>
+                <a:latin typeface="Red Hat Mono"/>
               </a:rPr>
               <a:t>  ChannelCache channels{};</a:t>
             </a:r>
@@ -15415,9 +15415,9 @@
             <a:r>
               <a:rPr sz="1200">
                 <a:solidFill>
-                  <a:srgbClr val="ECF0F1"/>
-                </a:solidFill>
-                <a:latin typeface="Consolas"/>
+                  <a:srgbClr val="F4F4F4"/>
+                </a:solidFill>
+                <a:latin typeface="Red Hat Mono"/>
               </a:rPr>
               <a:t>  // dependencies injected by reference, owned here:</a:t>
             </a:r>
@@ -15426,9 +15426,9 @@
             <a:r>
               <a:rPr sz="1200">
                 <a:solidFill>
-                  <a:srgbClr val="ECF0F1"/>
-                </a:solidFill>
-                <a:latin typeface="Consolas"/>
+                  <a:srgbClr val="F4F4F4"/>
+                </a:solidFill>
+                <a:latin typeface="Red Hat Mono"/>
               </a:rPr>
               <a:t>  PricingService svc{cfg, pg, channels};</a:t>
             </a:r>
@@ -15437,9 +15437,9 @@
             <a:r>
               <a:rPr sz="1200">
                 <a:solidFill>
-                  <a:srgbClr val="ECF0F1"/>
-                </a:solidFill>
-                <a:latin typeface="Consolas"/>
+                  <a:srgbClr val="F4F4F4"/>
+                </a:solidFill>
+                <a:latin typeface="Red Hat Mono"/>
               </a:rPr>
               <a:t>  // ... serve ...</a:t>
             </a:r>
@@ -15448,9 +15448,9 @@
             <a:r>
               <a:rPr sz="1200">
                 <a:solidFill>
-                  <a:srgbClr val="ECF0F1"/>
-                </a:solidFill>
-                <a:latin typeface="Consolas"/>
+                  <a:srgbClr val="F4F4F4"/>
+                </a:solidFill>
+                <a:latin typeface="Red Hat Mono"/>
               </a:rPr>
               <a:t>}  // svc, channels, pg, cfg destruct in REVERSE order</a:t>
             </a:r>
@@ -15498,7 +15498,7 @@
             <a:avLst/>
           </a:prstGeom>
           <a:solidFill>
-            <a:srgbClr val="1E6FC8"/>
+            <a:srgbClr val="EE0000"/>
           </a:solidFill>
           <a:ln>
             <a:noFill/>
@@ -15554,7 +15554,7 @@
                 <a:solidFill>
                   <a:srgbClr val="FFFFFF"/>
                 </a:solidFill>
-                <a:latin typeface="Calibri"/>
+                <a:latin typeface="Red Hat Display"/>
               </a:rPr>
               <a:t>Process-scoped state, owned in main()</a:t>
             </a:r>
@@ -15578,7 +15578,7 @@
             </a:avLst>
           </a:prstGeom>
           <a:solidFill>
-            <a:srgbClr val="1A2B3C"/>
+            <a:srgbClr val="151515"/>
           </a:solidFill>
           <a:ln>
             <a:noFill/>
@@ -15634,7 +15634,7 @@
                 <a:solidFill>
                   <a:srgbClr val="FFFFFF"/>
                 </a:solidFill>
-                <a:latin typeface="Calibri"/>
+                <a:latin typeface="Red Hat Display"/>
               </a:rPr>
               <a:t>§4</a:t>
             </a:r>
@@ -15667,11 +15667,11 @@
             <a:r>
               <a:rPr sz="1100" b="0" i="0">
                 <a:solidFill>
-                  <a:srgbClr val="90A4AE"/>
-                </a:solidFill>
-                <a:latin typeface="Calibri"/>
-              </a:rPr>
-              <a:t>Optimizing Modern C++ with Containers   |   Process-scoped state, owned in main()</a:t>
+                  <a:srgbClr val="8A8A8A"/>
+                </a:solidFill>
+                <a:latin typeface="Red Hat Text"/>
+              </a:rPr>
+              <a:t>Stateless C++ Services   |   Process-scoped state, owned in main()</a:t>
             </a:r>
           </a:p>
         </p:txBody>
@@ -15702,9 +15702,9 @@
             <a:r>
               <a:rPr sz="1100" b="0" i="0">
                 <a:solidFill>
-                  <a:srgbClr val="90A4AE"/>
-                </a:solidFill>
-                <a:latin typeface="Calibri"/>
+                  <a:srgbClr val="8A8A8A"/>
+                </a:solidFill>
+                <a:latin typeface="Red Hat Text"/>
               </a:rPr>
               <a:t>24 / 67</a:t>
             </a:r>
@@ -15737,9 +15737,9 @@
             <a:r>
               <a:rPr sz="2800" b="1" i="0">
                 <a:solidFill>
-                  <a:srgbClr val="1A2B3C"/>
-                </a:solidFill>
-                <a:latin typeface="Calibri"/>
+                  <a:srgbClr val="151515"/>
+                </a:solidFill>
+                <a:latin typeface="Red Hat Display"/>
               </a:rPr>
               <a:t>Bounded by construction</a:t>
             </a:r>
@@ -15778,7 +15778,7 @@
                 <a:solidFill>
                   <a:srgbClr val="E84855"/>
                 </a:solidFill>
-                <a:latin typeface="Calibri"/>
+                <a:latin typeface="Red Hat Text"/>
               </a:rPr>
               <a:t>Every process-scoped structure has a ceiling</a:t>
             </a:r>
@@ -15794,7 +15794,7 @@
                 <a:solidFill>
                   <a:srgbClr val="1A2B3C"/>
                 </a:solidFill>
-                <a:latin typeface="Calibri"/>
+                <a:latin typeface="Red Hat Text"/>
               </a:rPr>
               <a:t>•  LRU caches: a max entry count sized from memory.max</a:t>
             </a:r>
@@ -15810,7 +15810,7 @@
                 <a:solidFill>
                   <a:srgbClr val="1A2B3C"/>
                 </a:solidFill>
-                <a:latin typeface="Calibri"/>
+                <a:latin typeface="Red Hat Text"/>
               </a:rPr>
               <a:t>•  Connection pools: a hard maximum, with a checkout timeout</a:t>
             </a:r>
@@ -15826,7 +15826,7 @@
                 <a:solidFill>
                   <a:srgbClr val="1A2B3C"/>
                 </a:solidFill>
-                <a:latin typeface="Calibri"/>
+                <a:latin typeface="Red Hat Text"/>
               </a:rPr>
               <a:t>•  Queues: bounded, with a backpressure policy when full</a:t>
             </a:r>
@@ -15842,7 +15842,7 @@
                 <a:solidFill>
                   <a:srgbClr val="1A2B3C"/>
                 </a:solidFill>
-                <a:latin typeface="Calibri"/>
+                <a:latin typeface="Red Hat Text"/>
               </a:rPr>
               <a:t>•  Prepared-statement caches: capped, evicting least-recently-used</a:t>
             </a:r>
@@ -15858,7 +15858,7 @@
                 <a:solidFill>
                   <a:srgbClr val="90A4AE"/>
                 </a:solidFill>
-                <a:latin typeface="Calibri"/>
+                <a:latin typeface="Red Hat Text"/>
               </a:rPr>
               <a:t>Unbounded + a memory cgroup = a slow, surprising OOMKill under load. Bound everything.</a:t>
             </a:r>
@@ -15879,7 +15879,7 @@
     <p:bg>
       <p:bgPr>
         <a:solidFill>
-          <a:srgbClr val="0A1628"/>
+          <a:srgbClr val="AB0000"/>
         </a:solidFill>
         <a:effectLst/>
       </p:bgPr>
@@ -15917,9 +15917,9 @@
             <a:r>
               <a:rPr sz="18000" b="1" i="0">
                 <a:solidFill>
-                  <a:srgbClr val="00BCD4"/>
-                </a:solidFill>
-                <a:latin typeface="Calibri"/>
+                  <a:srgbClr val="EE0000"/>
+                </a:solidFill>
+                <a:latin typeface="Red Hat Display"/>
               </a:rPr>
               <a:t>§5</a:t>
             </a:r>
@@ -15954,7 +15954,7 @@
                 <a:solidFill>
                   <a:srgbClr val="FFFFFF"/>
                 </a:solidFill>
-                <a:latin typeface="Calibri"/>
+                <a:latin typeface="Red Hat Display"/>
               </a:rPr>
               <a:t>Threading under a CPU quota</a:t>
             </a:r>
@@ -15987,9 +15987,9 @@
             <a:r>
               <a:rPr sz="2000" b="0" i="1">
                 <a:solidFill>
-                  <a:srgbClr val="90A4AE"/>
-                </a:solidFill>
-                <a:latin typeface="Calibri"/>
+                  <a:srgbClr val="8A8A8A"/>
+                </a:solidFill>
+                <a:latin typeface="Red Hat Text"/>
               </a:rPr>
               <a:t>hardware_concurrency() lies; the cgroup tells the truth.</a:t>
             </a:r>
@@ -16022,9 +16022,9 @@
             <a:r>
               <a:rPr sz="1100" b="0" i="0">
                 <a:solidFill>
-                  <a:srgbClr val="90A4AE"/>
-                </a:solidFill>
-                <a:latin typeface="Calibri"/>
+                  <a:srgbClr val="8A8A8A"/>
+                </a:solidFill>
+                <a:latin typeface="Red Hat Text"/>
               </a:rPr>
               <a:t>25 / 67</a:t>
             </a:r>
@@ -16072,7 +16072,7 @@
             <a:avLst/>
           </a:prstGeom>
           <a:solidFill>
-            <a:srgbClr val="1E6FC8"/>
+            <a:srgbClr val="EE0000"/>
           </a:solidFill>
           <a:ln>
             <a:noFill/>
@@ -16128,7 +16128,7 @@
                 <a:solidFill>
                   <a:srgbClr val="FFFFFF"/>
                 </a:solidFill>
-                <a:latin typeface="Calibri"/>
+                <a:latin typeface="Red Hat Display"/>
               </a:rPr>
               <a:t>Threading under a CPU quota</a:t>
             </a:r>
@@ -16152,7 +16152,7 @@
             </a:avLst>
           </a:prstGeom>
           <a:solidFill>
-            <a:srgbClr val="1A2B3C"/>
+            <a:srgbClr val="151515"/>
           </a:solidFill>
           <a:ln>
             <a:noFill/>
@@ -16208,7 +16208,7 @@
                 <a:solidFill>
                   <a:srgbClr val="FFFFFF"/>
                 </a:solidFill>
-                <a:latin typeface="Calibri"/>
+                <a:latin typeface="Red Hat Display"/>
               </a:rPr>
               <a:t>§5</a:t>
             </a:r>
@@ -16241,11 +16241,11 @@
             <a:r>
               <a:rPr sz="1100" b="0" i="0">
                 <a:solidFill>
-                  <a:srgbClr val="90A4AE"/>
-                </a:solidFill>
-                <a:latin typeface="Calibri"/>
-              </a:rPr>
-              <a:t>Optimizing Modern C++ with Containers   |   Threading under a CPU quota</a:t>
+                  <a:srgbClr val="8A8A8A"/>
+                </a:solidFill>
+                <a:latin typeface="Red Hat Text"/>
+              </a:rPr>
+              <a:t>Stateless C++ Services   |   Threading under a CPU quota</a:t>
             </a:r>
           </a:p>
         </p:txBody>
@@ -16276,9 +16276,9 @@
             <a:r>
               <a:rPr sz="1100" b="0" i="0">
                 <a:solidFill>
-                  <a:srgbClr val="90A4AE"/>
-                </a:solidFill>
-                <a:latin typeface="Calibri"/>
+                  <a:srgbClr val="8A8A8A"/>
+                </a:solidFill>
+                <a:latin typeface="Red Hat Text"/>
               </a:rPr>
               <a:t>26 / 67</a:t>
             </a:r>
@@ -16311,9 +16311,9 @@
             <a:r>
               <a:rPr sz="2800" b="1" i="0">
                 <a:solidFill>
-                  <a:srgbClr val="1A2B3C"/>
-                </a:solidFill>
-                <a:latin typeface="Calibri"/>
+                  <a:srgbClr val="151515"/>
+                </a:solidFill>
+                <a:latin typeface="Red Hat Display"/>
               </a:rPr>
               <a:t>CFS quota and the throttling trap</a:t>
             </a:r>
@@ -16352,7 +16352,7 @@
                 <a:solidFill>
                   <a:srgbClr val="E84855"/>
                 </a:solidFill>
-                <a:latin typeface="Calibri"/>
+                <a:latin typeface="Red Hat Text"/>
               </a:rPr>
               <a:t>Oversubscription buys nothing and costs tail latency</a:t>
             </a:r>
@@ -16368,7 +16368,7 @@
                 <a:solidFill>
                   <a:srgbClr val="1A2B3C"/>
                 </a:solidFill>
-                <a:latin typeface="Calibri"/>
+                <a:latin typeface="Red Hat Text"/>
               </a:rPr>
               <a:t>•  CFS gives the cgroup quota microseconds per period</a:t>
             </a:r>
@@ -16384,7 +16384,7 @@
                 <a:solidFill>
                   <a:srgbClr val="1A2B3C"/>
                 </a:solidFill>
-                <a:latin typeface="Calibri"/>
+                <a:latin typeface="Red Hat Text"/>
               </a:rPr>
               <a:t>•  A pool sized to nproc under --cpus=2 runs out of quota and is throttled</a:t>
             </a:r>
@@ -16400,7 +16400,7 @@
                 <a:solidFill>
                   <a:srgbClr val="1A2B3C"/>
                 </a:solidFill>
-                <a:latin typeface="Calibri"/>
+                <a:latin typeface="Red Hat Text"/>
               </a:rPr>
               <a:t>•  Throttling shows up as p99 latency spikes, not lower throughput</a:t>
             </a:r>
@@ -16416,7 +16416,7 @@
                 <a:solidFill>
                   <a:srgbClr val="1A2B3C"/>
                 </a:solidFill>
-                <a:latin typeface="Calibri"/>
+                <a:latin typeface="Red Hat Text"/>
               </a:rPr>
               <a:t>•  Fix: size pools to the cgroup quota; read it with the cgroup helper</a:t>
             </a:r>
@@ -16488,7 +16488,7 @@
             <a:avLst/>
           </a:prstGeom>
           <a:solidFill>
-            <a:srgbClr val="1E6FC8"/>
+            <a:srgbClr val="EE0000"/>
           </a:solidFill>
           <a:ln>
             <a:noFill/>
@@ -16544,7 +16544,7 @@
                 <a:solidFill>
                   <a:srgbClr val="FFFFFF"/>
                 </a:solidFill>
-                <a:latin typeface="Calibri"/>
+                <a:latin typeface="Red Hat Display"/>
               </a:rPr>
               <a:t>Threading under a CPU quota</a:t>
             </a:r>
@@ -16568,7 +16568,7 @@
             </a:avLst>
           </a:prstGeom>
           <a:solidFill>
-            <a:srgbClr val="1A2B3C"/>
+            <a:srgbClr val="151515"/>
           </a:solidFill>
           <a:ln>
             <a:noFill/>
@@ -16624,7 +16624,7 @@
                 <a:solidFill>
                   <a:srgbClr val="FFFFFF"/>
                 </a:solidFill>
-                <a:latin typeface="Calibri"/>
+                <a:latin typeface="Red Hat Display"/>
               </a:rPr>
               <a:t>§5</a:t>
             </a:r>
@@ -16657,11 +16657,11 @@
             <a:r>
               <a:rPr sz="1100" b="0" i="0">
                 <a:solidFill>
-                  <a:srgbClr val="90A4AE"/>
-                </a:solidFill>
-                <a:latin typeface="Calibri"/>
-              </a:rPr>
-              <a:t>Optimizing Modern C++ with Containers   |   Threading under a CPU quota</a:t>
+                  <a:srgbClr val="8A8A8A"/>
+                </a:solidFill>
+                <a:latin typeface="Red Hat Text"/>
+              </a:rPr>
+              <a:t>Stateless C++ Services   |   Threading under a CPU quota</a:t>
             </a:r>
           </a:p>
         </p:txBody>
@@ -16692,9 +16692,9 @@
             <a:r>
               <a:rPr sz="1100" b="0" i="0">
                 <a:solidFill>
-                  <a:srgbClr val="90A4AE"/>
-                </a:solidFill>
-                <a:latin typeface="Calibri"/>
+                  <a:srgbClr val="8A8A8A"/>
+                </a:solidFill>
+                <a:latin typeface="Red Hat Text"/>
               </a:rPr>
               <a:t>27 / 67</a:t>
             </a:r>
@@ -16727,9 +16727,9 @@
             <a:r>
               <a:rPr sz="2800" b="1" i="0">
                 <a:solidFill>
-                  <a:srgbClr val="1A2B3C"/>
-                </a:solidFill>
-                <a:latin typeface="Calibri"/>
+                  <a:srgbClr val="151515"/>
+                </a:solidFill>
+                <a:latin typeface="Red Hat Display"/>
               </a:rPr>
               <a:t>TLS, coroutines, and the co_await gotcha</a:t>
             </a:r>
@@ -16768,7 +16768,7 @@
                 <a:solidFill>
                   <a:srgbClr val="1E6FC8"/>
                 </a:solidFill>
-                <a:latin typeface="Calibri"/>
+                <a:latin typeface="Red Hat Text"/>
               </a:rPr>
               <a:t>Concurrency models and where state hides</a:t>
             </a:r>
@@ -16784,7 +16784,7 @@
                 <a:solidFill>
                   <a:srgbClr val="1A2B3C"/>
                 </a:solidFill>
-                <a:latin typeface="Calibri"/>
+                <a:latin typeface="Red Hat Text"/>
               </a:rPr>
               <a:t>•  TLS is process-scoped, per-thread — the CorrelationGuard pattern</a:t>
             </a:r>
@@ -16800,7 +16800,7 @@
                 <a:solidFill>
                   <a:srgbClr val="1A2B3C"/>
                 </a:solidFill>
-                <a:latin typeface="Calibri"/>
+                <a:latin typeface="Red Hat Text"/>
               </a:rPr>
               <a:t>•  OS threads, C++20 stackless coroutines, Boost.Fiber stackful</a:t>
             </a:r>
@@ -16816,7 +16816,7 @@
                 <a:solidFill>
                   <a:srgbClr val="1A2B3C"/>
                 </a:solidFill>
-                <a:latin typeface="Calibri"/>
+                <a:latin typeface="Red Hat Text"/>
               </a:rPr>
               <a:t>•  The trap: a value relied on via TLS after co_await may resume on another thread</a:t>
             </a:r>
@@ -16832,7 +16832,7 @@
                 <a:solidFill>
                   <a:srgbClr val="1A2B3C"/>
                 </a:solidFill>
-                <a:latin typeface="Calibri"/>
+                <a:latin typeface="Red Hat Text"/>
               </a:rPr>
               <a:t>•  Capture request context into the coroutine frame, not TLS</a:t>
             </a:r>
@@ -16880,7 +16880,7 @@
             <a:avLst/>
           </a:prstGeom>
           <a:solidFill>
-            <a:srgbClr val="1E6FC8"/>
+            <a:srgbClr val="EE0000"/>
           </a:solidFill>
           <a:ln>
             <a:noFill/>
@@ -16936,7 +16936,7 @@
                 <a:solidFill>
                   <a:srgbClr val="FFFFFF"/>
                 </a:solidFill>
-                <a:latin typeface="Calibri"/>
+                <a:latin typeface="Red Hat Display"/>
               </a:rPr>
               <a:t>Threading under a CPU quota</a:t>
             </a:r>
@@ -16960,7 +16960,7 @@
             </a:avLst>
           </a:prstGeom>
           <a:solidFill>
-            <a:srgbClr val="1A2B3C"/>
+            <a:srgbClr val="151515"/>
           </a:solidFill>
           <a:ln>
             <a:noFill/>
@@ -17016,7 +17016,7 @@
                 <a:solidFill>
                   <a:srgbClr val="FFFFFF"/>
                 </a:solidFill>
-                <a:latin typeface="Calibri"/>
+                <a:latin typeface="Red Hat Display"/>
               </a:rPr>
               <a:t>§5</a:t>
             </a:r>
@@ -17049,11 +17049,11 @@
             <a:r>
               <a:rPr sz="1100" b="0" i="0">
                 <a:solidFill>
-                  <a:srgbClr val="90A4AE"/>
-                </a:solidFill>
-                <a:latin typeface="Calibri"/>
-              </a:rPr>
-              <a:t>Optimizing Modern C++ with Containers   |   Threading under a CPU quota</a:t>
+                  <a:srgbClr val="8A8A8A"/>
+                </a:solidFill>
+                <a:latin typeface="Red Hat Text"/>
+              </a:rPr>
+              <a:t>Stateless C++ Services   |   Threading under a CPU quota</a:t>
             </a:r>
           </a:p>
         </p:txBody>
@@ -17084,9 +17084,9 @@
             <a:r>
               <a:rPr sz="1100" b="0" i="0">
                 <a:solidFill>
-                  <a:srgbClr val="90A4AE"/>
-                </a:solidFill>
-                <a:latin typeface="Calibri"/>
+                  <a:srgbClr val="8A8A8A"/>
+                </a:solidFill>
+                <a:latin typeface="Red Hat Text"/>
               </a:rPr>
               <a:t>28 / 67</a:t>
             </a:r>
@@ -17119,9 +17119,9 @@
             <a:r>
               <a:rPr sz="2800" b="1" i="0">
                 <a:solidFill>
-                  <a:srgbClr val="1A2B3C"/>
-                </a:solidFill>
-                <a:latin typeface="Calibri"/>
+                  <a:srgbClr val="151515"/>
+                </a:solidFill>
+                <a:latin typeface="Red Hat Display"/>
               </a:rPr>
               <a:t>The gRPC sync-server ResourceQuota trap</a:t>
             </a:r>
@@ -17160,7 +17160,7 @@
                 <a:solidFill>
                   <a:srgbClr val="E84855"/>
                 </a:solidFill>
-                <a:latin typeface="Calibri"/>
+                <a:latin typeface="Red Hat Text"/>
               </a:rPr>
               <a:t>Thread count is not request concurrency</a:t>
             </a:r>
@@ -17176,7 +17176,7 @@
                 <a:solidFill>
                   <a:srgbClr val="1A2B3C"/>
                 </a:solidFill>
-                <a:latin typeface="Calibri"/>
+                <a:latin typeface="Red Hat Text"/>
               </a:rPr>
               <a:t>•  Sync gRPC server: each in-flight RPC holds a thread for its duration</a:t>
             </a:r>
@@ -17192,7 +17192,7 @@
                 <a:solidFill>
                   <a:srgbClr val="1A2B3C"/>
                 </a:solidFill>
-                <a:latin typeface="Calibri"/>
+                <a:latin typeface="Red Hat Text"/>
               </a:rPr>
               <a:t>•  Set NUM_CQS, MIN/MAX_POLLERS, and a ResourceQuota max-threads from the budget</a:t>
             </a:r>
@@ -17208,7 +17208,7 @@
                 <a:solidFill>
                   <a:srgbClr val="1A2B3C"/>
                 </a:solidFill>
-                <a:latin typeface="Calibri"/>
+                <a:latin typeface="Red Hat Text"/>
               </a:rPr>
               <a:t>•  A blocking handler under-provisioned on threads serializes silently</a:t>
             </a:r>
@@ -17224,7 +17224,7 @@
                 <a:solidFill>
                   <a:srgbClr val="1A2B3C"/>
                 </a:solidFill>
-                <a:latin typeface="Calibri"/>
+                <a:latin typeface="Red Hat Text"/>
               </a:rPr>
               <a:t>•  Size the server thread pool from the cgroup quota, with headroom</a:t>
             </a:r>
@@ -17272,7 +17272,7 @@
             <a:avLst/>
           </a:prstGeom>
           <a:solidFill>
-            <a:srgbClr val="1E6FC8"/>
+            <a:srgbClr val="EE0000"/>
           </a:solidFill>
           <a:ln>
             <a:noFill/>
@@ -17328,7 +17328,7 @@
                 <a:solidFill>
                   <a:srgbClr val="FFFFFF"/>
                 </a:solidFill>
-                <a:latin typeface="Calibri"/>
+                <a:latin typeface="Red Hat Display"/>
               </a:rPr>
               <a:t>Threading under a CPU quota</a:t>
             </a:r>
@@ -17352,7 +17352,7 @@
             </a:avLst>
           </a:prstGeom>
           <a:solidFill>
-            <a:srgbClr val="1A2B3C"/>
+            <a:srgbClr val="151515"/>
           </a:solidFill>
           <a:ln>
             <a:noFill/>
@@ -17408,7 +17408,7 @@
                 <a:solidFill>
                   <a:srgbClr val="FFFFFF"/>
                 </a:solidFill>
-                <a:latin typeface="Calibri"/>
+                <a:latin typeface="Red Hat Display"/>
               </a:rPr>
               <a:t>§5</a:t>
             </a:r>
@@ -17441,11 +17441,11 @@
             <a:r>
               <a:rPr sz="1100" b="0" i="0">
                 <a:solidFill>
-                  <a:srgbClr val="90A4AE"/>
-                </a:solidFill>
-                <a:latin typeface="Calibri"/>
-              </a:rPr>
-              <a:t>Optimizing Modern C++ with Containers   |   Threading under a CPU quota</a:t>
+                  <a:srgbClr val="8A8A8A"/>
+                </a:solidFill>
+                <a:latin typeface="Red Hat Text"/>
+              </a:rPr>
+              <a:t>Stateless C++ Services   |   Threading under a CPU quota</a:t>
             </a:r>
           </a:p>
         </p:txBody>
@@ -17476,9 +17476,9 @@
             <a:r>
               <a:rPr sz="1100" b="0" i="0">
                 <a:solidFill>
-                  <a:srgbClr val="90A4AE"/>
-                </a:solidFill>
-                <a:latin typeface="Calibri"/>
+                  <a:srgbClr val="8A8A8A"/>
+                </a:solidFill>
+                <a:latin typeface="Red Hat Text"/>
               </a:rPr>
               <a:t>29 / 67</a:t>
             </a:r>
@@ -17511,9 +17511,9 @@
             <a:r>
               <a:rPr sz="2800" b="1" i="0">
                 <a:solidFill>
-                  <a:srgbClr val="1A2B3C"/>
-                </a:solidFill>
-                <a:latin typeface="Calibri"/>
+                  <a:srgbClr val="151515"/>
+                </a:solidFill>
+                <a:latin typeface="Red Hat Display"/>
               </a:rPr>
               <a:t>Allocator arenas under a quota</a:t>
             </a:r>
@@ -17552,7 +17552,7 @@
                 <a:solidFill>
                   <a:srgbClr val="F5A623"/>
                 </a:solidFill>
-                <a:latin typeface="Calibri"/>
+                <a:latin typeface="Red Hat Text"/>
               </a:rPr>
               <a:t>Even malloc cares about the CPU count</a:t>
             </a:r>
@@ -17568,7 +17568,7 @@
                 <a:solidFill>
                   <a:srgbClr val="1A2B3C"/>
                 </a:solidFill>
-                <a:latin typeface="Calibri"/>
+                <a:latin typeface="Red Hat Text"/>
               </a:rPr>
               <a:t>•  jemalloc / tcmalloc shard arenas per-CPU to reduce contention</a:t>
             </a:r>
@@ -17584,7 +17584,7 @@
                 <a:solidFill>
                   <a:srgbClr val="1A2B3C"/>
                 </a:solidFill>
-                <a:latin typeface="Calibri"/>
+                <a:latin typeface="Red Hat Text"/>
               </a:rPr>
               <a:t>•  Default arena count keys off the host cores, not the cgroup</a:t>
             </a:r>
@@ -17600,7 +17600,7 @@
                 <a:solidFill>
                   <a:srgbClr val="1A2B3C"/>
                 </a:solidFill>
-                <a:latin typeface="Calibri"/>
+                <a:latin typeface="Red Hat Text"/>
               </a:rPr>
               <a:t>•  Over-arena'd under a small quota wastes memory; size from the budget</a:t>
             </a:r>
@@ -17616,7 +17616,7 @@
                 <a:solidFill>
                   <a:srgbClr val="1A2B3C"/>
                 </a:solidFill>
-                <a:latin typeface="Calibri"/>
+                <a:latin typeface="Red Hat Text"/>
               </a:rPr>
               <a:t>•  MALLOC_CONF narenas (jemalloc) tuned from cpu_limit_cores()</a:t>
             </a:r>
@@ -17637,7 +17637,7 @@
     <p:bg>
       <p:bgPr>
         <a:solidFill>
-          <a:srgbClr val="0A1628"/>
+          <a:srgbClr val="AB0000"/>
         </a:solidFill>
         <a:effectLst/>
       </p:bgPr>
@@ -17675,9 +17675,9 @@
             <a:r>
               <a:rPr sz="18000" b="1" i="0">
                 <a:solidFill>
-                  <a:srgbClr val="00BCD4"/>
-                </a:solidFill>
-                <a:latin typeface="Calibri"/>
+                  <a:srgbClr val="EE0000"/>
+                </a:solidFill>
+                <a:latin typeface="Red Hat Display"/>
               </a:rPr>
               <a:t>§1</a:t>
             </a:r>
@@ -17712,7 +17712,7 @@
                 <a:solidFill>
                   <a:srgbClr val="FFFFFF"/>
                 </a:solidFill>
-                <a:latin typeface="Calibri"/>
+                <a:latin typeface="Red Hat Display"/>
               </a:rPr>
               <a:t>Statelessness as deployment posture</a:t>
             </a:r>
@@ -17745,9 +17745,9 @@
             <a:r>
               <a:rPr sz="2000" b="0" i="1">
                 <a:solidFill>
-                  <a:srgbClr val="90A4AE"/>
-                </a:solidFill>
-                <a:latin typeface="Calibri"/>
+                  <a:srgbClr val="8A8A8A"/>
+                </a:solidFill>
+                <a:latin typeface="Red Hat Text"/>
               </a:rPr>
               <a:t>Statelessness is not a code property — it's what the orchestrator can assume.</a:t>
             </a:r>
@@ -17780,9 +17780,9 @@
             <a:r>
               <a:rPr sz="1100" b="0" i="0">
                 <a:solidFill>
-                  <a:srgbClr val="90A4AE"/>
-                </a:solidFill>
-                <a:latin typeface="Calibri"/>
+                  <a:srgbClr val="8A8A8A"/>
+                </a:solidFill>
+                <a:latin typeface="Red Hat Text"/>
               </a:rPr>
               <a:t>3 / 67</a:t>
             </a:r>
@@ -17830,7 +17830,7 @@
             <a:avLst/>
           </a:prstGeom>
           <a:solidFill>
-            <a:srgbClr val="1E6FC8"/>
+            <a:srgbClr val="EE0000"/>
           </a:solidFill>
           <a:ln>
             <a:noFill/>
@@ -17886,7 +17886,7 @@
                 <a:solidFill>
                   <a:srgbClr val="FFFFFF"/>
                 </a:solidFill>
-                <a:latin typeface="Calibri"/>
+                <a:latin typeface="Red Hat Display"/>
               </a:rPr>
               <a:t>Threading under a CPU quota</a:t>
             </a:r>
@@ -17910,7 +17910,7 @@
             </a:avLst>
           </a:prstGeom>
           <a:solidFill>
-            <a:srgbClr val="1A2B3C"/>
+            <a:srgbClr val="151515"/>
           </a:solidFill>
           <a:ln>
             <a:noFill/>
@@ -17966,7 +17966,7 @@
                 <a:solidFill>
                   <a:srgbClr val="FFFFFF"/>
                 </a:solidFill>
-                <a:latin typeface="Calibri"/>
+                <a:latin typeface="Red Hat Display"/>
               </a:rPr>
               <a:t>§5</a:t>
             </a:r>
@@ -17999,11 +17999,11 @@
             <a:r>
               <a:rPr sz="1100" b="0" i="0">
                 <a:solidFill>
-                  <a:srgbClr val="90A4AE"/>
-                </a:solidFill>
-                <a:latin typeface="Calibri"/>
-              </a:rPr>
-              <a:t>Optimizing Modern C++ with Containers   |   Threading under a CPU quota</a:t>
+                  <a:srgbClr val="8A8A8A"/>
+                </a:solidFill>
+                <a:latin typeface="Red Hat Text"/>
+              </a:rPr>
+              <a:t>Stateless C++ Services   |   Threading under a CPU quota</a:t>
             </a:r>
           </a:p>
         </p:txBody>
@@ -18034,9 +18034,9 @@
             <a:r>
               <a:rPr sz="1100" b="0" i="0">
                 <a:solidFill>
-                  <a:srgbClr val="90A4AE"/>
-                </a:solidFill>
-                <a:latin typeface="Calibri"/>
+                  <a:srgbClr val="8A8A8A"/>
+                </a:solidFill>
+                <a:latin typeface="Red Hat Text"/>
               </a:rPr>
               <a:t>30 / 67</a:t>
             </a:r>
@@ -18069,9 +18069,9 @@
             <a:r>
               <a:rPr sz="2800" b="1" i="0">
                 <a:solidFill>
-                  <a:srgbClr val="1A2B3C"/>
-                </a:solidFill>
-                <a:latin typeface="Calibri"/>
+                  <a:srgbClr val="151515"/>
+                </a:solidFill>
+                <a:latin typeface="Red Hat Display"/>
               </a:rPr>
               <a:t>Cooperative cancellation with stop_token</a:t>
             </a:r>
@@ -18110,7 +18110,7 @@
                 <a:solidFill>
                   <a:srgbClr val="27AE60"/>
                 </a:solidFill>
-                <a:latin typeface="Calibri"/>
+                <a:latin typeface="Red Hat Text"/>
               </a:rPr>
               <a:t>std::jthread + std::stop_token (C++20)</a:t>
             </a:r>
@@ -18126,7 +18126,7 @@
                 <a:solidFill>
                   <a:srgbClr val="1A2B3C"/>
                 </a:solidFill>
-                <a:latin typeface="Calibri"/>
+                <a:latin typeface="Red Hat Text"/>
               </a:rPr>
               <a:t>•  Background workers take a stop_token; loop while !stop_requested()</a:t>
             </a:r>
@@ -18142,7 +18142,7 @@
                 <a:solidFill>
                   <a:srgbClr val="1A2B3C"/>
                 </a:solidFill>
-                <a:latin typeface="Calibri"/>
+                <a:latin typeface="Red Hat Text"/>
               </a:rPr>
               <a:t>•  std::jthread joins on destruction — no detached threads outliving main()</a:t>
             </a:r>
@@ -18158,7 +18158,7 @@
                 <a:solidFill>
                   <a:srgbClr val="1A2B3C"/>
                 </a:solidFill>
-                <a:latin typeface="Calibri"/>
+                <a:latin typeface="Red Hat Text"/>
               </a:rPr>
               <a:t>•  Shutdown requests stop, the worker drains, the jthread joins cleanly</a:t>
             </a:r>
@@ -18174,7 +18174,7 @@
                 <a:solidFill>
                   <a:srgbClr val="1A2B3C"/>
                 </a:solidFill>
-                <a:latin typeface="Calibri"/>
+                <a:latin typeface="Red Hat Text"/>
               </a:rPr>
               <a:t>•  Ties directly into the graceful-shutdown sequence (health &amp; shutdown)</a:t>
             </a:r>
@@ -18195,7 +18195,7 @@
     <p:bg>
       <p:bgPr>
         <a:solidFill>
-          <a:srgbClr val="0A1628"/>
+          <a:srgbClr val="AB0000"/>
         </a:solidFill>
         <a:effectLst/>
       </p:bgPr>
@@ -18224,7 +18224,7 @@
             </a:avLst>
           </a:prstGeom>
           <a:solidFill>
-            <a:srgbClr val="27AE60"/>
+            <a:srgbClr val="FFA000"/>
           </a:solidFill>
           <a:ln>
             <a:noFill/>
@@ -18280,7 +18280,7 @@
                 <a:solidFill>
                   <a:srgbClr val="FFFFFF"/>
                 </a:solidFill>
-                <a:latin typeface="Calibri"/>
+                <a:latin typeface="Red Hat Display"/>
               </a:rPr>
               <a:t>▶ DEMO 05</a:t>
             </a:r>
@@ -18315,7 +18315,7 @@
                 <a:solidFill>
                   <a:srgbClr val="FFFFFF"/>
                 </a:solidFill>
-                <a:latin typeface="Calibri"/>
+                <a:latin typeface="Red Hat Display"/>
               </a:rPr>
               <a:t>Demo — Threading &amp; CPU budget</a:t>
             </a:r>
@@ -18348,9 +18348,9 @@
             <a:r>
               <a:rPr sz="2000" b="0" i="0">
                 <a:solidFill>
-                  <a:srgbClr val="ECF0F1"/>
-                </a:solidFill>
-                <a:latin typeface="Calibri"/>
+                  <a:srgbClr val="F4F4F4"/>
+                </a:solidFill>
+                <a:latin typeface="Red Hat Text"/>
               </a:rPr>
               <a:t>A cgroup-aware probe and a pool-size sweep under --cpus=2 show that oversubscription buys no throughput and wrecks tail latency through CFS throttling.</a:t>
             </a:r>
@@ -18372,7 +18372,7 @@
             <a:avLst/>
           </a:prstGeom>
           <a:solidFill>
-            <a:srgbClr val="0D2137"/>
+            <a:srgbClr val="151515"/>
           </a:solidFill>
           <a:ln>
             <a:noFill/>
@@ -18426,9 +18426,9 @@
             <a:r>
               <a:rPr sz="1800" b="0" i="0">
                 <a:solidFill>
-                  <a:srgbClr val="00BCD4"/>
-                </a:solidFill>
-                <a:latin typeface="Consolas"/>
+                  <a:srgbClr val="EE0000"/>
+                </a:solidFill>
+                <a:latin typeface="Red Hat Mono"/>
               </a:rPr>
               <a:t>$ cd examples/statelessness/05-threading &amp;&amp; ./demo.sh</a:t>
             </a:r>
@@ -18461,9 +18461,9 @@
             <a:r>
               <a:rPr sz="1100" b="0" i="0">
                 <a:solidFill>
-                  <a:srgbClr val="90A4AE"/>
-                </a:solidFill>
-                <a:latin typeface="Consolas"/>
+                  <a:srgbClr val="8A8A8A"/>
+                </a:solidFill>
+                <a:latin typeface="Red Hat Mono"/>
               </a:rPr>
               <a:t>  source on site: patterncatalyst.github.io/cpp-statelessness/examples/statelessness-05-threading/</a:t>
             </a:r>
@@ -18496,9 +18496,9 @@
             <a:r>
               <a:rPr sz="1100" b="0" i="0">
                 <a:solidFill>
-                  <a:srgbClr val="90A4AE"/>
-                </a:solidFill>
-                <a:latin typeface="Calibri"/>
+                  <a:srgbClr val="8A8A8A"/>
+                </a:solidFill>
+                <a:latin typeface="Red Hat Text"/>
               </a:rPr>
               <a:t>31 / 67</a:t>
             </a:r>
@@ -18519,7 +18519,7 @@
     <p:bg>
       <p:bgPr>
         <a:solidFill>
-          <a:srgbClr val="0A1628"/>
+          <a:srgbClr val="AB0000"/>
         </a:solidFill>
         <a:effectLst/>
       </p:bgPr>
@@ -18557,9 +18557,9 @@
             <a:r>
               <a:rPr sz="18000" b="1" i="0">
                 <a:solidFill>
-                  <a:srgbClr val="00BCD4"/>
-                </a:solidFill>
-                <a:latin typeface="Calibri"/>
+                  <a:srgbClr val="EE0000"/>
+                </a:solidFill>
+                <a:latin typeface="Red Hat Display"/>
               </a:rPr>
               <a:t>§6</a:t>
             </a:r>
@@ -18594,7 +18594,7 @@
                 <a:solidFill>
                   <a:srgbClr val="FFFFFF"/>
                 </a:solidFill>
-                <a:latin typeface="Calibri"/>
+                <a:latin typeface="Red Hat Display"/>
               </a:rPr>
               <a:t>12-Factor adapted to C++</a:t>
             </a:r>
@@ -18627,9 +18627,9 @@
             <a:r>
               <a:rPr sz="2000" b="0" i="1">
                 <a:solidFill>
-                  <a:srgbClr val="90A4AE"/>
-                </a:solidFill>
-                <a:latin typeface="Calibri"/>
+                  <a:srgbClr val="8A8A8A"/>
+                </a:solidFill>
+                <a:latin typeface="Red Hat Text"/>
               </a:rPr>
               <a:t>Most factors map directly; three collide with C++ idioms.</a:t>
             </a:r>
@@ -18662,9 +18662,9 @@
             <a:r>
               <a:rPr sz="1100" b="0" i="0">
                 <a:solidFill>
-                  <a:srgbClr val="90A4AE"/>
-                </a:solidFill>
-                <a:latin typeface="Calibri"/>
+                  <a:srgbClr val="8A8A8A"/>
+                </a:solidFill>
+                <a:latin typeface="Red Hat Text"/>
               </a:rPr>
               <a:t>32 / 67</a:t>
             </a:r>
@@ -18712,7 +18712,7 @@
             <a:avLst/>
           </a:prstGeom>
           <a:solidFill>
-            <a:srgbClr val="1E6FC8"/>
+            <a:srgbClr val="EE0000"/>
           </a:solidFill>
           <a:ln>
             <a:noFill/>
@@ -18768,7 +18768,7 @@
                 <a:solidFill>
                   <a:srgbClr val="FFFFFF"/>
                 </a:solidFill>
-                <a:latin typeface="Calibri"/>
+                <a:latin typeface="Red Hat Display"/>
               </a:rPr>
               <a:t>12-Factor adapted to C++</a:t>
             </a:r>
@@ -18792,7 +18792,7 @@
             </a:avLst>
           </a:prstGeom>
           <a:solidFill>
-            <a:srgbClr val="1A2B3C"/>
+            <a:srgbClr val="151515"/>
           </a:solidFill>
           <a:ln>
             <a:noFill/>
@@ -18848,7 +18848,7 @@
                 <a:solidFill>
                   <a:srgbClr val="FFFFFF"/>
                 </a:solidFill>
-                <a:latin typeface="Calibri"/>
+                <a:latin typeface="Red Hat Display"/>
               </a:rPr>
               <a:t>§6</a:t>
             </a:r>
@@ -18881,11 +18881,11 @@
             <a:r>
               <a:rPr sz="1100" b="0" i="0">
                 <a:solidFill>
-                  <a:srgbClr val="90A4AE"/>
-                </a:solidFill>
-                <a:latin typeface="Calibri"/>
-              </a:rPr>
-              <a:t>Optimizing Modern C++ with Containers   |   12-Factor adapted to C++</a:t>
+                  <a:srgbClr val="8A8A8A"/>
+                </a:solidFill>
+                <a:latin typeface="Red Hat Text"/>
+              </a:rPr>
+              <a:t>Stateless C++ Services   |   12-Factor adapted to C++</a:t>
             </a:r>
           </a:p>
         </p:txBody>
@@ -18916,9 +18916,9 @@
             <a:r>
               <a:rPr sz="1100" b="0" i="0">
                 <a:solidFill>
-                  <a:srgbClr val="90A4AE"/>
-                </a:solidFill>
-                <a:latin typeface="Calibri"/>
+                  <a:srgbClr val="8A8A8A"/>
+                </a:solidFill>
+                <a:latin typeface="Red Hat Text"/>
               </a:rPr>
               <a:t>33 / 67</a:t>
             </a:r>
@@ -18951,9 +18951,9 @@
             <a:r>
               <a:rPr sz="2800" b="1" i="0">
                 <a:solidFill>
-                  <a:srgbClr val="1A2B3C"/>
-                </a:solidFill>
-                <a:latin typeface="Calibri"/>
+                  <a:srgbClr val="151515"/>
+                </a:solidFill>
+                <a:latin typeface="Red Hat Display"/>
               </a:rPr>
               <a:t>Config: four binding times</a:t>
             </a:r>
@@ -18992,7 +18992,7 @@
                 <a:solidFill>
                   <a:srgbClr val="1E6FC8"/>
                 </a:solidFill>
-                <a:latin typeface="Calibri"/>
+                <a:latin typeface="Red Hat Text"/>
               </a:rPr>
               <a:t>Where a value gets fixed matters</a:t>
             </a:r>
@@ -19008,7 +19008,7 @@
                 <a:solidFill>
                   <a:srgbClr val="1A2B3C"/>
                 </a:solidFill>
-                <a:latin typeface="Calibri"/>
+                <a:latin typeface="Red Hat Text"/>
               </a:rPr>
               <a:t>•  Compile-time — constexpr, template params; zero runtime cost, needs a rebuild</a:t>
             </a:r>
@@ -19024,7 +19024,7 @@
                 <a:solidFill>
                   <a:srgbClr val="1A2B3C"/>
                 </a:solidFill>
-                <a:latin typeface="Calibri"/>
+                <a:latin typeface="Red Hat Text"/>
               </a:rPr>
               <a:t>•  Link-time — which libraries, which ABI</a:t>
             </a:r>
@@ -19040,7 +19040,7 @@
                 <a:solidFill>
                   <a:srgbClr val="1A2B3C"/>
                 </a:solidFill>
-                <a:latin typeface="Calibri"/>
+                <a:latin typeface="Red Hat Text"/>
               </a:rPr>
               <a:t>•  Env-time — parsed once in main() from the environment (12-factor's Config)</a:t>
             </a:r>
@@ -19056,7 +19056,7 @@
                 <a:solidFill>
                   <a:srgbClr val="1A2B3C"/>
                 </a:solidFill>
-                <a:latin typeface="Calibri"/>
+                <a:latin typeface="Red Hat Text"/>
               </a:rPr>
               <a:t>•  Runtime — reloadable policy; rare, and the most expensive</a:t>
             </a:r>
@@ -19072,7 +19072,7 @@
                 <a:solidFill>
                   <a:srgbClr val="90A4AE"/>
                 </a:solidFill>
-                <a:latin typeface="Calibri"/>
+                <a:latin typeface="Red Hat Text"/>
               </a:rPr>
               <a:t>Parse env-time config once into an immutable struct; pass it by const reference. No getenv scattered around.</a:t>
             </a:r>
@@ -19144,7 +19144,7 @@
             <a:avLst/>
           </a:prstGeom>
           <a:solidFill>
-            <a:srgbClr val="1E6FC8"/>
+            <a:srgbClr val="EE0000"/>
           </a:solidFill>
           <a:ln>
             <a:noFill/>
@@ -19200,7 +19200,7 @@
                 <a:solidFill>
                   <a:srgbClr val="FFFFFF"/>
                 </a:solidFill>
-                <a:latin typeface="Calibri"/>
+                <a:latin typeface="Red Hat Display"/>
               </a:rPr>
               <a:t>12-Factor adapted to C++</a:t>
             </a:r>
@@ -19224,7 +19224,7 @@
             </a:avLst>
           </a:prstGeom>
           <a:solidFill>
-            <a:srgbClr val="1A2B3C"/>
+            <a:srgbClr val="151515"/>
           </a:solidFill>
           <a:ln>
             <a:noFill/>
@@ -19280,7 +19280,7 @@
                 <a:solidFill>
                   <a:srgbClr val="FFFFFF"/>
                 </a:solidFill>
-                <a:latin typeface="Calibri"/>
+                <a:latin typeface="Red Hat Display"/>
               </a:rPr>
               <a:t>§6</a:t>
             </a:r>
@@ -19313,11 +19313,11 @@
             <a:r>
               <a:rPr sz="1100" b="0" i="0">
                 <a:solidFill>
-                  <a:srgbClr val="90A4AE"/>
-                </a:solidFill>
-                <a:latin typeface="Calibri"/>
-              </a:rPr>
-              <a:t>Optimizing Modern C++ with Containers   |   12-Factor adapted to C++</a:t>
+                  <a:srgbClr val="8A8A8A"/>
+                </a:solidFill>
+                <a:latin typeface="Red Hat Text"/>
+              </a:rPr>
+              <a:t>Stateless C++ Services   |   12-Factor adapted to C++</a:t>
             </a:r>
           </a:p>
         </p:txBody>
@@ -19348,9 +19348,9 @@
             <a:r>
               <a:rPr sz="1100" b="0" i="0">
                 <a:solidFill>
-                  <a:srgbClr val="90A4AE"/>
-                </a:solidFill>
-                <a:latin typeface="Calibri"/>
+                  <a:srgbClr val="8A8A8A"/>
+                </a:solidFill>
+                <a:latin typeface="Red Hat Text"/>
               </a:rPr>
               <a:t>34 / 67</a:t>
             </a:r>
@@ -19383,9 +19383,9 @@
             <a:r>
               <a:rPr sz="2800" b="1" i="0">
                 <a:solidFill>
-                  <a:srgbClr val="1A2B3C"/>
-                </a:solidFill>
-                <a:latin typeface="Calibri"/>
+                  <a:srgbClr val="151515"/>
+                </a:solidFill>
+                <a:latin typeface="Red Hat Display"/>
               </a:rPr>
               <a:t>Processes &amp; Disposability</a:t>
             </a:r>
@@ -19424,7 +19424,7 @@
                 <a:solidFill>
                   <a:srgbClr val="F5A623"/>
                 </a:solidFill>
-                <a:latin typeface="Calibri"/>
+                <a:latin typeface="Red Hat Text"/>
               </a:rPr>
               <a:t>Singletons and the startup tax</a:t>
             </a:r>
@@ -19440,7 +19440,7 @@
                 <a:solidFill>
                   <a:srgbClr val="1A2B3C"/>
                 </a:solidFill>
-                <a:latin typeface="Calibri"/>
+                <a:latin typeface="Red Hat Text"/>
               </a:rPr>
               <a:t>•  Processes: the Meyers singleton hides ownership — inject instead</a:t>
             </a:r>
@@ -19456,7 +19456,7 @@
                 <a:solidFill>
                   <a:srgbClr val="1A2B3C"/>
                 </a:solidFill>
-                <a:latin typeface="Calibri"/>
+                <a:latin typeface="Red Hat Text"/>
               </a:rPr>
               <a:t>•  Disposability: fast startup and clean shutdown are features under orchestration</a:t>
             </a:r>
@@ -19472,7 +19472,7 @@
                 <a:solidFill>
                   <a:srgbClr val="1A2B3C"/>
                 </a:solidFill>
-                <a:latin typeface="Calibri"/>
+                <a:latin typeface="Red Hat Text"/>
               </a:rPr>
               <a:t>•  The C++ startup tax — static initialization order, constinit to tame it</a:t>
             </a:r>
@@ -19488,7 +19488,7 @@
                 <a:solidFill>
                   <a:srgbClr val="1A2B3C"/>
                 </a:solidFill>
-                <a:latin typeface="Calibri"/>
+                <a:latin typeface="Red Hat Text"/>
               </a:rPr>
               <a:t>•  Staged startup: NOT_SERVING → warm → SERVING (health &amp; shutdown)</a:t>
             </a:r>
@@ -19536,7 +19536,7 @@
             <a:avLst/>
           </a:prstGeom>
           <a:solidFill>
-            <a:srgbClr val="1E6FC8"/>
+            <a:srgbClr val="EE0000"/>
           </a:solidFill>
           <a:ln>
             <a:noFill/>
@@ -19592,7 +19592,7 @@
                 <a:solidFill>
                   <a:srgbClr val="FFFFFF"/>
                 </a:solidFill>
-                <a:latin typeface="Calibri"/>
+                <a:latin typeface="Red Hat Display"/>
               </a:rPr>
               <a:t>12-Factor adapted to C++</a:t>
             </a:r>
@@ -19616,7 +19616,7 @@
             </a:avLst>
           </a:prstGeom>
           <a:solidFill>
-            <a:srgbClr val="1A2B3C"/>
+            <a:srgbClr val="151515"/>
           </a:solidFill>
           <a:ln>
             <a:noFill/>
@@ -19672,7 +19672,7 @@
                 <a:solidFill>
                   <a:srgbClr val="FFFFFF"/>
                 </a:solidFill>
-                <a:latin typeface="Calibri"/>
+                <a:latin typeface="Red Hat Display"/>
               </a:rPr>
               <a:t>§6</a:t>
             </a:r>
@@ -19705,11 +19705,11 @@
             <a:r>
               <a:rPr sz="1100" b="0" i="0">
                 <a:solidFill>
-                  <a:srgbClr val="90A4AE"/>
-                </a:solidFill>
-                <a:latin typeface="Calibri"/>
-              </a:rPr>
-              <a:t>Optimizing Modern C++ with Containers   |   12-Factor adapted to C++</a:t>
+                  <a:srgbClr val="8A8A8A"/>
+                </a:solidFill>
+                <a:latin typeface="Red Hat Text"/>
+              </a:rPr>
+              <a:t>Stateless C++ Services   |   12-Factor adapted to C++</a:t>
             </a:r>
           </a:p>
         </p:txBody>
@@ -19740,9 +19740,9 @@
             <a:r>
               <a:rPr sz="1100" b="0" i="0">
                 <a:solidFill>
-                  <a:srgbClr val="90A4AE"/>
-                </a:solidFill>
-                <a:latin typeface="Calibri"/>
+                  <a:srgbClr val="8A8A8A"/>
+                </a:solidFill>
+                <a:latin typeface="Red Hat Text"/>
               </a:rPr>
               <a:t>35 / 67</a:t>
             </a:r>
@@ -19775,9 +19775,9 @@
             <a:r>
               <a:rPr sz="2800" b="1" i="0">
                 <a:solidFill>
-                  <a:srgbClr val="1A2B3C"/>
-                </a:solidFill>
-                <a:latin typeface="Calibri"/>
+                  <a:srgbClr val="151515"/>
+                </a:solidFill>
+                <a:latin typeface="Red Hat Display"/>
               </a:rPr>
               <a:t>Taming the startup tax with constinit</a:t>
             </a:r>
@@ -19816,7 +19816,7 @@
                 <a:solidFill>
                   <a:srgbClr val="E84855"/>
                 </a:solidFill>
-                <a:latin typeface="Calibri"/>
+                <a:latin typeface="Red Hat Text"/>
               </a:rPr>
               <a:t>Static init order is a latency and correctness risk</a:t>
             </a:r>
@@ -19832,7 +19832,7 @@
                 <a:solidFill>
                   <a:srgbClr val="1A2B3C"/>
                 </a:solidFill>
-                <a:latin typeface="Calibri"/>
+                <a:latin typeface="Red Hat Text"/>
               </a:rPr>
               <a:t>•  Non-trivial globals run constructors before main() — the startup tax</a:t>
             </a:r>
@@ -19848,7 +19848,7 @@
                 <a:solidFill>
                   <a:srgbClr val="1A2B3C"/>
                 </a:solidFill>
-                <a:latin typeface="Calibri"/>
+                <a:latin typeface="Red Hat Text"/>
               </a:rPr>
               <a:t>•  The static initialization order fiasco: cross-TU ordering is undefined</a:t>
             </a:r>
@@ -19864,7 +19864,7 @@
                 <a:solidFill>
                   <a:srgbClr val="1A2B3C"/>
                 </a:solidFill>
-                <a:latin typeface="Calibri"/>
+                <a:latin typeface="Red Hat Text"/>
               </a:rPr>
               <a:t>•  constinit forces compile-time init — no runtime constructor, defined order</a:t>
             </a:r>
@@ -19880,7 +19880,7 @@
                 <a:solidFill>
                   <a:srgbClr val="1A2B3C"/>
                 </a:solidFill>
-                <a:latin typeface="Calibri"/>
+                <a:latin typeface="Red Hat Text"/>
               </a:rPr>
               <a:t>•  Prefer locals in main() over globals; constinit for the unavoidable ones</a:t>
             </a:r>
@@ -19902,7 +19902,7 @@
             <a:avLst/>
           </a:prstGeom>
           <a:solidFill>
-            <a:srgbClr val="0D2137"/>
+            <a:srgbClr val="151515"/>
           </a:solidFill>
           <a:ln>
             <a:noFill/>
@@ -19955,9 +19955,9 @@
             <a:r>
               <a:rPr sz="1100">
                 <a:solidFill>
-                  <a:srgbClr val="ECF0F1"/>
-                </a:solidFill>
-                <a:latin typeface="Consolas"/>
+                  <a:srgbClr val="F4F4F4"/>
+                </a:solidFill>
+                <a:latin typeface="Red Hat Mono"/>
               </a:rPr>
               <a:t>// Forced to be initialized at compile time — zero startup cost,</a:t>
             </a:r>
@@ -19966,9 +19966,9 @@
             <a:r>
               <a:rPr sz="1100">
                 <a:solidFill>
-                  <a:srgbClr val="ECF0F1"/>
-                </a:solidFill>
-                <a:latin typeface="Consolas"/>
+                  <a:srgbClr val="F4F4F4"/>
+                </a:solidFill>
+                <a:latin typeface="Red Hat Mono"/>
               </a:rPr>
               <a:t>// no ordering fiasco:</a:t>
             </a:r>
@@ -19977,9 +19977,9 @@
             <a:r>
               <a:rPr sz="1100">
                 <a:solidFill>
-                  <a:srgbClr val="ECF0F1"/>
-                </a:solidFill>
-                <a:latin typeface="Consolas"/>
+                  <a:srgbClr val="F4F4F4"/>
+                </a:solidFill>
+                <a:latin typeface="Red Hat Mono"/>
               </a:rPr>
               <a:t>constinit std::string_view kBuildVersion = "1.4.2";</a:t>
             </a:r>
@@ -19988,9 +19988,9 @@
             <a:r>
               <a:rPr sz="1100">
                 <a:solidFill>
-                  <a:srgbClr val="ECF0F1"/>
-                </a:solidFill>
-                <a:latin typeface="Consolas"/>
+                  <a:srgbClr val="F4F4F4"/>
+                </a:solidFill>
+                <a:latin typeface="Red Hat Mono"/>
               </a:rPr>
               <a:t> </a:t>
             </a:r>
@@ -19999,9 +19999,9 @@
             <a:r>
               <a:rPr sz="1100">
                 <a:solidFill>
-                  <a:srgbClr val="ECF0F1"/>
-                </a:solidFill>
-                <a:latin typeface="Consolas"/>
+                  <a:srgbClr val="F4F4F4"/>
+                </a:solidFill>
+                <a:latin typeface="Red Hat Mono"/>
               </a:rPr>
               <a:t>// Better still: own it in main() and inject it.</a:t>
             </a:r>
@@ -20010,9 +20010,9 @@
             <a:r>
               <a:rPr sz="1100">
                 <a:solidFill>
-                  <a:srgbClr val="ECF0F1"/>
-                </a:solidFill>
-                <a:latin typeface="Consolas"/>
+                  <a:srgbClr val="F4F4F4"/>
+                </a:solidFill>
+                <a:latin typeface="Red Hat Mono"/>
               </a:rPr>
               <a:t>// Worst: a non-trivial global that runs a constructor</a:t>
             </a:r>
@@ -20021,9 +20021,9 @@
             <a:r>
               <a:rPr sz="1100">
                 <a:solidFill>
-                  <a:srgbClr val="ECF0F1"/>
-                </a:solidFill>
-                <a:latin typeface="Consolas"/>
+                  <a:srgbClr val="F4F4F4"/>
+                </a:solidFill>
+                <a:latin typeface="Red Hat Mono"/>
               </a:rPr>
               <a:t>//        before main() in an undefined cross-TU order.</a:t>
             </a:r>
@@ -20071,7 +20071,7 @@
             <a:avLst/>
           </a:prstGeom>
           <a:solidFill>
-            <a:srgbClr val="1E6FC8"/>
+            <a:srgbClr val="EE0000"/>
           </a:solidFill>
           <a:ln>
             <a:noFill/>
@@ -20127,7 +20127,7 @@
                 <a:solidFill>
                   <a:srgbClr val="FFFFFF"/>
                 </a:solidFill>
-                <a:latin typeface="Calibri"/>
+                <a:latin typeface="Red Hat Display"/>
               </a:rPr>
               <a:t>12-Factor adapted to C++</a:t>
             </a:r>
@@ -20151,7 +20151,7 @@
             </a:avLst>
           </a:prstGeom>
           <a:solidFill>
-            <a:srgbClr val="1A2B3C"/>
+            <a:srgbClr val="151515"/>
           </a:solidFill>
           <a:ln>
             <a:noFill/>
@@ -20207,7 +20207,7 @@
                 <a:solidFill>
                   <a:srgbClr val="FFFFFF"/>
                 </a:solidFill>
-                <a:latin typeface="Calibri"/>
+                <a:latin typeface="Red Hat Display"/>
               </a:rPr>
               <a:t>§6</a:t>
             </a:r>
@@ -20240,11 +20240,11 @@
             <a:r>
               <a:rPr sz="1100" b="0" i="0">
                 <a:solidFill>
-                  <a:srgbClr val="90A4AE"/>
-                </a:solidFill>
-                <a:latin typeface="Calibri"/>
-              </a:rPr>
-              <a:t>Optimizing Modern C++ with Containers   |   12-Factor adapted to C++</a:t>
+                  <a:srgbClr val="8A8A8A"/>
+                </a:solidFill>
+                <a:latin typeface="Red Hat Text"/>
+              </a:rPr>
+              <a:t>Stateless C++ Services   |   12-Factor adapted to C++</a:t>
             </a:r>
           </a:p>
         </p:txBody>
@@ -20275,9 +20275,9 @@
             <a:r>
               <a:rPr sz="1100" b="0" i="0">
                 <a:solidFill>
-                  <a:srgbClr val="90A4AE"/>
-                </a:solidFill>
-                <a:latin typeface="Calibri"/>
+                  <a:srgbClr val="8A8A8A"/>
+                </a:solidFill>
+                <a:latin typeface="Red Hat Text"/>
               </a:rPr>
               <a:t>36 / 67</a:t>
             </a:r>
@@ -20310,9 +20310,9 @@
             <a:r>
               <a:rPr sz="2800" b="1" i="0">
                 <a:solidFill>
-                  <a:srgbClr val="1A2B3C"/>
-                </a:solidFill>
-                <a:latin typeface="Calibri"/>
+                  <a:srgbClr val="151515"/>
+                </a:solidFill>
+                <a:latin typeface="Red Hat Display"/>
               </a:rPr>
               <a:t>The other factors, briefly</a:t>
             </a:r>
@@ -20351,7 +20351,7 @@
                 <a:solidFill>
                   <a:srgbClr val="1E6FC8"/>
                 </a:solidFill>
-                <a:latin typeface="Calibri"/>
+                <a:latin typeface="Red Hat Text"/>
               </a:rPr>
               <a:t>Most of 12-factor maps cleanly</a:t>
             </a:r>
@@ -20367,7 +20367,7 @@
                 <a:solidFill>
                   <a:srgbClr val="1A2B3C"/>
                 </a:solidFill>
-                <a:latin typeface="Calibri"/>
+                <a:latin typeface="Red Hat Text"/>
               </a:rPr>
               <a:t>•  Logs → stdout, the collector owns persistence (ephemeral filesystem)</a:t>
             </a:r>
@@ -20383,7 +20383,7 @@
                 <a:solidFill>
                   <a:srgbClr val="1A2B3C"/>
                 </a:solidFill>
-                <a:latin typeface="Calibri"/>
+                <a:latin typeface="Red Hat Text"/>
               </a:rPr>
               <a:t>•  Backing services → attached resources, swappable by config (state externalization)</a:t>
             </a:r>
@@ -20399,7 +20399,7 @@
                 <a:solidFill>
                   <a:srgbClr val="1A2B3C"/>
                 </a:solidFill>
-                <a:latin typeface="Calibri"/>
+                <a:latin typeface="Red Hat Text"/>
               </a:rPr>
               <a:t>•  Build/release/run → the multi-stage Containerfile + a lockfile (build tooling)</a:t>
             </a:r>
@@ -20415,7 +20415,7 @@
                 <a:solidFill>
                   <a:srgbClr val="1A2B3C"/>
                 </a:solidFill>
-                <a:latin typeface="Calibri"/>
+                <a:latin typeface="Red Hat Text"/>
               </a:rPr>
               <a:t>•  Port binding, concurrency, dev/prod parity → natural fits for a C++ service</a:t>
             </a:r>
@@ -20436,7 +20436,7 @@
     <p:bg>
       <p:bgPr>
         <a:solidFill>
-          <a:srgbClr val="0A1628"/>
+          <a:srgbClr val="AB0000"/>
         </a:solidFill>
         <a:effectLst/>
       </p:bgPr>
@@ -20474,9 +20474,9 @@
             <a:r>
               <a:rPr sz="18000" b="1" i="0">
                 <a:solidFill>
-                  <a:srgbClr val="00BCD4"/>
-                </a:solidFill>
-                <a:latin typeface="Calibri"/>
+                  <a:srgbClr val="EE0000"/>
+                </a:solidFill>
+                <a:latin typeface="Red Hat Display"/>
               </a:rPr>
               <a:t>§7</a:t>
             </a:r>
@@ -20511,7 +20511,7 @@
                 <a:solidFill>
                   <a:srgbClr val="FFFFFF"/>
                 </a:solidFill>
-                <a:latin typeface="Calibri"/>
+                <a:latin typeface="Red Hat Display"/>
               </a:rPr>
               <a:t>State externalization</a:t>
             </a:r>
@@ -20544,9 +20544,9 @@
             <a:r>
               <a:rPr sz="2000" b="0" i="1">
                 <a:solidFill>
-                  <a:srgbClr val="90A4AE"/>
-                </a:solidFill>
-                <a:latin typeface="Calibri"/>
+                  <a:srgbClr val="8A8A8A"/>
+                </a:solidFill>
+                <a:latin typeface="Red Hat Text"/>
               </a:rPr>
               <a:t>What goes outside the process, and how to reach it safely.</a:t>
             </a:r>
@@ -20579,9 +20579,9 @@
             <a:r>
               <a:rPr sz="1100" b="0" i="0">
                 <a:solidFill>
-                  <a:srgbClr val="90A4AE"/>
-                </a:solidFill>
-                <a:latin typeface="Calibri"/>
+                  <a:srgbClr val="8A8A8A"/>
+                </a:solidFill>
+                <a:latin typeface="Red Hat Text"/>
               </a:rPr>
               <a:t>37 / 67</a:t>
             </a:r>
@@ -20629,7 +20629,7 @@
             <a:avLst/>
           </a:prstGeom>
           <a:solidFill>
-            <a:srgbClr val="1E6FC8"/>
+            <a:srgbClr val="EE0000"/>
           </a:solidFill>
           <a:ln>
             <a:noFill/>
@@ -20685,7 +20685,7 @@
                 <a:solidFill>
                   <a:srgbClr val="FFFFFF"/>
                 </a:solidFill>
-                <a:latin typeface="Calibri"/>
+                <a:latin typeface="Red Hat Display"/>
               </a:rPr>
               <a:t>State externalization</a:t>
             </a:r>
@@ -20709,7 +20709,7 @@
             </a:avLst>
           </a:prstGeom>
           <a:solidFill>
-            <a:srgbClr val="1A2B3C"/>
+            <a:srgbClr val="151515"/>
           </a:solidFill>
           <a:ln>
             <a:noFill/>
@@ -20765,7 +20765,7 @@
                 <a:solidFill>
                   <a:srgbClr val="FFFFFF"/>
                 </a:solidFill>
-                <a:latin typeface="Calibri"/>
+                <a:latin typeface="Red Hat Display"/>
               </a:rPr>
               <a:t>§7</a:t>
             </a:r>
@@ -20798,11 +20798,11 @@
             <a:r>
               <a:rPr sz="1100" b="0" i="0">
                 <a:solidFill>
-                  <a:srgbClr val="90A4AE"/>
-                </a:solidFill>
-                <a:latin typeface="Calibri"/>
-              </a:rPr>
-              <a:t>Optimizing Modern C++ with Containers   |   State externalization</a:t>
+                  <a:srgbClr val="8A8A8A"/>
+                </a:solidFill>
+                <a:latin typeface="Red Hat Text"/>
+              </a:rPr>
+              <a:t>Stateless C++ Services   |   State externalization</a:t>
             </a:r>
           </a:p>
         </p:txBody>
@@ -20833,9 +20833,9 @@
             <a:r>
               <a:rPr sz="1100" b="0" i="0">
                 <a:solidFill>
-                  <a:srgbClr val="90A4AE"/>
-                </a:solidFill>
-                <a:latin typeface="Calibri"/>
+                  <a:srgbClr val="8A8A8A"/>
+                </a:solidFill>
+                <a:latin typeface="Red Hat Text"/>
               </a:rPr>
               <a:t>38 / 67</a:t>
             </a:r>
@@ -20868,9 +20868,9 @@
             <a:r>
               <a:rPr sz="2800" b="1" i="0">
                 <a:solidFill>
-                  <a:srgbClr val="1A2B3C"/>
-                </a:solidFill>
-                <a:latin typeface="Calibri"/>
+                  <a:srgbClr val="151515"/>
+                </a:solidFill>
+                <a:latin typeface="Red Hat Display"/>
               </a:rPr>
               <a:t>Pools, RAII checkout, idempotency</a:t>
             </a:r>
@@ -20909,7 +20909,7 @@
                 <a:solidFill>
                   <a:srgbClr val="1E6FC8"/>
                 </a:solidFill>
-                <a:latin typeface="Calibri"/>
+                <a:latin typeface="Red Hat Text"/>
               </a:rPr>
               <a:t>Backing services done right</a:t>
             </a:r>
@@ -20925,7 +20925,7 @@
                 <a:solidFill>
                   <a:srgbClr val="1A2B3C"/>
                 </a:solidFill>
-                <a:latin typeface="Calibri"/>
+                <a:latin typeface="Red Hat Text"/>
               </a:rPr>
               <a:t>•  Connection pool = process-scoped infra; per-handler RAII checkout</a:t>
             </a:r>
@@ -20941,7 +20941,7 @@
                 <a:solidFill>
                   <a:srgbClr val="1A2B3C"/>
                 </a:solidFill>
-                <a:latin typeface="Calibri"/>
+                <a:latin typeface="Red Hat Text"/>
               </a:rPr>
               <a:t>•  ScopedConnection returns the connection on scope exit; invalidate() on broken</a:t>
             </a:r>
@@ -20957,7 +20957,7 @@
                 <a:solidFill>
                   <a:srgbClr val="1A2B3C"/>
                 </a:solidFill>
-                <a:latin typeface="Calibri"/>
+                <a:latin typeface="Red Hat Text"/>
               </a:rPr>
               <a:t>•  Idempotency keys + ON CONFLICT DO NOTHING = DB-authoritative dedup</a:t>
             </a:r>
@@ -20973,7 +20973,7 @@
                 <a:solidFill>
                   <a:srgbClr val="1A2B3C"/>
                 </a:solidFill>
-                <a:latin typeface="Calibri"/>
+                <a:latin typeface="Red Hat Text"/>
               </a:rPr>
               <a:t>•  Deadlines propagate to the backing service (statement_timeout from the budget)</a:t>
             </a:r>
@@ -21045,7 +21045,7 @@
             <a:avLst/>
           </a:prstGeom>
           <a:solidFill>
-            <a:srgbClr val="1E6FC8"/>
+            <a:srgbClr val="EE0000"/>
           </a:solidFill>
           <a:ln>
             <a:noFill/>
@@ -21101,7 +21101,7 @@
                 <a:solidFill>
                   <a:srgbClr val="FFFFFF"/>
                 </a:solidFill>
-                <a:latin typeface="Calibri"/>
+                <a:latin typeface="Red Hat Display"/>
               </a:rPr>
               <a:t>State externalization</a:t>
             </a:r>
@@ -21125,7 +21125,7 @@
             </a:avLst>
           </a:prstGeom>
           <a:solidFill>
-            <a:srgbClr val="1A2B3C"/>
+            <a:srgbClr val="151515"/>
           </a:solidFill>
           <a:ln>
             <a:noFill/>
@@ -21181,7 +21181,7 @@
                 <a:solidFill>
                   <a:srgbClr val="FFFFFF"/>
                 </a:solidFill>
-                <a:latin typeface="Calibri"/>
+                <a:latin typeface="Red Hat Display"/>
               </a:rPr>
               <a:t>§7</a:t>
             </a:r>
@@ -21214,11 +21214,11 @@
             <a:r>
               <a:rPr sz="1100" b="0" i="0">
                 <a:solidFill>
-                  <a:srgbClr val="90A4AE"/>
-                </a:solidFill>
-                <a:latin typeface="Calibri"/>
-              </a:rPr>
-              <a:t>Optimizing Modern C++ with Containers   |   State externalization</a:t>
+                  <a:srgbClr val="8A8A8A"/>
+                </a:solidFill>
+                <a:latin typeface="Red Hat Text"/>
+              </a:rPr>
+              <a:t>Stateless C++ Services   |   State externalization</a:t>
             </a:r>
           </a:p>
         </p:txBody>
@@ -21249,9 +21249,9 @@
             <a:r>
               <a:rPr sz="1100" b="0" i="0">
                 <a:solidFill>
-                  <a:srgbClr val="90A4AE"/>
-                </a:solidFill>
-                <a:latin typeface="Calibri"/>
+                  <a:srgbClr val="8A8A8A"/>
+                </a:solidFill>
+                <a:latin typeface="Red Hat Text"/>
               </a:rPr>
               <a:t>39 / 67</a:t>
             </a:r>
@@ -21284,9 +21284,9 @@
             <a:r>
               <a:rPr sz="2800" b="1" i="0">
                 <a:solidFill>
-                  <a:srgbClr val="1A2B3C"/>
-                </a:solidFill>
-                <a:latin typeface="Calibri"/>
+                  <a:srgbClr val="151515"/>
+                </a:solidFill>
+                <a:latin typeface="Red Hat Display"/>
               </a:rPr>
               <a:t>The outbox pattern</a:t>
             </a:r>
@@ -21325,7 +21325,7 @@
                 <a:solidFill>
                   <a:srgbClr val="9B59B6"/>
                 </a:solidFill>
-                <a:latin typeface="Calibri"/>
+                <a:latin typeface="Red Hat Text"/>
               </a:rPr>
               <a:t>Atomic DB write + event emission</a:t>
             </a:r>
@@ -21341,7 +21341,7 @@
                 <a:solidFill>
                   <a:srgbClr val="1A2B3C"/>
                 </a:solidFill>
-                <a:latin typeface="Calibri"/>
+                <a:latin typeface="Red Hat Text"/>
               </a:rPr>
               <a:t>•  Write the row and an outbox event in ONE transaction</a:t>
             </a:r>
@@ -21357,7 +21357,7 @@
                 <a:solidFill>
                   <a:srgbClr val="1A2B3C"/>
                 </a:solidFill>
-                <a:latin typeface="Calibri"/>
+                <a:latin typeface="Red Hat Text"/>
               </a:rPr>
               <a:t>•  A relay polls the outbox with FOR UPDATE SKIP LOCKED, publishes to Kafka</a:t>
             </a:r>
@@ -21373,7 +21373,7 @@
                 <a:solidFill>
                   <a:srgbClr val="1A2B3C"/>
                 </a:solidFill>
-                <a:latin typeface="Calibri"/>
+                <a:latin typeface="Red Hat Text"/>
               </a:rPr>
               <a:t>•  An idempotent consumer applies events with ON CONFLICT DO NOTHING</a:t>
             </a:r>
@@ -21389,7 +21389,7 @@
                 <a:solidFill>
                   <a:srgbClr val="1A2B3C"/>
                 </a:solidFill>
-                <a:latin typeface="Calibri"/>
+                <a:latin typeface="Red Hat Text"/>
               </a:rPr>
               <a:t>•  At-least-once delivery + idempotent apply = exactly-once effect</a:t>
             </a:r>
@@ -21437,7 +21437,7 @@
             <a:avLst/>
           </a:prstGeom>
           <a:solidFill>
-            <a:srgbClr val="1E6FC8"/>
+            <a:srgbClr val="EE0000"/>
           </a:solidFill>
           <a:ln>
             <a:noFill/>
@@ -21493,7 +21493,7 @@
                 <a:solidFill>
                   <a:srgbClr val="FFFFFF"/>
                 </a:solidFill>
-                <a:latin typeface="Calibri"/>
+                <a:latin typeface="Red Hat Display"/>
               </a:rPr>
               <a:t>Statelessness as deployment posture</a:t>
             </a:r>
@@ -21517,7 +21517,7 @@
             </a:avLst>
           </a:prstGeom>
           <a:solidFill>
-            <a:srgbClr val="1A2B3C"/>
+            <a:srgbClr val="151515"/>
           </a:solidFill>
           <a:ln>
             <a:noFill/>
@@ -21573,7 +21573,7 @@
                 <a:solidFill>
                   <a:srgbClr val="FFFFFF"/>
                 </a:solidFill>
-                <a:latin typeface="Calibri"/>
+                <a:latin typeface="Red Hat Display"/>
               </a:rPr>
               <a:t>§1</a:t>
             </a:r>
@@ -21606,11 +21606,11 @@
             <a:r>
               <a:rPr sz="1100" b="0" i="0">
                 <a:solidFill>
-                  <a:srgbClr val="90A4AE"/>
-                </a:solidFill>
-                <a:latin typeface="Calibri"/>
-              </a:rPr>
-              <a:t>Optimizing Modern C++ with Containers   |   Statelessness as deployment posture</a:t>
+                  <a:srgbClr val="8A8A8A"/>
+                </a:solidFill>
+                <a:latin typeface="Red Hat Text"/>
+              </a:rPr>
+              <a:t>Stateless C++ Services   |   Statelessness as deployment posture</a:t>
             </a:r>
           </a:p>
         </p:txBody>
@@ -21641,9 +21641,9 @@
             <a:r>
               <a:rPr sz="1100" b="0" i="0">
                 <a:solidFill>
-                  <a:srgbClr val="90A4AE"/>
-                </a:solidFill>
-                <a:latin typeface="Calibri"/>
+                  <a:srgbClr val="8A8A8A"/>
+                </a:solidFill>
+                <a:latin typeface="Red Hat Text"/>
               </a:rPr>
               <a:t>4 / 67</a:t>
             </a:r>
@@ -21676,9 +21676,9 @@
             <a:r>
               <a:rPr sz="2800" b="1" i="0">
                 <a:solidFill>
-                  <a:srgbClr val="1A2B3C"/>
-                </a:solidFill>
-                <a:latin typeface="Calibri"/>
+                  <a:srgbClr val="151515"/>
+                </a:solidFill>
+                <a:latin typeface="Red Hat Display"/>
               </a:rPr>
               <a:t>Why statelessness is the property everything depends on</a:t>
             </a:r>
@@ -21700,7 +21700,7 @@
             <a:avLst/>
           </a:prstGeom>
           <a:solidFill>
-            <a:srgbClr val="E0E8F0"/>
+            <a:srgbClr val="D2D2D2"/>
           </a:solidFill>
           <a:ln>
             <a:noFill/>
@@ -21756,7 +21756,7 @@
                 <a:solidFill>
                   <a:srgbClr val="1E6FC8"/>
                 </a:solidFill>
-                <a:latin typeface="Calibri"/>
+                <a:latin typeface="Red Hat Display"/>
               </a:rPr>
               <a:t>3</a:t>
             </a:r>
@@ -21789,9 +21789,9 @@
             <a:r>
               <a:rPr sz="1400" b="0" i="0">
                 <a:solidFill>
-                  <a:srgbClr val="1A2B3C"/>
-                </a:solidFill>
-                <a:latin typeface="Calibri"/>
+                  <a:srgbClr val="151515"/>
+                </a:solidFill>
+                <a:latin typeface="Red Hat Text"/>
               </a:rPr>
               <a:t>scopes of state — request, process, deploy-time —
 and only one of them may hold authoritative data</a:t>
@@ -21814,7 +21814,7 @@
             <a:avLst/>
           </a:prstGeom>
           <a:solidFill>
-            <a:srgbClr val="E0E8F0"/>
+            <a:srgbClr val="D2D2D2"/>
           </a:solidFill>
           <a:ln>
             <a:noFill/>
@@ -21870,7 +21870,7 @@
                 <a:solidFill>
                   <a:srgbClr val="27AE60"/>
                 </a:solidFill>
-                <a:latin typeface="Calibri"/>
+                <a:latin typeface="Red Hat Display"/>
               </a:rPr>
               <a:t>0</a:t>
             </a:r>
@@ -21903,9 +21903,9 @@
             <a:r>
               <a:rPr sz="1400" b="0" i="0">
                 <a:solidFill>
-                  <a:srgbClr val="1A2B3C"/>
-                </a:solidFill>
-                <a:latin typeface="Calibri"/>
+                  <a:srgbClr val="151515"/>
+                </a:solidFill>
+                <a:latin typeface="Red Hat Text"/>
               </a:rPr>
               <a:t>coordination needed to kill or restart a replica
 when nothing authoritative lives in-process</a:t>
@@ -21928,7 +21928,7 @@
             <a:avLst/>
           </a:prstGeom>
           <a:solidFill>
-            <a:srgbClr val="E0E8F0"/>
+            <a:srgbClr val="D2D2D2"/>
           </a:solidFill>
           <a:ln>
             <a:noFill/>
@@ -21984,7 +21984,7 @@
                 <a:solidFill>
                   <a:srgbClr val="00BCD4"/>
                 </a:solidFill>
-                <a:latin typeface="Calibri"/>
+                <a:latin typeface="Red Hat Display"/>
               </a:rPr>
               <a:t>02–11</a:t>
             </a:r>
@@ -22017,11 +22017,11 @@
             <a:r>
               <a:rPr sz="1400" b="0" i="0">
                 <a:solidFill>
-                  <a:srgbClr val="1A2B3C"/>
-                </a:solidFill>
-                <a:latin typeface="Calibri"/>
-              </a:rPr>
-              <a:t>compendium examples, each a runnable Podman
+                  <a:srgbClr val="151515"/>
+                </a:solidFill>
+                <a:latin typeface="Red Hat Text"/>
+              </a:rPr>
+              <a:t>compendium examples, each a runnable Docker
 demo, host-verified end to end on Fedora 44</a:t>
             </a:r>
           </a:p>
@@ -22042,7 +22042,7 @@
             <a:avLst/>
           </a:prstGeom>
           <a:solidFill>
-            <a:srgbClr val="E0E8F0"/>
+            <a:srgbClr val="D2D2D2"/>
           </a:solidFill>
           <a:ln>
             <a:noFill/>
@@ -22098,7 +22098,7 @@
                 <a:solidFill>
                   <a:srgbClr val="9B59B6"/>
                 </a:solidFill>
-                <a:latin typeface="Calibri"/>
+                <a:latin typeface="Red Hat Display"/>
               </a:rPr>
               <a:t>1</a:t>
             </a:r>
@@ -22131,9 +22131,9 @@
             <a:r>
               <a:rPr sz="1400" b="0" i="0">
                 <a:solidFill>
-                  <a:srgbClr val="1A2B3C"/>
-                </a:solidFill>
-                <a:latin typeface="Calibri"/>
+                  <a:srgbClr val="151515"/>
+                </a:solidFill>
+                <a:latin typeface="Red Hat Text"/>
               </a:rPr>
               <a:t>binary — stateless or stateful depending only on
 where it keeps state, not on its code</a:t>
@@ -22182,7 +22182,7 @@
             <a:avLst/>
           </a:prstGeom>
           <a:solidFill>
-            <a:srgbClr val="1E6FC8"/>
+            <a:srgbClr val="EE0000"/>
           </a:solidFill>
           <a:ln>
             <a:noFill/>
@@ -22238,7 +22238,7 @@
                 <a:solidFill>
                   <a:srgbClr val="FFFFFF"/>
                 </a:solidFill>
-                <a:latin typeface="Calibri"/>
+                <a:latin typeface="Red Hat Display"/>
               </a:rPr>
               <a:t>State externalization</a:t>
             </a:r>
@@ -22262,7 +22262,7 @@
             </a:avLst>
           </a:prstGeom>
           <a:solidFill>
-            <a:srgbClr val="1A2B3C"/>
+            <a:srgbClr val="151515"/>
           </a:solidFill>
           <a:ln>
             <a:noFill/>
@@ -22318,7 +22318,7 @@
                 <a:solidFill>
                   <a:srgbClr val="FFFFFF"/>
                 </a:solidFill>
-                <a:latin typeface="Calibri"/>
+                <a:latin typeface="Red Hat Display"/>
               </a:rPr>
               <a:t>§7</a:t>
             </a:r>
@@ -22351,11 +22351,11 @@
             <a:r>
               <a:rPr sz="1100" b="0" i="0">
                 <a:solidFill>
-                  <a:srgbClr val="90A4AE"/>
-                </a:solidFill>
-                <a:latin typeface="Calibri"/>
-              </a:rPr>
-              <a:t>Optimizing Modern C++ with Containers   |   State externalization</a:t>
+                  <a:srgbClr val="8A8A8A"/>
+                </a:solidFill>
+                <a:latin typeface="Red Hat Text"/>
+              </a:rPr>
+              <a:t>Stateless C++ Services   |   State externalization</a:t>
             </a:r>
           </a:p>
         </p:txBody>
@@ -22386,9 +22386,9 @@
             <a:r>
               <a:rPr sz="1100" b="0" i="0">
                 <a:solidFill>
-                  <a:srgbClr val="90A4AE"/>
-                </a:solidFill>
-                <a:latin typeface="Calibri"/>
+                  <a:srgbClr val="8A8A8A"/>
+                </a:solidFill>
+                <a:latin typeface="Red Hat Text"/>
               </a:rPr>
               <a:t>40 / 67</a:t>
             </a:r>
@@ -22421,9 +22421,9 @@
             <a:r>
               <a:rPr sz="2800" b="1" i="0">
                 <a:solidFill>
-                  <a:srgbClr val="1A2B3C"/>
-                </a:solidFill>
-                <a:latin typeface="Calibri"/>
+                  <a:srgbClr val="151515"/>
+                </a:solidFill>
+                <a:latin typeface="Red Hat Display"/>
               </a:rPr>
               <a:t>Deadlines propagate all the way down</a:t>
             </a:r>
@@ -22462,7 +22462,7 @@
                 <a:solidFill>
                   <a:srgbClr val="1E6FC8"/>
                 </a:solidFill>
-                <a:latin typeface="Calibri"/>
+                <a:latin typeface="Red Hat Text"/>
               </a:rPr>
               <a:t>One budget, enforced at every hop</a:t>
             </a:r>
@@ -22478,7 +22478,7 @@
                 <a:solidFill>
                   <a:srgbClr val="1A2B3C"/>
                 </a:solidFill>
-                <a:latin typeface="Calibri"/>
+                <a:latin typeface="Red Hat Text"/>
               </a:rPr>
               <a:t>•  The request deadline comes from the gRPC ServerContext</a:t>
             </a:r>
@@ -22494,7 +22494,7 @@
                 <a:solidFill>
                   <a:srgbClr val="1A2B3C"/>
                 </a:solidFill>
-                <a:latin typeface="Calibri"/>
+                <a:latin typeface="Red Hat Text"/>
               </a:rPr>
               <a:t>•  Compute remaining budget; set it as the DB statement_timeout</a:t>
             </a:r>
@@ -22510,7 +22510,7 @@
                 <a:solidFill>
                   <a:srgbClr val="1A2B3C"/>
                 </a:solidFill>
-                <a:latin typeface="Calibri"/>
+                <a:latin typeface="Red Hat Text"/>
               </a:rPr>
               <a:t>•  Pass the same deadline to outbound gRPC ClientContext</a:t>
             </a:r>
@@ -22526,7 +22526,7 @@
                 <a:solidFill>
                   <a:srgbClr val="1A2B3C"/>
                 </a:solidFill>
-                <a:latin typeface="Calibri"/>
+                <a:latin typeface="Red Hat Text"/>
               </a:rPr>
               <a:t>•  A blown budget surfaces as DEADLINE_EXCEEDED, not a hung handler</a:t>
             </a:r>
@@ -22548,7 +22548,7 @@
             <a:avLst/>
           </a:prstGeom>
           <a:solidFill>
-            <a:srgbClr val="0D2137"/>
+            <a:srgbClr val="151515"/>
           </a:solidFill>
           <a:ln>
             <a:noFill/>
@@ -22601,9 +22601,9 @@
             <a:r>
               <a:rPr sz="1200">
                 <a:solidFill>
-                  <a:srgbClr val="ECF0F1"/>
-                </a:solidFill>
-                <a:latin typeface="Consolas"/>
+                  <a:srgbClr val="F4F4F4"/>
+                </a:solidFill>
+                <a:latin typeface="Red Hat Mono"/>
               </a:rPr>
               <a:t>auto remaining = deadline - now();</a:t>
             </a:r>
@@ -22612,9 +22612,9 @@
             <a:r>
               <a:rPr sz="1200">
                 <a:solidFill>
-                  <a:srgbClr val="ECF0F1"/>
-                </a:solidFill>
-                <a:latin typeface="Consolas"/>
+                  <a:srgbClr val="F4F4F4"/>
+                </a:solidFill>
+                <a:latin typeface="Red Hat Mono"/>
               </a:rPr>
               <a:t>if (remaining &lt;= 0ms)</a:t>
             </a:r>
@@ -22623,9 +22623,9 @@
             <a:r>
               <a:rPr sz="1200">
                 <a:solidFill>
-                  <a:srgbClr val="ECF0F1"/>
-                </a:solidFill>
-                <a:latin typeface="Consolas"/>
+                  <a:srgbClr val="F4F4F4"/>
+                </a:solidFill>
+                <a:latin typeface="Red Hat Mono"/>
               </a:rPr>
               <a:t>  throw grpc::Status{DEADLINE_EXCEEDED, "..."};</a:t>
             </a:r>
@@ -22634,9 +22634,9 @@
             <a:r>
               <a:rPr sz="1200">
                 <a:solidFill>
-                  <a:srgbClr val="ECF0F1"/>
-                </a:solidFill>
-                <a:latin typeface="Consolas"/>
+                  <a:srgbClr val="F4F4F4"/>
+                </a:solidFill>
+                <a:latin typeface="Red Hat Mono"/>
               </a:rPr>
               <a:t>// DB: SET statement_timeout = &lt;remaining ms&gt;</a:t>
             </a:r>
@@ -22645,9 +22645,9 @@
             <a:r>
               <a:rPr sz="1200">
                 <a:solidFill>
-                  <a:srgbClr val="ECF0F1"/>
-                </a:solidFill>
-                <a:latin typeface="Consolas"/>
+                  <a:srgbClr val="F4F4F4"/>
+                </a:solidFill>
+                <a:latin typeface="Red Hat Mono"/>
               </a:rPr>
               <a:t>// gRPC: client_ctx.set_deadline(rc.deadline());</a:t>
             </a:r>
@@ -22695,7 +22695,7 @@
             <a:avLst/>
           </a:prstGeom>
           <a:solidFill>
-            <a:srgbClr val="1E6FC8"/>
+            <a:srgbClr val="EE0000"/>
           </a:solidFill>
           <a:ln>
             <a:noFill/>
@@ -22751,7 +22751,7 @@
                 <a:solidFill>
                   <a:srgbClr val="FFFFFF"/>
                 </a:solidFill>
-                <a:latin typeface="Calibri"/>
+                <a:latin typeface="Red Hat Display"/>
               </a:rPr>
               <a:t>State externalization</a:t>
             </a:r>
@@ -22775,7 +22775,7 @@
             </a:avLst>
           </a:prstGeom>
           <a:solidFill>
-            <a:srgbClr val="1A2B3C"/>
+            <a:srgbClr val="151515"/>
           </a:solidFill>
           <a:ln>
             <a:noFill/>
@@ -22831,7 +22831,7 @@
                 <a:solidFill>
                   <a:srgbClr val="FFFFFF"/>
                 </a:solidFill>
-                <a:latin typeface="Calibri"/>
+                <a:latin typeface="Red Hat Display"/>
               </a:rPr>
               <a:t>§7</a:t>
             </a:r>
@@ -22864,11 +22864,11 @@
             <a:r>
               <a:rPr sz="1100" b="0" i="0">
                 <a:solidFill>
-                  <a:srgbClr val="90A4AE"/>
-                </a:solidFill>
-                <a:latin typeface="Calibri"/>
-              </a:rPr>
-              <a:t>Optimizing Modern C++ with Containers   |   State externalization</a:t>
+                  <a:srgbClr val="8A8A8A"/>
+                </a:solidFill>
+                <a:latin typeface="Red Hat Text"/>
+              </a:rPr>
+              <a:t>Stateless C++ Services   |   State externalization</a:t>
             </a:r>
           </a:p>
         </p:txBody>
@@ -22899,9 +22899,9 @@
             <a:r>
               <a:rPr sz="1100" b="0" i="0">
                 <a:solidFill>
-                  <a:srgbClr val="90A4AE"/>
-                </a:solidFill>
-                <a:latin typeface="Calibri"/>
+                  <a:srgbClr val="8A8A8A"/>
+                </a:solidFill>
+                <a:latin typeface="Red Hat Text"/>
               </a:rPr>
               <a:t>41 / 67</a:t>
             </a:r>
@@ -22934,9 +22934,9 @@
             <a:r>
               <a:rPr sz="2800" b="1" i="0">
                 <a:solidFill>
-                  <a:srgbClr val="1A2B3C"/>
-                </a:solidFill>
-                <a:latin typeface="Calibri"/>
+                  <a:srgbClr val="151515"/>
+                </a:solidFill>
+                <a:latin typeface="Red Hat Display"/>
               </a:rPr>
               <a:t>Retry-with-backoff vs. fail-fast</a:t>
             </a:r>
@@ -22975,7 +22975,7 @@
                 <a:solidFill>
                   <a:srgbClr val="F5A623"/>
                 </a:solidFill>
-                <a:latin typeface="Calibri"/>
+                <a:latin typeface="Red Hat Text"/>
               </a:rPr>
               <a:t>When to retry and when to give up</a:t>
             </a:r>
@@ -22991,7 +22991,7 @@
                 <a:solidFill>
                   <a:srgbClr val="1A2B3C"/>
                 </a:solidFill>
-                <a:latin typeface="Calibri"/>
+                <a:latin typeface="Red Hat Text"/>
               </a:rPr>
               <a:t>•  Idempotent + transient failure → retry with capped exponential backoff + jitter</a:t>
             </a:r>
@@ -23007,7 +23007,7 @@
                 <a:solidFill>
                   <a:srgbClr val="1A2B3C"/>
                 </a:solidFill>
-                <a:latin typeface="Calibri"/>
+                <a:latin typeface="Red Hat Text"/>
               </a:rPr>
               <a:t>•  Non-idempotent without a key → do NOT blindly retry</a:t>
             </a:r>
@@ -23023,7 +23023,7 @@
                 <a:solidFill>
                   <a:srgbClr val="1A2B3C"/>
                 </a:solidFill>
-                <a:latin typeface="Calibri"/>
+                <a:latin typeface="Red Hat Text"/>
               </a:rPr>
               <a:t>•  Budget-aware: never retry past the request deadline</a:t>
             </a:r>
@@ -23039,7 +23039,7 @@
                 <a:solidFill>
                   <a:srgbClr val="1A2B3C"/>
                 </a:solidFill>
-                <a:latin typeface="Calibri"/>
+                <a:latin typeface="Red Hat Text"/>
               </a:rPr>
               <a:t>•  invalidate() a broken pooled connection so it isn't reused</a:t>
             </a:r>
@@ -23087,7 +23087,7 @@
             <a:avLst/>
           </a:prstGeom>
           <a:solidFill>
-            <a:srgbClr val="1E6FC8"/>
+            <a:srgbClr val="EE0000"/>
           </a:solidFill>
           <a:ln>
             <a:noFill/>
@@ -23143,7 +23143,7 @@
                 <a:solidFill>
                   <a:srgbClr val="FFFFFF"/>
                 </a:solidFill>
-                <a:latin typeface="Calibri"/>
+                <a:latin typeface="Red Hat Display"/>
               </a:rPr>
               <a:t>State externalization</a:t>
             </a:r>
@@ -23167,7 +23167,7 @@
             </a:avLst>
           </a:prstGeom>
           <a:solidFill>
-            <a:srgbClr val="1A2B3C"/>
+            <a:srgbClr val="151515"/>
           </a:solidFill>
           <a:ln>
             <a:noFill/>
@@ -23223,7 +23223,7 @@
                 <a:solidFill>
                   <a:srgbClr val="FFFFFF"/>
                 </a:solidFill>
-                <a:latin typeface="Calibri"/>
+                <a:latin typeface="Red Hat Display"/>
               </a:rPr>
               <a:t>§7</a:t>
             </a:r>
@@ -23256,11 +23256,11 @@
             <a:r>
               <a:rPr sz="1100" b="0" i="0">
                 <a:solidFill>
-                  <a:srgbClr val="90A4AE"/>
-                </a:solidFill>
-                <a:latin typeface="Calibri"/>
-              </a:rPr>
-              <a:t>Optimizing Modern C++ with Containers   |   State externalization</a:t>
+                  <a:srgbClr val="8A8A8A"/>
+                </a:solidFill>
+                <a:latin typeface="Red Hat Text"/>
+              </a:rPr>
+              <a:t>Stateless C++ Services   |   State externalization</a:t>
             </a:r>
           </a:p>
         </p:txBody>
@@ -23291,9 +23291,9 @@
             <a:r>
               <a:rPr sz="1100" b="0" i="0">
                 <a:solidFill>
-                  <a:srgbClr val="90A4AE"/>
-                </a:solidFill>
-                <a:latin typeface="Calibri"/>
+                  <a:srgbClr val="8A8A8A"/>
+                </a:solidFill>
+                <a:latin typeface="Red Hat Text"/>
               </a:rPr>
               <a:t>42 / 67</a:t>
             </a:r>
@@ -23326,9 +23326,9 @@
             <a:r>
               <a:rPr sz="2800" b="1" i="0">
                 <a:solidFill>
-                  <a:srgbClr val="1A2B3C"/>
-                </a:solidFill>
-                <a:latin typeface="Calibri"/>
+                  <a:srgbClr val="151515"/>
+                </a:solidFill>
+                <a:latin typeface="Red Hat Display"/>
               </a:rPr>
               <a:t>The cache counterexample, fixed</a:t>
             </a:r>
@@ -23367,7 +23367,7 @@
                 <a:solidFill>
                   <a:srgbClr val="E84855"/>
                 </a:solidFill>
-                <a:latin typeface="Calibri"/>
+                <a:latin typeface="Red Hat Text"/>
               </a:rPr>
               <a:t>Why the local-cache counterexample was the bug</a:t>
             </a:r>
@@ -23383,7 +23383,7 @@
                 <a:solidFill>
                   <a:srgbClr val="1A2B3C"/>
                 </a:solidFill>
-                <a:latin typeface="Calibri"/>
+                <a:latin typeface="Red Hat Text"/>
               </a:rPr>
               <a:t>•  An in-process cache of authoritative data desyncs across replicas</a:t>
             </a:r>
@@ -23399,7 +23399,7 @@
                 <a:solidFill>
                   <a:srgbClr val="1A2B3C"/>
                 </a:solidFill>
-                <a:latin typeface="Calibri"/>
+                <a:latin typeface="Red Hat Text"/>
               </a:rPr>
               <a:t>•  Replica A updates; replica B serves a stale read — non-deterministic</a:t>
             </a:r>
@@ -23415,7 +23415,7 @@
                 <a:solidFill>
                   <a:srgbClr val="1A2B3C"/>
                 </a:solidFill>
-                <a:latin typeface="Calibri"/>
+                <a:latin typeface="Red Hat Text"/>
               </a:rPr>
               <a:t>•  Fix: the cache tier is deploy-time scope, shared and authoritative</a:t>
             </a:r>
@@ -23431,7 +23431,7 @@
                 <a:solidFill>
                   <a:srgbClr val="1A2B3C"/>
                 </a:solidFill>
-                <a:latin typeface="Calibri"/>
+                <a:latin typeface="Red Hat Text"/>
               </a:rPr>
               <a:t>•  In-process caches are fine ONLY for derived/immutable data</a:t>
             </a:r>
@@ -23452,7 +23452,7 @@
     <p:bg>
       <p:bgPr>
         <a:solidFill>
-          <a:srgbClr val="0A1628"/>
+          <a:srgbClr val="AB0000"/>
         </a:solidFill>
         <a:effectLst/>
       </p:bgPr>
@@ -23481,7 +23481,7 @@
             </a:avLst>
           </a:prstGeom>
           <a:solidFill>
-            <a:srgbClr val="27AE60"/>
+            <a:srgbClr val="FFA000"/>
           </a:solidFill>
           <a:ln>
             <a:noFill/>
@@ -23537,7 +23537,7 @@
                 <a:solidFill>
                   <a:srgbClr val="FFFFFF"/>
                 </a:solidFill>
-                <a:latin typeface="Calibri"/>
+                <a:latin typeface="Red Hat Display"/>
               </a:rPr>
               <a:t>▶ DEMO 07</a:t>
             </a:r>
@@ -23572,7 +23572,7 @@
                 <a:solidFill>
                   <a:srgbClr val="FFFFFF"/>
                 </a:solidFill>
-                <a:latin typeface="Calibri"/>
+                <a:latin typeface="Red Hat Display"/>
               </a:rPr>
               <a:t>Demo — State externalization + outbox</a:t>
             </a:r>
@@ -23605,9 +23605,9 @@
             <a:r>
               <a:rPr sz="2000" b="0" i="0">
                 <a:solidFill>
-                  <a:srgbClr val="ECF0F1"/>
-                </a:solidFill>
-                <a:latin typeface="Calibri"/>
+                  <a:srgbClr val="F4F4F4"/>
+                </a:solidFill>
+                <a:latin typeface="Red Hat Text"/>
               </a:rPr>
               <a:t>An order and its event written in one transaction; a relay publishes the outbox to Kafka with FOR UPDATE SKIP LOCKED; an idempotent consumer applies it. A crash mid-publish still yields an exactly-once effect.</a:t>
             </a:r>
@@ -23629,7 +23629,7 @@
             <a:avLst/>
           </a:prstGeom>
           <a:solidFill>
-            <a:srgbClr val="0D2137"/>
+            <a:srgbClr val="151515"/>
           </a:solidFill>
           <a:ln>
             <a:noFill/>
@@ -23683,9 +23683,9 @@
             <a:r>
               <a:rPr sz="1800" b="0" i="0">
                 <a:solidFill>
-                  <a:srgbClr val="00BCD4"/>
-                </a:solidFill>
-                <a:latin typeface="Consolas"/>
+                  <a:srgbClr val="EE0000"/>
+                </a:solidFill>
+                <a:latin typeface="Red Hat Mono"/>
               </a:rPr>
               <a:t>$ cd examples/statelessness/07-outbox-pattern &amp;&amp; ./demo.sh</a:t>
             </a:r>
@@ -23718,9 +23718,9 @@
             <a:r>
               <a:rPr sz="1100" b="0" i="0">
                 <a:solidFill>
-                  <a:srgbClr val="90A4AE"/>
-                </a:solidFill>
-                <a:latin typeface="Consolas"/>
+                  <a:srgbClr val="8A8A8A"/>
+                </a:solidFill>
+                <a:latin typeface="Red Hat Mono"/>
               </a:rPr>
               <a:t>  source on site: patterncatalyst.github.io/cpp-statelessness/examples/statelessness-07-outbox-pattern/</a:t>
             </a:r>
@@ -23753,9 +23753,9 @@
             <a:r>
               <a:rPr sz="1100" b="0" i="0">
                 <a:solidFill>
-                  <a:srgbClr val="90A4AE"/>
-                </a:solidFill>
-                <a:latin typeface="Calibri"/>
+                  <a:srgbClr val="8A8A8A"/>
+                </a:solidFill>
+                <a:latin typeface="Red Hat Text"/>
               </a:rPr>
               <a:t>43 / 67</a:t>
             </a:r>
@@ -23776,7 +23776,7 @@
     <p:bg>
       <p:bgPr>
         <a:solidFill>
-          <a:srgbClr val="0A1628"/>
+          <a:srgbClr val="AB0000"/>
         </a:solidFill>
         <a:effectLst/>
       </p:bgPr>
@@ -23814,9 +23814,9 @@
             <a:r>
               <a:rPr sz="18000" b="1" i="0">
                 <a:solidFill>
-                  <a:srgbClr val="00BCD4"/>
-                </a:solidFill>
-                <a:latin typeface="Calibri"/>
+                  <a:srgbClr val="EE0000"/>
+                </a:solidFill>
+                <a:latin typeface="Red Hat Display"/>
               </a:rPr>
               <a:t>§8</a:t>
             </a:r>
@@ -23851,7 +23851,7 @@
                 <a:solidFill>
                   <a:srgbClr val="FFFFFF"/>
                 </a:solidFill>
-                <a:latin typeface="Calibri"/>
+                <a:latin typeface="Red Hat Display"/>
               </a:rPr>
               <a:t>The ephemeral filesystem</a:t>
             </a:r>
@@ -23884,9 +23884,9 @@
             <a:r>
               <a:rPr sz="2000" b="0" i="1">
                 <a:solidFill>
-                  <a:srgbClr val="90A4AE"/>
-                </a:solidFill>
-                <a:latin typeface="Calibri"/>
+                  <a:srgbClr val="8A8A8A"/>
+                </a:solidFill>
+                <a:latin typeface="Red Hat Text"/>
               </a:rPr>
               <a:t>The container rootfs is scratch space — treat it that way.</a:t>
             </a:r>
@@ -23919,9 +23919,9 @@
             <a:r>
               <a:rPr sz="1100" b="0" i="0">
                 <a:solidFill>
-                  <a:srgbClr val="90A4AE"/>
-                </a:solidFill>
-                <a:latin typeface="Calibri"/>
+                  <a:srgbClr val="8A8A8A"/>
+                </a:solidFill>
+                <a:latin typeface="Red Hat Text"/>
               </a:rPr>
               <a:t>44 / 67</a:t>
             </a:r>
@@ -23969,7 +23969,7 @@
             <a:avLst/>
           </a:prstGeom>
           <a:solidFill>
-            <a:srgbClr val="1E6FC8"/>
+            <a:srgbClr val="EE0000"/>
           </a:solidFill>
           <a:ln>
             <a:noFill/>
@@ -24025,7 +24025,7 @@
                 <a:solidFill>
                   <a:srgbClr val="FFFFFF"/>
                 </a:solidFill>
-                <a:latin typeface="Calibri"/>
+                <a:latin typeface="Red Hat Display"/>
               </a:rPr>
               <a:t>The ephemeral filesystem</a:t>
             </a:r>
@@ -24049,7 +24049,7 @@
             </a:avLst>
           </a:prstGeom>
           <a:solidFill>
-            <a:srgbClr val="1A2B3C"/>
+            <a:srgbClr val="151515"/>
           </a:solidFill>
           <a:ln>
             <a:noFill/>
@@ -24105,7 +24105,7 @@
                 <a:solidFill>
                   <a:srgbClr val="FFFFFF"/>
                 </a:solidFill>
-                <a:latin typeface="Calibri"/>
+                <a:latin typeface="Red Hat Display"/>
               </a:rPr>
               <a:t>§8</a:t>
             </a:r>
@@ -24138,11 +24138,11 @@
             <a:r>
               <a:rPr sz="1100" b="0" i="0">
                 <a:solidFill>
-                  <a:srgbClr val="90A4AE"/>
-                </a:solidFill>
-                <a:latin typeface="Calibri"/>
-              </a:rPr>
-              <a:t>Optimizing Modern C++ with Containers   |   The ephemeral filesystem</a:t>
+                  <a:srgbClr val="8A8A8A"/>
+                </a:solidFill>
+                <a:latin typeface="Red Hat Text"/>
+              </a:rPr>
+              <a:t>Stateless C++ Services   |   The ephemeral filesystem</a:t>
             </a:r>
           </a:p>
         </p:txBody>
@@ -24173,9 +24173,9 @@
             <a:r>
               <a:rPr sz="1100" b="0" i="0">
                 <a:solidFill>
-                  <a:srgbClr val="90A4AE"/>
-                </a:solidFill>
-                <a:latin typeface="Calibri"/>
+                  <a:srgbClr val="8A8A8A"/>
+                </a:solidFill>
+                <a:latin typeface="Red Hat Text"/>
               </a:rPr>
               <a:t>45 / 67</a:t>
             </a:r>
@@ -24208,9 +24208,9 @@
             <a:r>
               <a:rPr sz="2800" b="1" i="0">
                 <a:solidFill>
-                  <a:srgbClr val="1A2B3C"/>
-                </a:solidFill>
-                <a:latin typeface="Calibri"/>
+                  <a:srgbClr val="151515"/>
+                </a:solidFill>
+                <a:latin typeface="Red Hat Display"/>
               </a:rPr>
               <a:t>read_only: true as a forcing function</a:t>
             </a:r>
@@ -24249,7 +24249,7 @@
                 <a:solidFill>
                   <a:srgbClr val="1E6FC8"/>
                 </a:solidFill>
-                <a:latin typeface="Calibri"/>
+                <a:latin typeface="Red Hat Text"/>
               </a:rPr>
               <a:t>Make ephemerality explicit</a:t>
             </a:r>
@@ -24265,7 +24265,7 @@
                 <a:solidFill>
                   <a:srgbClr val="1A2B3C"/>
                 </a:solidFill>
-                <a:latin typeface="Calibri"/>
+                <a:latin typeface="Red Hat Text"/>
               </a:rPr>
               <a:t>•  rootfs read-only; /tmp on an explicit tmpfs; volumes for what must survive</a:t>
             </a:r>
@@ -24281,7 +24281,7 @@
                 <a:solidFill>
                   <a:srgbClr val="1A2B3C"/>
                 </a:solidFill>
-                <a:latin typeface="Calibri"/>
+                <a:latin typeface="Red Hat Text"/>
               </a:rPr>
               <a:t>•  Logs go to stdout — the collector owns persistence, not the container</a:t>
             </a:r>
@@ -24297,7 +24297,7 @@
                 <a:solidFill>
                   <a:srgbClr val="1A2B3C"/>
                 </a:solidFill>
-                <a:latin typeface="Calibri"/>
+                <a:latin typeface="Red Hat Text"/>
               </a:rPr>
               <a:t>•  C++ traps: spdlog's basic_logger_mt opens a file → EROFS on a read-only rootfs</a:t>
             </a:r>
@@ -24313,7 +24313,7 @@
                 <a:solidFill>
                   <a:srgbClr val="1A2B3C"/>
                 </a:solidFill>
-                <a:latin typeface="Calibri"/>
+                <a:latin typeface="Red Hat Text"/>
               </a:rPr>
               <a:t>•  Fix: the stdout sink; never the default file logger in a container</a:t>
             </a:r>
@@ -24385,7 +24385,7 @@
             <a:avLst/>
           </a:prstGeom>
           <a:solidFill>
-            <a:srgbClr val="1E6FC8"/>
+            <a:srgbClr val="EE0000"/>
           </a:solidFill>
           <a:ln>
             <a:noFill/>
@@ -24441,7 +24441,7 @@
                 <a:solidFill>
                   <a:srgbClr val="FFFFFF"/>
                 </a:solidFill>
-                <a:latin typeface="Calibri"/>
+                <a:latin typeface="Red Hat Display"/>
               </a:rPr>
               <a:t>The ephemeral filesystem</a:t>
             </a:r>
@@ -24465,7 +24465,7 @@
             </a:avLst>
           </a:prstGeom>
           <a:solidFill>
-            <a:srgbClr val="1A2B3C"/>
+            <a:srgbClr val="151515"/>
           </a:solidFill>
           <a:ln>
             <a:noFill/>
@@ -24521,7 +24521,7 @@
                 <a:solidFill>
                   <a:srgbClr val="FFFFFF"/>
                 </a:solidFill>
-                <a:latin typeface="Calibri"/>
+                <a:latin typeface="Red Hat Display"/>
               </a:rPr>
               <a:t>§8</a:t>
             </a:r>
@@ -24554,11 +24554,11 @@
             <a:r>
               <a:rPr sz="1100" b="0" i="0">
                 <a:solidFill>
-                  <a:srgbClr val="90A4AE"/>
-                </a:solidFill>
-                <a:latin typeface="Calibri"/>
-              </a:rPr>
-              <a:t>Optimizing Modern C++ with Containers   |   The ephemeral filesystem</a:t>
+                  <a:srgbClr val="8A8A8A"/>
+                </a:solidFill>
+                <a:latin typeface="Red Hat Text"/>
+              </a:rPr>
+              <a:t>Stateless C++ Services   |   The ephemeral filesystem</a:t>
             </a:r>
           </a:p>
         </p:txBody>
@@ -24589,9 +24589,9 @@
             <a:r>
               <a:rPr sz="1100" b="0" i="0">
                 <a:solidFill>
-                  <a:srgbClr val="90A4AE"/>
-                </a:solidFill>
-                <a:latin typeface="Calibri"/>
+                  <a:srgbClr val="8A8A8A"/>
+                </a:solidFill>
+                <a:latin typeface="Red Hat Text"/>
               </a:rPr>
               <a:t>46 / 67</a:t>
             </a:r>
@@ -24624,9 +24624,9 @@
             <a:r>
               <a:rPr sz="2800" b="1" i="0">
                 <a:solidFill>
-                  <a:srgbClr val="1A2B3C"/>
-                </a:solidFill>
-                <a:latin typeface="Calibri"/>
+                  <a:srgbClr val="151515"/>
+                </a:solidFill>
+                <a:latin typeface="Red Hat Display"/>
               </a:rPr>
               <a:t>What goes where</a:t>
             </a:r>
@@ -24665,7 +24665,7 @@
                 <a:solidFill>
                   <a:srgbClr val="1E6FC8"/>
                 </a:solidFill>
-                <a:latin typeface="Calibri"/>
+                <a:latin typeface="Red Hat Text"/>
               </a:rPr>
               <a:t>A place for every write</a:t>
             </a:r>
@@ -24681,7 +24681,7 @@
                 <a:solidFill>
                   <a:srgbClr val="1A2B3C"/>
                 </a:solidFill>
-                <a:latin typeface="Calibri"/>
+                <a:latin typeface="Red Hat Text"/>
               </a:rPr>
               <a:t>•  rootfs → read-only; the binary, libs, certs, nothing writable</a:t>
             </a:r>
@@ -24697,7 +24697,7 @@
                 <a:solidFill>
                   <a:srgbClr val="1A2B3C"/>
                 </a:solidFill>
-                <a:latin typeface="Calibri"/>
+                <a:latin typeface="Red Hat Text"/>
               </a:rPr>
               <a:t>•  /tmp → an explicit tmpfs with a size cap; scratch only</a:t>
             </a:r>
@@ -24713,7 +24713,7 @@
                 <a:solidFill>
                   <a:srgbClr val="1A2B3C"/>
                 </a:solidFill>
-                <a:latin typeface="Calibri"/>
+                <a:latin typeface="Red Hat Text"/>
               </a:rPr>
               <a:t>•  Persistent data → a volume (PVC), and only what must truly survive</a:t>
             </a:r>
@@ -24729,7 +24729,7 @@
                 <a:solidFill>
                   <a:srgbClr val="1A2B3C"/>
                 </a:solidFill>
-                <a:latin typeface="Calibri"/>
+                <a:latin typeface="Red Hat Text"/>
               </a:rPr>
               <a:t>•  Config → env vars / mounted configmap, read-only</a:t>
             </a:r>
@@ -24745,7 +24745,7 @@
                 <a:solidFill>
                   <a:srgbClr val="1A2B3C"/>
                 </a:solidFill>
-                <a:latin typeface="Calibri"/>
+                <a:latin typeface="Red Hat Text"/>
               </a:rPr>
               <a:t>•  Logs → stdout; never a file the container owns</a:t>
             </a:r>
@@ -24793,7 +24793,7 @@
             <a:avLst/>
           </a:prstGeom>
           <a:solidFill>
-            <a:srgbClr val="1E6FC8"/>
+            <a:srgbClr val="EE0000"/>
           </a:solidFill>
           <a:ln>
             <a:noFill/>
@@ -24849,7 +24849,7 @@
                 <a:solidFill>
                   <a:srgbClr val="FFFFFF"/>
                 </a:solidFill>
-                <a:latin typeface="Calibri"/>
+                <a:latin typeface="Red Hat Display"/>
               </a:rPr>
               <a:t>The ephemeral filesystem</a:t>
             </a:r>
@@ -24873,7 +24873,7 @@
             </a:avLst>
           </a:prstGeom>
           <a:solidFill>
-            <a:srgbClr val="1A2B3C"/>
+            <a:srgbClr val="151515"/>
           </a:solidFill>
           <a:ln>
             <a:noFill/>
@@ -24929,7 +24929,7 @@
                 <a:solidFill>
                   <a:srgbClr val="FFFFFF"/>
                 </a:solidFill>
-                <a:latin typeface="Calibri"/>
+                <a:latin typeface="Red Hat Display"/>
               </a:rPr>
               <a:t>§8</a:t>
             </a:r>
@@ -24962,11 +24962,11 @@
             <a:r>
               <a:rPr sz="1100" b="0" i="0">
                 <a:solidFill>
-                  <a:srgbClr val="90A4AE"/>
-                </a:solidFill>
-                <a:latin typeface="Calibri"/>
-              </a:rPr>
-              <a:t>Optimizing Modern C++ with Containers   |   The ephemeral filesystem</a:t>
+                  <a:srgbClr val="8A8A8A"/>
+                </a:solidFill>
+                <a:latin typeface="Red Hat Text"/>
+              </a:rPr>
+              <a:t>Stateless C++ Services   |   The ephemeral filesystem</a:t>
             </a:r>
           </a:p>
         </p:txBody>
@@ -24997,9 +24997,9 @@
             <a:r>
               <a:rPr sz="1100" b="0" i="0">
                 <a:solidFill>
-                  <a:srgbClr val="90A4AE"/>
-                </a:solidFill>
-                <a:latin typeface="Calibri"/>
+                  <a:srgbClr val="8A8A8A"/>
+                </a:solidFill>
+                <a:latin typeface="Red Hat Text"/>
               </a:rPr>
               <a:t>47 / 67</a:t>
             </a:r>
@@ -25032,9 +25032,9 @@
             <a:r>
               <a:rPr sz="2800" b="1" i="0">
                 <a:solidFill>
-                  <a:srgbClr val="1A2B3C"/>
-                </a:solidFill>
-                <a:latin typeface="Calibri"/>
+                  <a:srgbClr val="151515"/>
+                </a:solidFill>
+                <a:latin typeface="Red Hat Display"/>
               </a:rPr>
               <a:t>Restart semantics as a feature</a:t>
             </a:r>
@@ -25073,7 +25073,7 @@
                 <a:solidFill>
                   <a:srgbClr val="27AE60"/>
                 </a:solidFill>
-                <a:latin typeface="Calibri"/>
+                <a:latin typeface="Red Hat Text"/>
               </a:rPr>
               <a:t>Ephemerality is the point, not a limitation</a:t>
             </a:r>
@@ -25089,7 +25089,7 @@
                 <a:solidFill>
                   <a:srgbClr val="1A2B3C"/>
                 </a:solidFill>
-                <a:latin typeface="Calibri"/>
+                <a:latin typeface="Red Hat Text"/>
               </a:rPr>
               <a:t>•  A crash + restart returns a known-clean filesystem state</a:t>
             </a:r>
@@ -25105,7 +25105,7 @@
                 <a:solidFill>
                   <a:srgbClr val="1A2B3C"/>
                 </a:solidFill>
-                <a:latin typeface="Calibri"/>
+                <a:latin typeface="Red Hat Text"/>
               </a:rPr>
               <a:t>•  No accreted local state to corrupt, fill the disk, or drift</a:t>
             </a:r>
@@ -25121,9 +25121,9 @@
                 <a:solidFill>
                   <a:srgbClr val="1A2B3C"/>
                 </a:solidFill>
-                <a:latin typeface="Calibri"/>
-              </a:rPr>
-              <a:t>•  rootless Podman's UID mapping: writes you DID allow land correctly</a:t>
+                <a:latin typeface="Red Hat Text"/>
+              </a:rPr>
+              <a:t>•  rootless Docker's UID mapping: writes you DID allow land correctly</a:t>
             </a:r>
           </a:p>
           <a:p>
@@ -25137,7 +25137,7 @@
                 <a:solidFill>
                   <a:srgbClr val="1A2B3C"/>
                 </a:solidFill>
-                <a:latin typeface="Calibri"/>
+                <a:latin typeface="Red Hat Text"/>
               </a:rPr>
               <a:t>•  Kubernetes ephemeral-storage budgets cap the tmpfs + writable layers</a:t>
             </a:r>
@@ -25158,7 +25158,7 @@
     <p:bg>
       <p:bgPr>
         <a:solidFill>
-          <a:srgbClr val="0A1628"/>
+          <a:srgbClr val="AB0000"/>
         </a:solidFill>
         <a:effectLst/>
       </p:bgPr>
@@ -25187,7 +25187,7 @@
             </a:avLst>
           </a:prstGeom>
           <a:solidFill>
-            <a:srgbClr val="27AE60"/>
+            <a:srgbClr val="FFA000"/>
           </a:solidFill>
           <a:ln>
             <a:noFill/>
@@ -25243,7 +25243,7 @@
                 <a:solidFill>
                   <a:srgbClr val="FFFFFF"/>
                 </a:solidFill>
-                <a:latin typeface="Calibri"/>
+                <a:latin typeface="Red Hat Display"/>
               </a:rPr>
               <a:t>▶ DEMO 08</a:t>
             </a:r>
@@ -25278,7 +25278,7 @@
                 <a:solidFill>
                   <a:srgbClr val="FFFFFF"/>
                 </a:solidFill>
-                <a:latin typeface="Calibri"/>
+                <a:latin typeface="Red Hat Display"/>
               </a:rPr>
               <a:t>Demo — Ephemeral filesystem</a:t>
             </a:r>
@@ -25311,9 +25311,9 @@
             <a:r>
               <a:rPr sz="2000" b="0" i="0">
                 <a:solidFill>
-                  <a:srgbClr val="ECF0F1"/>
-                </a:solidFill>
-                <a:latin typeface="Calibri"/>
+                  <a:srgbClr val="F4F4F4"/>
+                </a:solidFill>
+                <a:latin typeface="Red Hat Text"/>
               </a:rPr>
               <a:t>A read-only rootfs as the forcing function: the spdlog EROFS trap and the stdout-sink fix, ephemerality demonstrated across container restarts, and why scratch belongs on an explicit tmpfs.</a:t>
             </a:r>
@@ -25335,7 +25335,7 @@
             <a:avLst/>
           </a:prstGeom>
           <a:solidFill>
-            <a:srgbClr val="0D2137"/>
+            <a:srgbClr val="151515"/>
           </a:solidFill>
           <a:ln>
             <a:noFill/>
@@ -25389,9 +25389,9 @@
             <a:r>
               <a:rPr sz="1800" b="0" i="0">
                 <a:solidFill>
-                  <a:srgbClr val="00BCD4"/>
-                </a:solidFill>
-                <a:latin typeface="Consolas"/>
+                  <a:srgbClr val="EE0000"/>
+                </a:solidFill>
+                <a:latin typeface="Red Hat Mono"/>
               </a:rPr>
               <a:t>$ cd examples/statelessness/08-ephemeral-filesystem &amp;&amp; ./demo.sh</a:t>
             </a:r>
@@ -25424,9 +25424,9 @@
             <a:r>
               <a:rPr sz="1100" b="0" i="0">
                 <a:solidFill>
-                  <a:srgbClr val="90A4AE"/>
-                </a:solidFill>
-                <a:latin typeface="Consolas"/>
+                  <a:srgbClr val="8A8A8A"/>
+                </a:solidFill>
+                <a:latin typeface="Red Hat Mono"/>
               </a:rPr>
               <a:t>  source on site: patterncatalyst.github.io/cpp-statelessness/examples/statelessness-08-ephemeral-filesystem/</a:t>
             </a:r>
@@ -25459,9 +25459,9 @@
             <a:r>
               <a:rPr sz="1100" b="0" i="0">
                 <a:solidFill>
-                  <a:srgbClr val="90A4AE"/>
-                </a:solidFill>
-                <a:latin typeface="Calibri"/>
+                  <a:srgbClr val="8A8A8A"/>
+                </a:solidFill>
+                <a:latin typeface="Red Hat Text"/>
               </a:rPr>
               <a:t>48 / 67</a:t>
             </a:r>
@@ -25482,7 +25482,7 @@
     <p:bg>
       <p:bgPr>
         <a:solidFill>
-          <a:srgbClr val="0A1628"/>
+          <a:srgbClr val="AB0000"/>
         </a:solidFill>
         <a:effectLst/>
       </p:bgPr>
@@ -25520,9 +25520,9 @@
             <a:r>
               <a:rPr sz="18000" b="1" i="0">
                 <a:solidFill>
-                  <a:srgbClr val="00BCD4"/>
-                </a:solidFill>
-                <a:latin typeface="Calibri"/>
+                  <a:srgbClr val="EE0000"/>
+                </a:solidFill>
+                <a:latin typeface="Red Hat Display"/>
               </a:rPr>
               <a:t>§9</a:t>
             </a:r>
@@ -25557,7 +25557,7 @@
                 <a:solidFill>
                   <a:srgbClr val="FFFFFF"/>
                 </a:solidFill>
-                <a:latin typeface="Calibri"/>
+                <a:latin typeface="Red Hat Display"/>
               </a:rPr>
               <a:t>Health checks &amp; graceful shutdown</a:t>
             </a:r>
@@ -25590,9 +25590,9 @@
             <a:r>
               <a:rPr sz="2000" b="0" i="1">
                 <a:solidFill>
-                  <a:srgbClr val="90A4AE"/>
-                </a:solidFill>
-                <a:latin typeface="Calibri"/>
+                  <a:srgbClr val="8A8A8A"/>
+                </a:solidFill>
+                <a:latin typeface="Red Hat Text"/>
               </a:rPr>
               <a:t>Three probes, the gRPC health protocol, graceful shutdown.</a:t>
             </a:r>
@@ -25625,9 +25625,9 @@
             <a:r>
               <a:rPr sz="1100" b="0" i="0">
                 <a:solidFill>
-                  <a:srgbClr val="90A4AE"/>
-                </a:solidFill>
-                <a:latin typeface="Calibri"/>
+                  <a:srgbClr val="8A8A8A"/>
+                </a:solidFill>
+                <a:latin typeface="Red Hat Text"/>
               </a:rPr>
               <a:t>49 / 67</a:t>
             </a:r>
@@ -25675,7 +25675,7 @@
             <a:avLst/>
           </a:prstGeom>
           <a:solidFill>
-            <a:srgbClr val="1E6FC8"/>
+            <a:srgbClr val="EE0000"/>
           </a:solidFill>
           <a:ln>
             <a:noFill/>
@@ -25731,7 +25731,7 @@
                 <a:solidFill>
                   <a:srgbClr val="FFFFFF"/>
                 </a:solidFill>
-                <a:latin typeface="Calibri"/>
+                <a:latin typeface="Red Hat Display"/>
               </a:rPr>
               <a:t>Statelessness as deployment posture</a:t>
             </a:r>
@@ -25755,7 +25755,7 @@
             </a:avLst>
           </a:prstGeom>
           <a:solidFill>
-            <a:srgbClr val="1A2B3C"/>
+            <a:srgbClr val="151515"/>
           </a:solidFill>
           <a:ln>
             <a:noFill/>
@@ -25811,7 +25811,7 @@
                 <a:solidFill>
                   <a:srgbClr val="FFFFFF"/>
                 </a:solidFill>
-                <a:latin typeface="Calibri"/>
+                <a:latin typeface="Red Hat Display"/>
               </a:rPr>
               <a:t>§1</a:t>
             </a:r>
@@ -25844,11 +25844,11 @@
             <a:r>
               <a:rPr sz="1100" b="0" i="0">
                 <a:solidFill>
-                  <a:srgbClr val="90A4AE"/>
-                </a:solidFill>
-                <a:latin typeface="Calibri"/>
-              </a:rPr>
-              <a:t>Optimizing Modern C++ with Containers   |   Statelessness as deployment posture</a:t>
+                  <a:srgbClr val="8A8A8A"/>
+                </a:solidFill>
+                <a:latin typeface="Red Hat Text"/>
+              </a:rPr>
+              <a:t>Stateless C++ Services   |   Statelessness as deployment posture</a:t>
             </a:r>
           </a:p>
         </p:txBody>
@@ -25879,9 +25879,9 @@
             <a:r>
               <a:rPr sz="1100" b="0" i="0">
                 <a:solidFill>
-                  <a:srgbClr val="90A4AE"/>
-                </a:solidFill>
-                <a:latin typeface="Calibri"/>
+                  <a:srgbClr val="8A8A8A"/>
+                </a:solidFill>
+                <a:latin typeface="Red Hat Text"/>
               </a:rPr>
               <a:t>5 / 67</a:t>
             </a:r>
@@ -25914,9 +25914,9 @@
             <a:r>
               <a:rPr sz="2800" b="1" i="0">
                 <a:solidFill>
-                  <a:srgbClr val="1A2B3C"/>
-                </a:solidFill>
-                <a:latin typeface="Calibri"/>
+                  <a:srgbClr val="151515"/>
+                </a:solidFill>
+                <a:latin typeface="Red Hat Display"/>
               </a:rPr>
               <a:t>Three scopes of state</a:t>
             </a:r>
@@ -25955,7 +25955,7 @@
                 <a:solidFill>
                   <a:srgbClr val="1E6FC8"/>
                 </a:solidFill>
-                <a:latin typeface="Calibri"/>
+                <a:latin typeface="Red Hat Text"/>
               </a:rPr>
               <a:t>The same binary, three kinds of state</a:t>
             </a:r>
@@ -25971,7 +25971,7 @@
                 <a:solidFill>
                   <a:srgbClr val="1A2B3C"/>
                 </a:solidFill>
-                <a:latin typeface="Calibri"/>
+                <a:latin typeface="Red Hat Text"/>
               </a:rPr>
               <a:t>•  Request scope — lives for one RPC; born and dies inside the handler</a:t>
             </a:r>
@@ -25987,7 +25987,7 @@
                 <a:solidFill>
                   <a:srgbClr val="1A2B3C"/>
                 </a:solidFill>
-                <a:latin typeface="Calibri"/>
+                <a:latin typeface="Red Hat Text"/>
               </a:rPr>
               <a:t>•  Process scope — lives for the process; pools, caches, channels, config</a:t>
             </a:r>
@@ -26003,7 +26003,7 @@
                 <a:solidFill>
                   <a:srgbClr val="1A2B3C"/>
                 </a:solidFill>
-                <a:latin typeface="Calibri"/>
+                <a:latin typeface="Red Hat Text"/>
               </a:rPr>
               <a:t>•  Deploy-time scope — lives outside the process; the database, the queue, the cache tier</a:t>
             </a:r>
@@ -26019,7 +26019,7 @@
                 <a:solidFill>
                   <a:srgbClr val="90A4AE"/>
                 </a:solidFill>
-                <a:latin typeface="Calibri"/>
+                <a:latin typeface="Red Hat Text"/>
               </a:rPr>
               <a:t>Statelessness means: nothing the orchestrator can't recreate lives in process scope. Kill a replica and nothing authoritative is lost.</a:t>
             </a:r>
@@ -26091,7 +26091,7 @@
             <a:avLst/>
           </a:prstGeom>
           <a:solidFill>
-            <a:srgbClr val="1E6FC8"/>
+            <a:srgbClr val="EE0000"/>
           </a:solidFill>
           <a:ln>
             <a:noFill/>
@@ -26147,7 +26147,7 @@
                 <a:solidFill>
                   <a:srgbClr val="FFFFFF"/>
                 </a:solidFill>
-                <a:latin typeface="Calibri"/>
+                <a:latin typeface="Red Hat Display"/>
               </a:rPr>
               <a:t>Health checks &amp; graceful shutdown</a:t>
             </a:r>
@@ -26171,7 +26171,7 @@
             </a:avLst>
           </a:prstGeom>
           <a:solidFill>
-            <a:srgbClr val="1A2B3C"/>
+            <a:srgbClr val="151515"/>
           </a:solidFill>
           <a:ln>
             <a:noFill/>
@@ -26227,7 +26227,7 @@
                 <a:solidFill>
                   <a:srgbClr val="FFFFFF"/>
                 </a:solidFill>
-                <a:latin typeface="Calibri"/>
+                <a:latin typeface="Red Hat Display"/>
               </a:rPr>
               <a:t>§9</a:t>
             </a:r>
@@ -26260,11 +26260,11 @@
             <a:r>
               <a:rPr sz="1100" b="0" i="0">
                 <a:solidFill>
-                  <a:srgbClr val="90A4AE"/>
-                </a:solidFill>
-                <a:latin typeface="Calibri"/>
-              </a:rPr>
-              <a:t>Optimizing Modern C++ with Containers   |   Health checks &amp; graceful shutdown</a:t>
+                  <a:srgbClr val="8A8A8A"/>
+                </a:solidFill>
+                <a:latin typeface="Red Hat Text"/>
+              </a:rPr>
+              <a:t>Stateless C++ Services   |   Health checks &amp; graceful shutdown</a:t>
             </a:r>
           </a:p>
         </p:txBody>
@@ -26295,9 +26295,9 @@
             <a:r>
               <a:rPr sz="1100" b="0" i="0">
                 <a:solidFill>
-                  <a:srgbClr val="90A4AE"/>
-                </a:solidFill>
-                <a:latin typeface="Calibri"/>
+                  <a:srgbClr val="8A8A8A"/>
+                </a:solidFill>
+                <a:latin typeface="Red Hat Text"/>
               </a:rPr>
               <a:t>50 / 67</a:t>
             </a:r>
@@ -26330,9 +26330,9 @@
             <a:r>
               <a:rPr sz="2800" b="1" i="0">
                 <a:solidFill>
-                  <a:srgbClr val="1A2B3C"/>
-                </a:solidFill>
-                <a:latin typeface="Calibri"/>
+                  <a:srgbClr val="151515"/>
+                </a:solidFill>
+                <a:latin typeface="Red Hat Display"/>
               </a:rPr>
               <a:t>Startup, liveness, readiness</a:t>
             </a:r>
@@ -26371,7 +26371,7 @@
                 <a:solidFill>
                   <a:srgbClr val="1E6FC8"/>
                 </a:solidFill>
-                <a:latin typeface="Calibri"/>
+                <a:latin typeface="Red Hat Text"/>
               </a:rPr>
               <a:t>Three probes, three questions</a:t>
             </a:r>
@@ -26387,7 +26387,7 @@
                 <a:solidFill>
                   <a:srgbClr val="1A2B3C"/>
                 </a:solidFill>
-                <a:latin typeface="Calibri"/>
+                <a:latin typeface="Red Hat Text"/>
               </a:rPr>
               <a:t>•  Startup — "has it finished initializing?" (permissive, gates the others)</a:t>
             </a:r>
@@ -26403,7 +26403,7 @@
                 <a:solidFill>
                   <a:srgbClr val="1A2B3C"/>
                 </a:solidFill>
-                <a:latin typeface="Calibri"/>
+                <a:latin typeface="Red Hat Text"/>
               </a:rPr>
               <a:t>•  Liveness — "is it deadlocked?" (narrow; failure means restart)</a:t>
             </a:r>
@@ -26419,7 +26419,7 @@
                 <a:solidFill>
                   <a:srgbClr val="1A2B3C"/>
                 </a:solidFill>
-                <a:latin typeface="Calibri"/>
+                <a:latin typeface="Red Hat Text"/>
               </a:rPr>
               <a:t>•  Readiness — "should it get traffic?" (fine-grained; failure means drain)</a:t>
             </a:r>
@@ -26435,7 +26435,7 @@
                 <a:solidFill>
                   <a:srgbClr val="1A2B3C"/>
                 </a:solidFill>
-                <a:latin typeface="Calibri"/>
+                <a:latin typeface="Red Hat Text"/>
               </a:rPr>
               <a:t>•  gRPC standard health protocol via HealthCheckServiceInterface</a:t>
             </a:r>
@@ -26507,7 +26507,7 @@
             <a:avLst/>
           </a:prstGeom>
           <a:solidFill>
-            <a:srgbClr val="1E6FC8"/>
+            <a:srgbClr val="EE0000"/>
           </a:solidFill>
           <a:ln>
             <a:noFill/>
@@ -26563,7 +26563,7 @@
                 <a:solidFill>
                   <a:srgbClr val="FFFFFF"/>
                 </a:solidFill>
-                <a:latin typeface="Calibri"/>
+                <a:latin typeface="Red Hat Display"/>
               </a:rPr>
               <a:t>Health checks &amp; graceful shutdown</a:t>
             </a:r>
@@ -26587,7 +26587,7 @@
             </a:avLst>
           </a:prstGeom>
           <a:solidFill>
-            <a:srgbClr val="1A2B3C"/>
+            <a:srgbClr val="151515"/>
           </a:solidFill>
           <a:ln>
             <a:noFill/>
@@ -26643,7 +26643,7 @@
                 <a:solidFill>
                   <a:srgbClr val="FFFFFF"/>
                 </a:solidFill>
-                <a:latin typeface="Calibri"/>
+                <a:latin typeface="Red Hat Display"/>
               </a:rPr>
               <a:t>§9</a:t>
             </a:r>
@@ -26676,11 +26676,11 @@
             <a:r>
               <a:rPr sz="1100" b="0" i="0">
                 <a:solidFill>
-                  <a:srgbClr val="90A4AE"/>
-                </a:solidFill>
-                <a:latin typeface="Calibri"/>
-              </a:rPr>
-              <a:t>Optimizing Modern C++ with Containers   |   Health checks &amp; graceful shutdown</a:t>
+                  <a:srgbClr val="8A8A8A"/>
+                </a:solidFill>
+                <a:latin typeface="Red Hat Text"/>
+              </a:rPr>
+              <a:t>Stateless C++ Services   |   Health checks &amp; graceful shutdown</a:t>
             </a:r>
           </a:p>
         </p:txBody>
@@ -26711,9 +26711,9 @@
             <a:r>
               <a:rPr sz="1100" b="0" i="0">
                 <a:solidFill>
-                  <a:srgbClr val="90A4AE"/>
-                </a:solidFill>
-                <a:latin typeface="Calibri"/>
+                  <a:srgbClr val="8A8A8A"/>
+                </a:solidFill>
+                <a:latin typeface="Red Hat Text"/>
               </a:rPr>
               <a:t>51 / 67</a:t>
             </a:r>
@@ -26746,9 +26746,9 @@
             <a:r>
               <a:rPr sz="2800" b="1" i="0">
                 <a:solidFill>
-                  <a:srgbClr val="1A2B3C"/>
-                </a:solidFill>
-                <a:latin typeface="Calibri"/>
+                  <a:srgbClr val="151515"/>
+                </a:solidFill>
+                <a:latin typeface="Red Hat Display"/>
               </a:rPr>
               <a:t>The graceful-shutdown sequence</a:t>
             </a:r>
@@ -26787,7 +26787,7 @@
                 <a:solidFill>
                   <a:srgbClr val="F5A623"/>
                 </a:solidFill>
-                <a:latin typeface="Calibri"/>
+                <a:latin typeface="Red Hat Text"/>
               </a:rPr>
               <a:t>SIGTERM to clean exit, in order</a:t>
             </a:r>
@@ -26803,7 +26803,7 @@
                 <a:solidFill>
                   <a:srgbClr val="1A2B3C"/>
                 </a:solidFill>
-                <a:latin typeface="Calibri"/>
+                <a:latin typeface="Red Hat Text"/>
               </a:rPr>
               <a:t>•  Signal handler sets a flag only (async-signal-safe)</a:t>
             </a:r>
@@ -26819,7 +26819,7 @@
                 <a:solidFill>
                   <a:srgbClr val="1A2B3C"/>
                 </a:solidFill>
-                <a:latin typeface="Calibri"/>
+                <a:latin typeface="Red Hat Text"/>
               </a:rPr>
               <a:t>•  A control thread flips readiness NOT_SERVING — the LB drains us</a:t>
             </a:r>
@@ -26835,7 +26835,7 @@
                 <a:solidFill>
                   <a:srgbClr val="1A2B3C"/>
                 </a:solidFill>
-                <a:latin typeface="Calibri"/>
+                <a:latin typeface="Red Hat Text"/>
               </a:rPr>
               <a:t>•  server-&gt;Shutdown(deadline) lets in-flight RPCs finish</a:t>
             </a:r>
@@ -26851,7 +26851,7 @@
                 <a:solidFill>
                   <a:srgbClr val="1A2B3C"/>
                 </a:solidFill>
-                <a:latin typeface="Calibri"/>
+                <a:latin typeface="Red Hat Text"/>
               </a:rPr>
               <a:t>•  Reverse-order destruction in main() — pools, channels, config</a:t>
             </a:r>
@@ -26867,7 +26867,7 @@
                 <a:solidFill>
                   <a:srgbClr val="1A2B3C"/>
                 </a:solidFill>
-                <a:latin typeface="Calibri"/>
+                <a:latin typeface="Red Hat Text"/>
               </a:rPr>
               <a:t>•  std::stop_token cancels background workers cleanly (the threading section)</a:t>
             </a:r>
@@ -26915,7 +26915,7 @@
             <a:avLst/>
           </a:prstGeom>
           <a:solidFill>
-            <a:srgbClr val="1E6FC8"/>
+            <a:srgbClr val="EE0000"/>
           </a:solidFill>
           <a:ln>
             <a:noFill/>
@@ -26971,7 +26971,7 @@
                 <a:solidFill>
                   <a:srgbClr val="FFFFFF"/>
                 </a:solidFill>
-                <a:latin typeface="Calibri"/>
+                <a:latin typeface="Red Hat Display"/>
               </a:rPr>
               <a:t>Health checks &amp; graceful shutdown</a:t>
             </a:r>
@@ -26995,7 +26995,7 @@
             </a:avLst>
           </a:prstGeom>
           <a:solidFill>
-            <a:srgbClr val="1A2B3C"/>
+            <a:srgbClr val="151515"/>
           </a:solidFill>
           <a:ln>
             <a:noFill/>
@@ -27051,7 +27051,7 @@
                 <a:solidFill>
                   <a:srgbClr val="FFFFFF"/>
                 </a:solidFill>
-                <a:latin typeface="Calibri"/>
+                <a:latin typeface="Red Hat Display"/>
               </a:rPr>
               <a:t>§9</a:t>
             </a:r>
@@ -27084,11 +27084,11 @@
             <a:r>
               <a:rPr sz="1100" b="0" i="0">
                 <a:solidFill>
-                  <a:srgbClr val="90A4AE"/>
-                </a:solidFill>
-                <a:latin typeface="Calibri"/>
-              </a:rPr>
-              <a:t>Optimizing Modern C++ with Containers   |   Health checks &amp; graceful shutdown</a:t>
+                  <a:srgbClr val="8A8A8A"/>
+                </a:solidFill>
+                <a:latin typeface="Red Hat Text"/>
+              </a:rPr>
+              <a:t>Stateless C++ Services   |   Health checks &amp; graceful shutdown</a:t>
             </a:r>
           </a:p>
         </p:txBody>
@@ -27119,9 +27119,9 @@
             <a:r>
               <a:rPr sz="1100" b="0" i="0">
                 <a:solidFill>
-                  <a:srgbClr val="90A4AE"/>
-                </a:solidFill>
-                <a:latin typeface="Calibri"/>
+                  <a:srgbClr val="8A8A8A"/>
+                </a:solidFill>
+                <a:latin typeface="Red Hat Text"/>
               </a:rPr>
               <a:t>52 / 67</a:t>
             </a:r>
@@ -27154,9 +27154,9 @@
             <a:r>
               <a:rPr sz="2800" b="1" i="0">
                 <a:solidFill>
-                  <a:srgbClr val="1A2B3C"/>
-                </a:solidFill>
-                <a:latin typeface="Calibri"/>
+                  <a:srgbClr val="151515"/>
+                </a:solidFill>
+                <a:latin typeface="Red Hat Display"/>
               </a:rPr>
               <a:t>Separate port vs. same port</a:t>
             </a:r>
@@ -27195,7 +27195,7 @@
                 <a:solidFill>
                   <a:srgbClr val="1E6FC8"/>
                 </a:solidFill>
-                <a:latin typeface="Calibri"/>
+                <a:latin typeface="Red Hat Text"/>
               </a:rPr>
               <a:t>Where the probes listen</a:t>
             </a:r>
@@ -27211,7 +27211,7 @@
                 <a:solidFill>
                   <a:srgbClr val="1A2B3C"/>
                 </a:solidFill>
-                <a:latin typeface="Calibri"/>
+                <a:latin typeface="Red Hat Text"/>
               </a:rPr>
               <a:t>•  Same port: the gRPC health service rides the main port — simplest</a:t>
             </a:r>
@@ -27227,7 +27227,7 @@
                 <a:solidFill>
                   <a:srgbClr val="1A2B3C"/>
                 </a:solidFill>
-                <a:latin typeface="Calibri"/>
+                <a:latin typeface="Red Hat Text"/>
               </a:rPr>
               <a:t>•  Separate port: an HTTP /healthz for liveness, isolated from app load</a:t>
             </a:r>
@@ -27243,7 +27243,7 @@
                 <a:solidFill>
                   <a:srgbClr val="1A2B3C"/>
                 </a:solidFill>
-                <a:latin typeface="Calibri"/>
+                <a:latin typeface="Red Hat Text"/>
               </a:rPr>
               <a:t>•  Hybrid (the 09 companion): HTTP liveness, gRPC readiness</a:t>
             </a:r>
@@ -27259,7 +27259,7 @@
                 <a:solidFill>
                   <a:srgbClr val="1A2B3C"/>
                 </a:solidFill>
-                <a:latin typeface="Calibri"/>
+                <a:latin typeface="Red Hat Text"/>
               </a:rPr>
               <a:t>•  Separate-port liveness keeps answering even when the app pool is saturated</a:t>
             </a:r>
@@ -27307,7 +27307,7 @@
             <a:avLst/>
           </a:prstGeom>
           <a:solidFill>
-            <a:srgbClr val="1E6FC8"/>
+            <a:srgbClr val="EE0000"/>
           </a:solidFill>
           <a:ln>
             <a:noFill/>
@@ -27363,7 +27363,7 @@
                 <a:solidFill>
                   <a:srgbClr val="FFFFFF"/>
                 </a:solidFill>
-                <a:latin typeface="Calibri"/>
+                <a:latin typeface="Red Hat Display"/>
               </a:rPr>
               <a:t>Health checks &amp; graceful shutdown</a:t>
             </a:r>
@@ -27387,7 +27387,7 @@
             </a:avLst>
           </a:prstGeom>
           <a:solidFill>
-            <a:srgbClr val="1A2B3C"/>
+            <a:srgbClr val="151515"/>
           </a:solidFill>
           <a:ln>
             <a:noFill/>
@@ -27443,7 +27443,7 @@
                 <a:solidFill>
                   <a:srgbClr val="FFFFFF"/>
                 </a:solidFill>
-                <a:latin typeface="Calibri"/>
+                <a:latin typeface="Red Hat Display"/>
               </a:rPr>
               <a:t>§9</a:t>
             </a:r>
@@ -27476,11 +27476,11 @@
             <a:r>
               <a:rPr sz="1100" b="0" i="0">
                 <a:solidFill>
-                  <a:srgbClr val="90A4AE"/>
-                </a:solidFill>
-                <a:latin typeface="Calibri"/>
-              </a:rPr>
-              <a:t>Optimizing Modern C++ with Containers   |   Health checks &amp; graceful shutdown</a:t>
+                  <a:srgbClr val="8A8A8A"/>
+                </a:solidFill>
+                <a:latin typeface="Red Hat Text"/>
+              </a:rPr>
+              <a:t>Stateless C++ Services   |   Health checks &amp; graceful shutdown</a:t>
             </a:r>
           </a:p>
         </p:txBody>
@@ -27511,9 +27511,9 @@
             <a:r>
               <a:rPr sz="1100" b="0" i="0">
                 <a:solidFill>
-                  <a:srgbClr val="90A4AE"/>
-                </a:solidFill>
-                <a:latin typeface="Calibri"/>
+                  <a:srgbClr val="8A8A8A"/>
+                </a:solidFill>
+                <a:latin typeface="Red Hat Text"/>
               </a:rPr>
               <a:t>53 / 67</a:t>
             </a:r>
@@ -27546,9 +27546,9 @@
             <a:r>
               <a:rPr sz="2800" b="1" i="0">
                 <a:solidFill>
-                  <a:srgbClr val="1A2B3C"/>
-                </a:solidFill>
-                <a:latin typeface="Calibri"/>
+                  <a:srgbClr val="151515"/>
+                </a:solidFill>
+                <a:latin typeface="Red Hat Display"/>
               </a:rPr>
               <a:t>Health-check anti-patterns</a:t>
             </a:r>
@@ -27587,7 +27587,7 @@
                 <a:solidFill>
                   <a:srgbClr val="E84855"/>
                 </a:solidFill>
-                <a:latin typeface="Calibri"/>
+                <a:latin typeface="Red Hat Text"/>
               </a:rPr>
               <a:t>How probes cause the outages they should prevent</a:t>
             </a:r>
@@ -27603,7 +27603,7 @@
                 <a:solidFill>
                   <a:srgbClr val="1A2B3C"/>
                 </a:solidFill>
-                <a:latin typeface="Calibri"/>
+                <a:latin typeface="Red Hat Text"/>
               </a:rPr>
               <a:t>•  Liveness that checks dependencies → a DB blip restarts every replica</a:t>
             </a:r>
@@ -27619,7 +27619,7 @@
                 <a:solidFill>
                   <a:srgbClr val="1A2B3C"/>
                 </a:solidFill>
-                <a:latin typeface="Calibri"/>
+                <a:latin typeface="Red Hat Text"/>
               </a:rPr>
               <a:t>•  Readiness that's too coarse → flapping in and out of rotation</a:t>
             </a:r>
@@ -27635,7 +27635,7 @@
                 <a:solidFill>
                   <a:srgbClr val="1A2B3C"/>
                 </a:solidFill>
-                <a:latin typeface="Calibri"/>
+                <a:latin typeface="Red Hat Text"/>
               </a:rPr>
               <a:t>•  A probe heavier than a real request → the probe is the load</a:t>
             </a:r>
@@ -27651,7 +27651,7 @@
                 <a:solidFill>
                   <a:srgbClr val="1A2B3C"/>
                 </a:solidFill>
-                <a:latin typeface="Calibri"/>
+                <a:latin typeface="Red Hat Text"/>
               </a:rPr>
               <a:t>•  No startup probe → liveness fires during a slow cold start, restart loop</a:t>
             </a:r>
@@ -27672,7 +27672,7 @@
     <p:bg>
       <p:bgPr>
         <a:solidFill>
-          <a:srgbClr val="0A1628"/>
+          <a:srgbClr val="AB0000"/>
         </a:solidFill>
         <a:effectLst/>
       </p:bgPr>
@@ -27701,7 +27701,7 @@
             </a:avLst>
           </a:prstGeom>
           <a:solidFill>
-            <a:srgbClr val="27AE60"/>
+            <a:srgbClr val="FFA000"/>
           </a:solidFill>
           <a:ln>
             <a:noFill/>
@@ -27757,7 +27757,7 @@
                 <a:solidFill>
                   <a:srgbClr val="FFFFFF"/>
                 </a:solidFill>
-                <a:latin typeface="Calibri"/>
+                <a:latin typeface="Red Hat Display"/>
               </a:rPr>
               <a:t>▶ DEMO 09</a:t>
             </a:r>
@@ -27792,7 +27792,7 @@
                 <a:solidFill>
                   <a:srgbClr val="FFFFFF"/>
                 </a:solidFill>
-                <a:latin typeface="Calibri"/>
+                <a:latin typeface="Red Hat Display"/>
               </a:rPr>
               <a:t>Demo — Health checks &amp; shutdown</a:t>
             </a:r>
@@ -27825,9 +27825,9 @@
             <a:r>
               <a:rPr sz="2000" b="0" i="0">
                 <a:solidFill>
-                  <a:srgbClr val="ECF0F1"/>
-                </a:solidFill>
-                <a:latin typeface="Calibri"/>
+                  <a:srgbClr val="F4F4F4"/>
+                </a:solidFill>
+                <a:latin typeface="Red Hat Text"/>
               </a:rPr>
               <a:t>Staged startup (NOT_SERVING → SERVING), liveness vs readiness on separate ports, a SIGUSR1 readiness toggle, and the signal-safe graceful-shutdown sequence to a clean exit.</a:t>
             </a:r>
@@ -27849,7 +27849,7 @@
             <a:avLst/>
           </a:prstGeom>
           <a:solidFill>
-            <a:srgbClr val="0D2137"/>
+            <a:srgbClr val="151515"/>
           </a:solidFill>
           <a:ln>
             <a:noFill/>
@@ -27903,9 +27903,9 @@
             <a:r>
               <a:rPr sz="1800" b="0" i="0">
                 <a:solidFill>
-                  <a:srgbClr val="00BCD4"/>
-                </a:solidFill>
-                <a:latin typeface="Consolas"/>
+                  <a:srgbClr val="EE0000"/>
+                </a:solidFill>
+                <a:latin typeface="Red Hat Mono"/>
               </a:rPr>
               <a:t>$ cd examples/statelessness/09-health-checks &amp;&amp; ./demo.sh</a:t>
             </a:r>
@@ -27938,9 +27938,9 @@
             <a:r>
               <a:rPr sz="1100" b="0" i="0">
                 <a:solidFill>
-                  <a:srgbClr val="90A4AE"/>
-                </a:solidFill>
-                <a:latin typeface="Consolas"/>
+                  <a:srgbClr val="8A8A8A"/>
+                </a:solidFill>
+                <a:latin typeface="Red Hat Mono"/>
               </a:rPr>
               <a:t>  source on site: patterncatalyst.github.io/cpp-statelessness/examples/statelessness-09-health-checks/</a:t>
             </a:r>
@@ -27973,9 +27973,9 @@
             <a:r>
               <a:rPr sz="1100" b="0" i="0">
                 <a:solidFill>
-                  <a:srgbClr val="90A4AE"/>
-                </a:solidFill>
-                <a:latin typeface="Calibri"/>
+                  <a:srgbClr val="8A8A8A"/>
+                </a:solidFill>
+                <a:latin typeface="Red Hat Text"/>
               </a:rPr>
               <a:t>54 / 67</a:t>
             </a:r>
@@ -27996,7 +27996,7 @@
     <p:bg>
       <p:bgPr>
         <a:solidFill>
-          <a:srgbClr val="0A1628"/>
+          <a:srgbClr val="AB0000"/>
         </a:solidFill>
         <a:effectLst/>
       </p:bgPr>
@@ -28034,9 +28034,9 @@
             <a:r>
               <a:rPr sz="18000" b="1" i="0">
                 <a:solidFill>
-                  <a:srgbClr val="00BCD4"/>
-                </a:solidFill>
-                <a:latin typeface="Calibri"/>
+                  <a:srgbClr val="EE0000"/>
+                </a:solidFill>
+                <a:latin typeface="Red Hat Display"/>
               </a:rPr>
               <a:t>§10</a:t>
             </a:r>
@@ -28071,7 +28071,7 @@
                 <a:solidFill>
                   <a:srgbClr val="FFFFFF"/>
                 </a:solidFill>
-                <a:latin typeface="Calibri"/>
+                <a:latin typeface="Red Hat Display"/>
               </a:rPr>
               <a:t>The gRPC end-to-end example</a:t>
             </a:r>
@@ -28104,9 +28104,9 @@
             <a:r>
               <a:rPr sz="2000" b="0" i="1">
                 <a:solidFill>
-                  <a:srgbClr val="90A4AE"/>
-                </a:solidFill>
-                <a:latin typeface="Calibri"/>
+                  <a:srgbClr val="8A8A8A"/>
+                </a:solidFill>
+                <a:latin typeface="Red Hat Text"/>
               </a:rPr>
               <a:t>Every pattern composed in one order-pricing service.</a:t>
             </a:r>
@@ -28139,9 +28139,9 @@
             <a:r>
               <a:rPr sz="1100" b="0" i="0">
                 <a:solidFill>
-                  <a:srgbClr val="90A4AE"/>
-                </a:solidFill>
-                <a:latin typeface="Calibri"/>
+                  <a:srgbClr val="8A8A8A"/>
+                </a:solidFill>
+                <a:latin typeface="Red Hat Text"/>
               </a:rPr>
               <a:t>55 / 67</a:t>
             </a:r>
@@ -28189,7 +28189,7 @@
             <a:avLst/>
           </a:prstGeom>
           <a:solidFill>
-            <a:srgbClr val="1E6FC8"/>
+            <a:srgbClr val="EE0000"/>
           </a:solidFill>
           <a:ln>
             <a:noFill/>
@@ -28245,7 +28245,7 @@
                 <a:solidFill>
                   <a:srgbClr val="FFFFFF"/>
                 </a:solidFill>
-                <a:latin typeface="Calibri"/>
+                <a:latin typeface="Red Hat Display"/>
               </a:rPr>
               <a:t>The gRPC end-to-end example</a:t>
             </a:r>
@@ -28269,7 +28269,7 @@
             </a:avLst>
           </a:prstGeom>
           <a:solidFill>
-            <a:srgbClr val="1A2B3C"/>
+            <a:srgbClr val="151515"/>
           </a:solidFill>
           <a:ln>
             <a:noFill/>
@@ -28325,7 +28325,7 @@
                 <a:solidFill>
                   <a:srgbClr val="FFFFFF"/>
                 </a:solidFill>
-                <a:latin typeface="Calibri"/>
+                <a:latin typeface="Red Hat Display"/>
               </a:rPr>
               <a:t>§10</a:t>
             </a:r>
@@ -28358,11 +28358,11 @@
             <a:r>
               <a:rPr sz="1100" b="0" i="0">
                 <a:solidFill>
-                  <a:srgbClr val="90A4AE"/>
-                </a:solidFill>
-                <a:latin typeface="Calibri"/>
-              </a:rPr>
-              <a:t>Optimizing Modern C++ with Containers   |   The gRPC end-to-end example</a:t>
+                  <a:srgbClr val="8A8A8A"/>
+                </a:solidFill>
+                <a:latin typeface="Red Hat Text"/>
+              </a:rPr>
+              <a:t>Stateless C++ Services   |   The gRPC end-to-end example</a:t>
             </a:r>
           </a:p>
         </p:txBody>
@@ -28393,9 +28393,9 @@
             <a:r>
               <a:rPr sz="1100" b="0" i="0">
                 <a:solidFill>
-                  <a:srgbClr val="90A4AE"/>
-                </a:solidFill>
-                <a:latin typeface="Calibri"/>
+                  <a:srgbClr val="8A8A8A"/>
+                </a:solidFill>
+                <a:latin typeface="Red Hat Text"/>
               </a:rPr>
               <a:t>56 / 67</a:t>
             </a:r>
@@ -28428,9 +28428,9 @@
             <a:r>
               <a:rPr sz="2800" b="1" i="0">
                 <a:solidFill>
-                  <a:srgbClr val="1A2B3C"/>
-                </a:solidFill>
-                <a:latin typeface="Calibri"/>
+                  <a:srgbClr val="151515"/>
+                </a:solidFill>
+                <a:latin typeface="Red Hat Display"/>
               </a:rPr>
               <a:t>What composes</a:t>
             </a:r>
@@ -28469,7 +28469,7 @@
                 <a:solidFill>
                   <a:srgbClr val="1E6FC8"/>
                 </a:solidFill>
-                <a:latin typeface="Calibri"/>
+                <a:latin typeface="Red Hat Text"/>
               </a:rPr>
               <a:t>Every prior section, in one main()</a:t>
             </a:r>
@@ -28485,7 +28485,7 @@
                 <a:solidFill>
                   <a:srgbClr val="1A2B3C"/>
                 </a:solidFill>
-                <a:latin typeface="Calibri"/>
+                <a:latin typeface="Red Hat Text"/>
               </a:rPr>
               <a:t>•  Config parsed once (12-factor config); process-scoped pool + channel cache (process scope)</a:t>
             </a:r>
@@ -28501,7 +28501,7 @@
                 <a:solidFill>
                   <a:srgbClr val="1A2B3C"/>
                 </a:solidFill>
-                <a:latin typeface="Calibri"/>
+                <a:latin typeface="Red Hat Text"/>
               </a:rPr>
               <a:t>•  RequestContext with a PMR arena per call (RAII + PMR)</a:t>
             </a:r>
@@ -28517,7 +28517,7 @@
                 <a:solidFill>
                   <a:srgbClr val="1A2B3C"/>
                 </a:solidFill>
-                <a:latin typeface="Calibri"/>
+                <a:latin typeface="Red Hat Text"/>
               </a:rPr>
               <a:t>•  Handler throws grpc::Status; RAII cleans up; boundary translates (the RAII section)</a:t>
             </a:r>
@@ -28533,7 +28533,7 @@
                 <a:solidFill>
                   <a:srgbClr val="1A2B3C"/>
                 </a:solidFill>
-                <a:latin typeface="Calibri"/>
+                <a:latin typeface="Red Hat Text"/>
               </a:rPr>
               <a:t>•  Deadline-propagated PostgreSQL + outbound gRPC tax call (threading + externalization)</a:t>
             </a:r>
@@ -28549,7 +28549,7 @@
                 <a:solidFill>
                   <a:srgbClr val="1A2B3C"/>
                 </a:solidFill>
-                <a:latin typeface="Calibri"/>
+                <a:latin typeface="Red Hat Text"/>
               </a:rPr>
               <a:t>•  Idempotency on the client key; staged health + graceful shutdown (externalization + health)</a:t>
             </a:r>
@@ -28621,7 +28621,7 @@
             <a:avLst/>
           </a:prstGeom>
           <a:solidFill>
-            <a:srgbClr val="1E6FC8"/>
+            <a:srgbClr val="EE0000"/>
           </a:solidFill>
           <a:ln>
             <a:noFill/>
@@ -28677,7 +28677,7 @@
                 <a:solidFill>
                   <a:srgbClr val="FFFFFF"/>
                 </a:solidFill>
-                <a:latin typeface="Calibri"/>
+                <a:latin typeface="Red Hat Display"/>
               </a:rPr>
               <a:t>The gRPC end-to-end example</a:t>
             </a:r>
@@ -28701,7 +28701,7 @@
             </a:avLst>
           </a:prstGeom>
           <a:solidFill>
-            <a:srgbClr val="1A2B3C"/>
+            <a:srgbClr val="151515"/>
           </a:solidFill>
           <a:ln>
             <a:noFill/>
@@ -28757,7 +28757,7 @@
                 <a:solidFill>
                   <a:srgbClr val="FFFFFF"/>
                 </a:solidFill>
-                <a:latin typeface="Calibri"/>
+                <a:latin typeface="Red Hat Display"/>
               </a:rPr>
               <a:t>§10</a:t>
             </a:r>
@@ -28790,11 +28790,11 @@
             <a:r>
               <a:rPr sz="1100" b="0" i="0">
                 <a:solidFill>
-                  <a:srgbClr val="90A4AE"/>
-                </a:solidFill>
-                <a:latin typeface="Calibri"/>
-              </a:rPr>
-              <a:t>Optimizing Modern C++ with Containers   |   The gRPC end-to-end example</a:t>
+                  <a:srgbClr val="8A8A8A"/>
+                </a:solidFill>
+                <a:latin typeface="Red Hat Text"/>
+              </a:rPr>
+              <a:t>Stateless C++ Services   |   The gRPC end-to-end example</a:t>
             </a:r>
           </a:p>
         </p:txBody>
@@ -28825,9 +28825,9 @@
             <a:r>
               <a:rPr sz="1100" b="0" i="0">
                 <a:solidFill>
-                  <a:srgbClr val="90A4AE"/>
-                </a:solidFill>
-                <a:latin typeface="Calibri"/>
+                  <a:srgbClr val="8A8A8A"/>
+                </a:solidFill>
+                <a:latin typeface="Red Hat Text"/>
               </a:rPr>
               <a:t>57 / 67</a:t>
             </a:r>
@@ -28860,9 +28860,9 @@
             <a:r>
               <a:rPr sz="2800" b="1" i="0">
                 <a:solidFill>
-                  <a:srgbClr val="1A2B3C"/>
-                </a:solidFill>
-                <a:latin typeface="Calibri"/>
+                  <a:srgbClr val="151515"/>
+                </a:solidFill>
+                <a:latin typeface="Red Hat Display"/>
               </a:rPr>
               <a:t>Faithful in architecture, lean in dependencies</a:t>
             </a:r>
@@ -28901,7 +28901,7 @@
                 <a:solidFill>
                   <a:srgbClr val="F5A623"/>
                 </a:solidFill>
-                <a:latin typeface="Calibri"/>
+                <a:latin typeface="Red Hat Text"/>
               </a:rPr>
               <a:t>What the runnable companion realizes vs. designs</a:t>
             </a:r>
@@ -28917,7 +28917,7 @@
                 <a:solidFill>
                   <a:srgbClr val="1A2B3C"/>
                 </a:solidFill>
-                <a:latin typeface="Calibri"/>
+                <a:latin typeface="Red Hat Text"/>
               </a:rPr>
               <a:t>•  PostgreSQL via libpq, not libpqxx (its bundled CMake breaks the toolchain)</a:t>
             </a:r>
@@ -28933,7 +28933,7 @@
                 <a:solidFill>
                   <a:srgbClr val="1A2B3C"/>
                 </a:solidFill>
-                <a:latin typeface="Calibri"/>
+                <a:latin typeface="Red Hat Text"/>
               </a:rPr>
               <a:t>•  Price lookup straight to PostgreSQL; Redis cache-aside marked as a seam</a:t>
             </a:r>
@@ -28949,7 +28949,7 @@
                 <a:solidFill>
                   <a:srgbClr val="1A2B3C"/>
                 </a:solidFill>
-                <a:latin typeface="Calibri"/>
+                <a:latin typeface="Red Hat Text"/>
               </a:rPr>
               <a:t>•  OpenTelemetry is a documented seam — the companion emits NO spans</a:t>
             </a:r>
@@ -28965,7 +28965,7 @@
                 <a:solidFill>
                   <a:srgbClr val="1A2B3C"/>
                 </a:solidFill>
-                <a:latin typeface="Calibri"/>
+                <a:latin typeface="Red Hat Text"/>
               </a:rPr>
               <a:t>•  Sync gRPC API, not callback; composition identical, migration mechanical</a:t>
             </a:r>
@@ -28981,7 +28981,7 @@
                 <a:solidFill>
                   <a:srgbClr val="90A4AE"/>
                 </a:solidFill>
-                <a:latin typeface="Calibri"/>
+                <a:latin typeface="Red Hat Text"/>
               </a:rPr>
               <a:t>The architecture and composition are faithful to the doc; the realized backends stay on the verified stack.</a:t>
             </a:r>
@@ -29029,7 +29029,7 @@
             <a:avLst/>
           </a:prstGeom>
           <a:solidFill>
-            <a:srgbClr val="1E6FC8"/>
+            <a:srgbClr val="EE0000"/>
           </a:solidFill>
           <a:ln>
             <a:noFill/>
@@ -29085,7 +29085,7 @@
                 <a:solidFill>
                   <a:srgbClr val="FFFFFF"/>
                 </a:solidFill>
-                <a:latin typeface="Calibri"/>
+                <a:latin typeface="Red Hat Display"/>
               </a:rPr>
               <a:t>The gRPC end-to-end example</a:t>
             </a:r>
@@ -29109,7 +29109,7 @@
             </a:avLst>
           </a:prstGeom>
           <a:solidFill>
-            <a:srgbClr val="1A2B3C"/>
+            <a:srgbClr val="151515"/>
           </a:solidFill>
           <a:ln>
             <a:noFill/>
@@ -29165,7 +29165,7 @@
                 <a:solidFill>
                   <a:srgbClr val="FFFFFF"/>
                 </a:solidFill>
-                <a:latin typeface="Calibri"/>
+                <a:latin typeface="Red Hat Display"/>
               </a:rPr>
               <a:t>§10</a:t>
             </a:r>
@@ -29198,11 +29198,11 @@
             <a:r>
               <a:rPr sz="1100" b="0" i="0">
                 <a:solidFill>
-                  <a:srgbClr val="90A4AE"/>
-                </a:solidFill>
-                <a:latin typeface="Calibri"/>
-              </a:rPr>
-              <a:t>Optimizing Modern C++ with Containers   |   The gRPC end-to-end example</a:t>
+                  <a:srgbClr val="8A8A8A"/>
+                </a:solidFill>
+                <a:latin typeface="Red Hat Text"/>
+              </a:rPr>
+              <a:t>Stateless C++ Services   |   The gRPC end-to-end example</a:t>
             </a:r>
           </a:p>
         </p:txBody>
@@ -29233,9 +29233,9 @@
             <a:r>
               <a:rPr sz="1100" b="0" i="0">
                 <a:solidFill>
-                  <a:srgbClr val="90A4AE"/>
-                </a:solidFill>
-                <a:latin typeface="Calibri"/>
+                  <a:srgbClr val="8A8A8A"/>
+                </a:solidFill>
+                <a:latin typeface="Red Hat Text"/>
               </a:rPr>
               <a:t>58 / 67</a:t>
             </a:r>
@@ -29268,9 +29268,9 @@
             <a:r>
               <a:rPr sz="2800" b="1" i="0">
                 <a:solidFill>
-                  <a:srgbClr val="1A2B3C"/>
-                </a:solidFill>
-                <a:latin typeface="Calibri"/>
+                  <a:srgbClr val="151515"/>
+                </a:solidFill>
+                <a:latin typeface="Red Hat Display"/>
               </a:rPr>
               <a:t>main() in twelve numbered steps</a:t>
             </a:r>
@@ -29309,7 +29309,7 @@
                 <a:solidFill>
                   <a:srgbClr val="1E6FC8"/>
                 </a:solidFill>
-                <a:latin typeface="Calibri"/>
+                <a:latin typeface="Red Hat Text"/>
               </a:rPr>
               <a:t>The wiring is mechanical and reusable</a:t>
             </a:r>
@@ -29325,7 +29325,7 @@
                 <a:solidFill>
                   <a:srgbClr val="1A2B3C"/>
                 </a:solidFill>
-                <a:latin typeface="Calibri"/>
+                <a:latin typeface="Red Hat Text"/>
               </a:rPr>
               <a:t>•  Parse config → detect CPU budget → size pools</a:t>
             </a:r>
@@ -29341,7 +29341,7 @@
                 <a:solidFill>
                   <a:srgbClr val="1A2B3C"/>
                 </a:solidFill>
-                <a:latin typeface="Calibri"/>
+                <a:latin typeface="Red Hat Text"/>
               </a:rPr>
               <a:t>•  Construct process-scoped state: pool, channel cache, service</a:t>
             </a:r>
@@ -29357,7 +29357,7 @@
                 <a:solidFill>
                   <a:srgbClr val="1A2B3C"/>
                 </a:solidFill>
-                <a:latin typeface="Calibri"/>
+                <a:latin typeface="Red Hat Text"/>
               </a:rPr>
               <a:t>•  Build the server, health NOT_SERVING, warm, flip to SERVING</a:t>
             </a:r>
@@ -29373,7 +29373,7 @@
                 <a:solidFill>
                   <a:srgbClr val="1A2B3C"/>
                 </a:solidFill>
-                <a:latin typeface="Calibri"/>
+                <a:latin typeface="Red Hat Text"/>
               </a:rPr>
               <a:t>•  Install the signal handler, start workers, Wait(), drain, exit 0</a:t>
             </a:r>
@@ -29395,7 +29395,7 @@
             <a:avLst/>
           </a:prstGeom>
           <a:solidFill>
-            <a:srgbClr val="0D2137"/>
+            <a:srgbClr val="151515"/>
           </a:solidFill>
           <a:ln>
             <a:noFill/>
@@ -29448,9 +29448,9 @@
             <a:r>
               <a:rPr sz="1200">
                 <a:solidFill>
-                  <a:srgbClr val="ECF0F1"/>
-                </a:solidFill>
-                <a:latin typeface="Consolas"/>
+                  <a:srgbClr val="F4F4F4"/>
+                </a:solidFill>
+                <a:latin typeface="Red Hat Mono"/>
               </a:rPr>
               <a:t>const Config cfg = parse_config();        // 1</a:t>
             </a:r>
@@ -29459,9 +29459,9 @@
             <a:r>
               <a:rPr sz="1200">
                 <a:solidFill>
-                  <a:srgbClr val="ECF0F1"/>
-                </a:solidFill>
-                <a:latin typeface="Consolas"/>
+                  <a:srgbClr val="F4F4F4"/>
+                </a:solidFill>
+                <a:latin typeface="Red Hat Mono"/>
               </a:rPr>
               <a:t>const double cpu = cgroup_cpu().value_or(  // 2</a:t>
             </a:r>
@@ -29470,9 +29470,9 @@
             <a:r>
               <a:rPr sz="1200">
                 <a:solidFill>
-                  <a:srgbClr val="ECF0F1"/>
-                </a:solidFill>
-                <a:latin typeface="Consolas"/>
+                  <a:srgbClr val="F4F4F4"/>
+                </a:solidFill>
+                <a:latin typeface="Red Hat Mono"/>
               </a:rPr>
               <a:t>    hardware_concurrency());</a:t>
             </a:r>
@@ -29481,9 +29481,9 @@
             <a:r>
               <a:rPr sz="1200">
                 <a:solidFill>
-                  <a:srgbClr val="ECF0F1"/>
-                </a:solidFill>
-                <a:latin typeface="Consolas"/>
+                  <a:srgbClr val="F4F4F4"/>
+                </a:solidFill>
+                <a:latin typeface="Red Hat Mono"/>
               </a:rPr>
               <a:t>PgPool pg{cfg.pg_conninfo, cfg.pool};      // 3</a:t>
             </a:r>
@@ -29492,9 +29492,9 @@
             <a:r>
               <a:rPr sz="1200">
                 <a:solidFill>
-                  <a:srgbClr val="ECF0F1"/>
-                </a:solidFill>
-                <a:latin typeface="Consolas"/>
+                  <a:srgbClr val="F4F4F4"/>
+                </a:solidFill>
+                <a:latin typeface="Red Hat Mono"/>
               </a:rPr>
               <a:t>ChannelCache channels{};                   // 4</a:t>
             </a:r>
@@ -29503,9 +29503,9 @@
             <a:r>
               <a:rPr sz="1200">
                 <a:solidFill>
-                  <a:srgbClr val="ECF0F1"/>
-                </a:solidFill>
-                <a:latin typeface="Consolas"/>
+                  <a:srgbClr val="F4F4F4"/>
+                </a:solidFill>
+                <a:latin typeface="Red Hat Mono"/>
               </a:rPr>
               <a:t>PricingService svc{cfg, pg, channels};     // 5</a:t>
             </a:r>
@@ -29514,9 +29514,9 @@
             <a:r>
               <a:rPr sz="1200">
                 <a:solidFill>
-                  <a:srgbClr val="ECF0F1"/>
-                </a:solidFill>
-                <a:latin typeface="Consolas"/>
+                  <a:srgbClr val="F4F4F4"/>
+                </a:solidFill>
+                <a:latin typeface="Red Hat Mono"/>
               </a:rPr>
               <a:t>auto server = build_server(svc, cfg);      // 6</a:t>
             </a:r>
@@ -29525,9 +29525,9 @@
             <a:r>
               <a:rPr sz="1200">
                 <a:solidFill>
-                  <a:srgbClr val="ECF0F1"/>
-                </a:solidFill>
-                <a:latin typeface="Consolas"/>
+                  <a:srgbClr val="F4F4F4"/>
+                </a:solidFill>
+                <a:latin typeface="Red Hat Mono"/>
               </a:rPr>
               <a:t>health-&gt;Set("", NOT_SERVING); warm(pg);    // 7-8</a:t>
             </a:r>
@@ -29536,9 +29536,9 @@
             <a:r>
               <a:rPr sz="1200">
                 <a:solidFill>
-                  <a:srgbClr val="ECF0F1"/>
-                </a:solidFill>
-                <a:latin typeface="Consolas"/>
+                  <a:srgbClr val="F4F4F4"/>
+                </a:solidFill>
+                <a:latin typeface="Red Hat Mono"/>
               </a:rPr>
               <a:t>health-&gt;Set("", SERVING);                  // 9</a:t>
             </a:r>
@@ -29547,9 +29547,9 @@
             <a:r>
               <a:rPr sz="1200">
                 <a:solidFill>
-                  <a:srgbClr val="ECF0F1"/>
-                </a:solidFill>
-                <a:latin typeface="Consolas"/>
+                  <a:srgbClr val="F4F4F4"/>
+                </a:solidFill>
+                <a:latin typeface="Red Hat Mono"/>
               </a:rPr>
               <a:t>install_signal_handler(...);               // 10</a:t>
             </a:r>
@@ -29558,9 +29558,9 @@
             <a:r>
               <a:rPr sz="1200">
                 <a:solidFill>
-                  <a:srgbClr val="ECF0F1"/>
-                </a:solidFill>
-                <a:latin typeface="Consolas"/>
+                  <a:srgbClr val="F4F4F4"/>
+                </a:solidFill>
+                <a:latin typeface="Red Hat Mono"/>
               </a:rPr>
               <a:t>server-&gt;Wait();                            // 11</a:t>
             </a:r>
@@ -29569,9 +29569,9 @@
             <a:r>
               <a:rPr sz="1200">
                 <a:solidFill>
-                  <a:srgbClr val="ECF0F1"/>
-                </a:solidFill>
-                <a:latin typeface="Consolas"/>
+                  <a:srgbClr val="F4F4F4"/>
+                </a:solidFill>
+                <a:latin typeface="Red Hat Mono"/>
               </a:rPr>
               <a:t>return 0;  // reverse-order teardown       // 12</a:t>
             </a:r>
@@ -29619,7 +29619,7 @@
             <a:avLst/>
           </a:prstGeom>
           <a:solidFill>
-            <a:srgbClr val="1E6FC8"/>
+            <a:srgbClr val="EE0000"/>
           </a:solidFill>
           <a:ln>
             <a:noFill/>
@@ -29675,7 +29675,7 @@
                 <a:solidFill>
                   <a:srgbClr val="FFFFFF"/>
                 </a:solidFill>
-                <a:latin typeface="Calibri"/>
+                <a:latin typeface="Red Hat Display"/>
               </a:rPr>
               <a:t>The gRPC end-to-end example</a:t>
             </a:r>
@@ -29699,7 +29699,7 @@
             </a:avLst>
           </a:prstGeom>
           <a:solidFill>
-            <a:srgbClr val="1A2B3C"/>
+            <a:srgbClr val="151515"/>
           </a:solidFill>
           <a:ln>
             <a:noFill/>
@@ -29755,7 +29755,7 @@
                 <a:solidFill>
                   <a:srgbClr val="FFFFFF"/>
                 </a:solidFill>
-                <a:latin typeface="Calibri"/>
+                <a:latin typeface="Red Hat Display"/>
               </a:rPr>
               <a:t>§10</a:t>
             </a:r>
@@ -29788,11 +29788,11 @@
             <a:r>
               <a:rPr sz="1100" b="0" i="0">
                 <a:solidFill>
-                  <a:srgbClr val="90A4AE"/>
-                </a:solidFill>
-                <a:latin typeface="Calibri"/>
-              </a:rPr>
-              <a:t>Optimizing Modern C++ with Containers   |   The gRPC end-to-end example</a:t>
+                  <a:srgbClr val="8A8A8A"/>
+                </a:solidFill>
+                <a:latin typeface="Red Hat Text"/>
+              </a:rPr>
+              <a:t>Stateless C++ Services   |   The gRPC end-to-end example</a:t>
             </a:r>
           </a:p>
         </p:txBody>
@@ -29823,9 +29823,9 @@
             <a:r>
               <a:rPr sz="1100" b="0" i="0">
                 <a:solidFill>
-                  <a:srgbClr val="90A4AE"/>
-                </a:solidFill>
-                <a:latin typeface="Calibri"/>
+                  <a:srgbClr val="8A8A8A"/>
+                </a:solidFill>
+                <a:latin typeface="Red Hat Text"/>
               </a:rPr>
               <a:t>59 / 67</a:t>
             </a:r>
@@ -29858,9 +29858,9 @@
             <a:r>
               <a:rPr sz="2800" b="1" i="0">
                 <a:solidFill>
-                  <a:srgbClr val="1A2B3C"/>
-                </a:solidFill>
-                <a:latin typeface="Calibri"/>
+                  <a:srgbClr val="151515"/>
+                </a:solidFill>
+                <a:latin typeface="Red Hat Display"/>
               </a:rPr>
               <a:t>Error translation at the boundary</a:t>
             </a:r>
@@ -29899,7 +29899,7 @@
                 <a:solidFill>
                   <a:srgbClr val="F5A623"/>
                 </a:solidFill>
-                <a:latin typeface="Calibri"/>
+                <a:latin typeface="Red Hat Text"/>
               </a:rPr>
               <a:t>Helpers throw; the handler translates</a:t>
             </a:r>
@@ -29915,7 +29915,7 @@
                 <a:solidFill>
                   <a:srgbClr val="1A2B3C"/>
                 </a:solidFill>
-                <a:latin typeface="Calibri"/>
+                <a:latin typeface="Red Hat Text"/>
               </a:rPr>
               <a:t>•  Helpers throw grpc::Status for protocol errors (deadline, unavailable, not-found)</a:t>
             </a:r>
@@ -29931,7 +29931,7 @@
                 <a:solidFill>
                   <a:srgbClr val="1A2B3C"/>
                 </a:solidFill>
-                <a:latin typeface="Calibri"/>
+                <a:latin typeface="Red Hat Text"/>
               </a:rPr>
               <a:t>•  Helpers throw std::exception for bugs</a:t>
             </a:r>
@@ -29947,7 +29947,7 @@
                 <a:solidFill>
                   <a:srgbClr val="1A2B3C"/>
                 </a:solidFill>
-                <a:latin typeface="Calibri"/>
+                <a:latin typeface="Red Hat Text"/>
               </a:rPr>
               <a:t>•  The handler's single try/catch maps both to the wire status</a:t>
             </a:r>
@@ -29963,7 +29963,7 @@
                 <a:solidFill>
                   <a:srgbClr val="1A2B3C"/>
                 </a:solidFill>
-                <a:latin typeface="Calibri"/>
+                <a:latin typeface="Red Hat Text"/>
               </a:rPr>
               <a:t>•  RAII runs all cleanup regardless of which exception propagates</a:t>
             </a:r>
@@ -30011,7 +30011,7 @@
             <a:avLst/>
           </a:prstGeom>
           <a:solidFill>
-            <a:srgbClr val="1E6FC8"/>
+            <a:srgbClr val="EE0000"/>
           </a:solidFill>
           <a:ln>
             <a:noFill/>
@@ -30067,7 +30067,7 @@
                 <a:solidFill>
                   <a:srgbClr val="FFFFFF"/>
                 </a:solidFill>
-                <a:latin typeface="Calibri"/>
+                <a:latin typeface="Red Hat Display"/>
               </a:rPr>
               <a:t>Statelessness as deployment posture</a:t>
             </a:r>
@@ -30091,7 +30091,7 @@
             </a:avLst>
           </a:prstGeom>
           <a:solidFill>
-            <a:srgbClr val="1A2B3C"/>
+            <a:srgbClr val="151515"/>
           </a:solidFill>
           <a:ln>
             <a:noFill/>
@@ -30147,7 +30147,7 @@
                 <a:solidFill>
                   <a:srgbClr val="FFFFFF"/>
                 </a:solidFill>
-                <a:latin typeface="Calibri"/>
+                <a:latin typeface="Red Hat Display"/>
               </a:rPr>
               <a:t>§1</a:t>
             </a:r>
@@ -30180,11 +30180,11 @@
             <a:r>
               <a:rPr sz="1100" b="0" i="0">
                 <a:solidFill>
-                  <a:srgbClr val="90A4AE"/>
-                </a:solidFill>
-                <a:latin typeface="Calibri"/>
-              </a:rPr>
-              <a:t>Optimizing Modern C++ with Containers   |   Statelessness as deployment posture</a:t>
+                  <a:srgbClr val="8A8A8A"/>
+                </a:solidFill>
+                <a:latin typeface="Red Hat Text"/>
+              </a:rPr>
+              <a:t>Stateless C++ Services   |   Statelessness as deployment posture</a:t>
             </a:r>
           </a:p>
         </p:txBody>
@@ -30215,9 +30215,9 @@
             <a:r>
               <a:rPr sz="1100" b="0" i="0">
                 <a:solidFill>
-                  <a:srgbClr val="90A4AE"/>
-                </a:solidFill>
-                <a:latin typeface="Calibri"/>
+                  <a:srgbClr val="8A8A8A"/>
+                </a:solidFill>
+                <a:latin typeface="Red Hat Text"/>
               </a:rPr>
               <a:t>6 / 67</a:t>
             </a:r>
@@ -30250,9 +30250,9 @@
             <a:r>
               <a:rPr sz="2800" b="1" i="0">
                 <a:solidFill>
-                  <a:srgbClr val="1A2B3C"/>
-                </a:solidFill>
-                <a:latin typeface="Calibri"/>
+                  <a:srgbClr val="151515"/>
+                </a:solidFill>
+                <a:latin typeface="Red Hat Display"/>
               </a:rPr>
               <a:t>Six monolith intuitions that mislead</a:t>
             </a:r>
@@ -30291,7 +30291,7 @@
                 <a:solidFill>
                   <a:srgbClr val="E84855"/>
                 </a:solidFill>
-                <a:latin typeface="Calibri"/>
+                <a:latin typeface="Red Hat Text"/>
               </a:rPr>
               <a:t>What bare-metal habits get wrong under containers</a:t>
             </a:r>
@@ -30307,7 +30307,7 @@
                 <a:solidFill>
                   <a:srgbClr val="1A2B3C"/>
                 </a:solidFill>
-                <a:latin typeface="Calibri"/>
+                <a:latin typeface="Red Hat Text"/>
               </a:rPr>
               <a:t>•  "The box has N cores" — the cgroup quota does not equal nproc</a:t>
             </a:r>
@@ -30323,7 +30323,7 @@
                 <a:solidFill>
                   <a:srgbClr val="1A2B3C"/>
                 </a:solidFill>
-                <a:latin typeface="Calibri"/>
+                <a:latin typeface="Red Hat Text"/>
               </a:rPr>
               <a:t>•  "Memory is the machine's RAM" — memory.max is the real ceiling</a:t>
             </a:r>
@@ -30339,7 +30339,7 @@
                 <a:solidFill>
                   <a:srgbClr val="1A2B3C"/>
                 </a:solidFill>
-                <a:latin typeface="Calibri"/>
+                <a:latin typeface="Red Hat Text"/>
               </a:rPr>
               <a:t>•  "The filesystem persists" — the rootfs is ephemeral (ephemeral filesystem)</a:t>
             </a:r>
@@ -30355,7 +30355,7 @@
                 <a:solidFill>
                   <a:srgbClr val="1A2B3C"/>
                 </a:solidFill>
-                <a:latin typeface="Calibri"/>
+                <a:latin typeface="Red Hat Text"/>
               </a:rPr>
               <a:t>•  "My thread pool should match the CPU count" — it should match the cgroup (threading)</a:t>
             </a:r>
@@ -30371,7 +30371,7 @@
                 <a:solidFill>
                   <a:srgbClr val="1A2B3C"/>
                 </a:solidFill>
-                <a:latin typeface="Calibri"/>
+                <a:latin typeface="Red Hat Text"/>
               </a:rPr>
               <a:t>•  "Local cache is free" — it desyncs across replicas (state externalization)</a:t>
             </a:r>
@@ -30387,7 +30387,7 @@
                 <a:solidFill>
                   <a:srgbClr val="1A2B3C"/>
                 </a:solidFill>
-                <a:latin typeface="Calibri"/>
+                <a:latin typeface="Red Hat Text"/>
               </a:rPr>
               <a:t>•  "Restart is exceptional" — under orchestration it's routine (health &amp; shutdown)</a:t>
             </a:r>
@@ -30408,7 +30408,7 @@
     <p:bg>
       <p:bgPr>
         <a:solidFill>
-          <a:srgbClr val="0A1628"/>
+          <a:srgbClr val="AB0000"/>
         </a:solidFill>
         <a:effectLst/>
       </p:bgPr>
@@ -30437,7 +30437,7 @@
             </a:avLst>
           </a:prstGeom>
           <a:solidFill>
-            <a:srgbClr val="27AE60"/>
+            <a:srgbClr val="FFA000"/>
           </a:solidFill>
           <a:ln>
             <a:noFill/>
@@ -30493,7 +30493,7 @@
                 <a:solidFill>
                   <a:srgbClr val="FFFFFF"/>
                 </a:solidFill>
-                <a:latin typeface="Calibri"/>
+                <a:latin typeface="Red Hat Display"/>
               </a:rPr>
               <a:t>▶ DEMO 10</a:t>
             </a:r>
@@ -30528,7 +30528,7 @@
                 <a:solidFill>
                   <a:srgbClr val="FFFFFF"/>
                 </a:solidFill>
-                <a:latin typeface="Calibri"/>
+                <a:latin typeface="Red Hat Display"/>
               </a:rPr>
               <a:t>Demo — gRPC end-to-end example</a:t>
             </a:r>
@@ -30561,9 +30561,9 @@
             <a:r>
               <a:rPr sz="2000" b="0" i="0">
                 <a:solidFill>
-                  <a:srgbClr val="ECF0F1"/>
-                </a:solidFill>
-                <a:latin typeface="Calibri"/>
+                  <a:srgbClr val="F4F4F4"/>
+                </a:solidFill>
+                <a:latin typeface="Red Hat Text"/>
               </a:rPr>
               <a:t>An order-pricing service composing every prior pattern, calling a tax service over gRPC. Three acts: a taxable order, a tax-exempt short-circuit, and an idempotent replay returning the identical order id.</a:t>
             </a:r>
@@ -30585,7 +30585,7 @@
             <a:avLst/>
           </a:prstGeom>
           <a:solidFill>
-            <a:srgbClr val="0D2137"/>
+            <a:srgbClr val="151515"/>
           </a:solidFill>
           <a:ln>
             <a:noFill/>
@@ -30639,9 +30639,9 @@
             <a:r>
               <a:rPr sz="1800" b="0" i="0">
                 <a:solidFill>
-                  <a:srgbClr val="00BCD4"/>
-                </a:solidFill>
-                <a:latin typeface="Consolas"/>
+                  <a:srgbClr val="EE0000"/>
+                </a:solidFill>
+                <a:latin typeface="Red Hat Mono"/>
               </a:rPr>
               <a:t>$ cd examples/statelessness/10-grpc-microservices &amp;&amp; ./demo.sh</a:t>
             </a:r>
@@ -30674,9 +30674,9 @@
             <a:r>
               <a:rPr sz="1100" b="0" i="0">
                 <a:solidFill>
-                  <a:srgbClr val="90A4AE"/>
-                </a:solidFill>
-                <a:latin typeface="Consolas"/>
+                  <a:srgbClr val="8A8A8A"/>
+                </a:solidFill>
+                <a:latin typeface="Red Hat Mono"/>
               </a:rPr>
               <a:t>  source on site: patterncatalyst.github.io/cpp-statelessness/examples/statelessness-10-grpc-microservices/</a:t>
             </a:r>
@@ -30709,9 +30709,9 @@
             <a:r>
               <a:rPr sz="1100" b="0" i="0">
                 <a:solidFill>
-                  <a:srgbClr val="90A4AE"/>
-                </a:solidFill>
-                <a:latin typeface="Calibri"/>
+                  <a:srgbClr val="8A8A8A"/>
+                </a:solidFill>
+                <a:latin typeface="Red Hat Text"/>
               </a:rPr>
               <a:t>60 / 67</a:t>
             </a:r>
@@ -30732,7 +30732,7 @@
     <p:bg>
       <p:bgPr>
         <a:solidFill>
-          <a:srgbClr val="0A1628"/>
+          <a:srgbClr val="AB0000"/>
         </a:solidFill>
         <a:effectLst/>
       </p:bgPr>
@@ -30770,9 +30770,9 @@
             <a:r>
               <a:rPr sz="18000" b="1" i="0">
                 <a:solidFill>
-                  <a:srgbClr val="00BCD4"/>
-                </a:solidFill>
-                <a:latin typeface="Calibri"/>
+                  <a:srgbClr val="EE0000"/>
+                </a:solidFill>
+                <a:latin typeface="Red Hat Display"/>
               </a:rPr>
               <a:t>§11</a:t>
             </a:r>
@@ -30807,7 +30807,7 @@
                 <a:solidFill>
                   <a:srgbClr val="FFFFFF"/>
                 </a:solidFill>
-                <a:latin typeface="Calibri"/>
+                <a:latin typeface="Red Hat Display"/>
               </a:rPr>
               <a:t>Build tooling &amp; vendored helpers</a:t>
             </a:r>
@@ -30840,9 +30840,9 @@
             <a:r>
               <a:rPr sz="2000" b="0" i="1">
                 <a:solidFill>
-                  <a:srgbClr val="90A4AE"/>
-                </a:solidFill>
-                <a:latin typeface="Calibri"/>
+                  <a:srgbClr val="8A8A8A"/>
+                </a:solidFill>
+                <a:latin typeface="Red Hat Text"/>
               </a:rPr>
               <a:t>Conan, CMake, the toolchain — and the helpers made runnable.</a:t>
             </a:r>
@@ -30875,9 +30875,9 @@
             <a:r>
               <a:rPr sz="1100" b="0" i="0">
                 <a:solidFill>
-                  <a:srgbClr val="90A4AE"/>
-                </a:solidFill>
-                <a:latin typeface="Calibri"/>
+                  <a:srgbClr val="8A8A8A"/>
+                </a:solidFill>
+                <a:latin typeface="Red Hat Text"/>
               </a:rPr>
               <a:t>61 / 67</a:t>
             </a:r>
@@ -30925,7 +30925,7 @@
             <a:avLst/>
           </a:prstGeom>
           <a:solidFill>
-            <a:srgbClr val="1E6FC8"/>
+            <a:srgbClr val="EE0000"/>
           </a:solidFill>
           <a:ln>
             <a:noFill/>
@@ -30981,7 +30981,7 @@
                 <a:solidFill>
                   <a:srgbClr val="FFFFFF"/>
                 </a:solidFill>
-                <a:latin typeface="Calibri"/>
+                <a:latin typeface="Red Hat Display"/>
               </a:rPr>
               <a:t>Build tooling &amp; vendored helpers</a:t>
             </a:r>
@@ -31005,7 +31005,7 @@
             </a:avLst>
           </a:prstGeom>
           <a:solidFill>
-            <a:srgbClr val="1A2B3C"/>
+            <a:srgbClr val="151515"/>
           </a:solidFill>
           <a:ln>
             <a:noFill/>
@@ -31061,7 +31061,7 @@
                 <a:solidFill>
                   <a:srgbClr val="FFFFFF"/>
                 </a:solidFill>
-                <a:latin typeface="Calibri"/>
+                <a:latin typeface="Red Hat Display"/>
               </a:rPr>
               <a:t>§11</a:t>
             </a:r>
@@ -31094,11 +31094,11 @@
             <a:r>
               <a:rPr sz="1100" b="0" i="0">
                 <a:solidFill>
-                  <a:srgbClr val="90A4AE"/>
-                </a:solidFill>
-                <a:latin typeface="Calibri"/>
-              </a:rPr>
-              <a:t>Optimizing Modern C++ with Containers   |   Build tooling &amp; vendored helpers</a:t>
+                  <a:srgbClr val="8A8A8A"/>
+                </a:solidFill>
+                <a:latin typeface="Red Hat Text"/>
+              </a:rPr>
+              <a:t>Stateless C++ Services   |   Build tooling &amp; vendored helpers</a:t>
             </a:r>
           </a:p>
         </p:txBody>
@@ -31129,9 +31129,9 @@
             <a:r>
               <a:rPr sz="1100" b="0" i="0">
                 <a:solidFill>
-                  <a:srgbClr val="90A4AE"/>
-                </a:solidFill>
-                <a:latin typeface="Calibri"/>
+                  <a:srgbClr val="8A8A8A"/>
+                </a:solidFill>
+                <a:latin typeface="Red Hat Text"/>
               </a:rPr>
               <a:t>62 / 67</a:t>
             </a:r>
@@ -31164,9 +31164,9 @@
             <a:r>
               <a:rPr sz="2800" b="1" i="0">
                 <a:solidFill>
-                  <a:srgbClr val="1A2B3C"/>
-                </a:solidFill>
-                <a:latin typeface="Calibri"/>
+                  <a:srgbClr val="151515"/>
+                </a:solidFill>
+                <a:latin typeface="Red Hat Display"/>
               </a:rPr>
               <a:t>The build stack</a:t>
             </a:r>
@@ -31205,7 +31205,7 @@
                 <a:solidFill>
                   <a:srgbClr val="1E6FC8"/>
                 </a:solidFill>
-                <a:latin typeface="Calibri"/>
+                <a:latin typeface="Red Hat Text"/>
               </a:rPr>
               <a:t>Hermetic, pinned, reproducible</a:t>
             </a:r>
@@ -31221,7 +31221,7 @@
                 <a:solidFill>
                   <a:srgbClr val="1A2B3C"/>
                 </a:solidFill>
-                <a:latin typeface="Calibri"/>
+                <a:latin typeface="Red Hat Text"/>
               </a:rPr>
               <a:t>•  Conan 2.x — explicit version pins, dev + release profiles, a lockfile</a:t>
             </a:r>
@@ -31237,7 +31237,7 @@
                 <a:solidFill>
                   <a:srgbClr val="1A2B3C"/>
                 </a:solidFill>
-                <a:latin typeface="Calibri"/>
+                <a:latin typeface="Red Hat Text"/>
               </a:rPr>
               <a:t>•  CMake 3.27+ with Ninja; Conan-generated presets wire the toolchain</a:t>
             </a:r>
@@ -31253,7 +31253,7 @@
                 <a:solidFill>
                   <a:srgbClr val="1A2B3C"/>
                 </a:solidFill>
-                <a:latin typeface="Calibri"/>
+                <a:latin typeface="Red Hat Text"/>
               </a:rPr>
               <a:t>•  GCC 14 / libstdc++ for C++23 breadth (Clang 18 + libc++ equivalent)</a:t>
             </a:r>
@@ -31269,7 +31269,7 @@
                 <a:solidFill>
                   <a:srgbClr val="1A2B3C"/>
                 </a:solidFill>
-                <a:latin typeface="Calibri"/>
+                <a:latin typeface="Red Hat Text"/>
               </a:rPr>
               <a:t>•  Multi-stage Containerfile: full toolchain builder, minimal runtime</a:t>
             </a:r>
@@ -31285,7 +31285,7 @@
                 <a:solidFill>
                   <a:srgbClr val="1A2B3C"/>
                 </a:solidFill>
-                <a:latin typeface="Calibri"/>
+                <a:latin typeface="Red Hat Text"/>
               </a:rPr>
               <a:t>•  Dev profile wires AddressSanitizer — catches the PMR arena trap early</a:t>
             </a:r>
@@ -31357,7 +31357,7 @@
             <a:avLst/>
           </a:prstGeom>
           <a:solidFill>
-            <a:srgbClr val="1E6FC8"/>
+            <a:srgbClr val="EE0000"/>
           </a:solidFill>
           <a:ln>
             <a:noFill/>
@@ -31413,7 +31413,7 @@
                 <a:solidFill>
                   <a:srgbClr val="FFFFFF"/>
                 </a:solidFill>
-                <a:latin typeface="Calibri"/>
+                <a:latin typeface="Red Hat Display"/>
               </a:rPr>
               <a:t>Build tooling &amp; vendored helpers</a:t>
             </a:r>
@@ -31437,7 +31437,7 @@
             </a:avLst>
           </a:prstGeom>
           <a:solidFill>
-            <a:srgbClr val="1A2B3C"/>
+            <a:srgbClr val="151515"/>
           </a:solidFill>
           <a:ln>
             <a:noFill/>
@@ -31493,7 +31493,7 @@
                 <a:solidFill>
                   <a:srgbClr val="FFFFFF"/>
                 </a:solidFill>
-                <a:latin typeface="Calibri"/>
+                <a:latin typeface="Red Hat Display"/>
               </a:rPr>
               <a:t>§11</a:t>
             </a:r>
@@ -31526,11 +31526,11 @@
             <a:r>
               <a:rPr sz="1100" b="0" i="0">
                 <a:solidFill>
-                  <a:srgbClr val="90A4AE"/>
-                </a:solidFill>
-                <a:latin typeface="Calibri"/>
-              </a:rPr>
-              <a:t>Optimizing Modern C++ with Containers   |   Build tooling &amp; vendored helpers</a:t>
+                  <a:srgbClr val="8A8A8A"/>
+                </a:solidFill>
+                <a:latin typeface="Red Hat Text"/>
+              </a:rPr>
+              <a:t>Stateless C++ Services   |   Build tooling &amp; vendored helpers</a:t>
             </a:r>
           </a:p>
         </p:txBody>
@@ -31561,9 +31561,9 @@
             <a:r>
               <a:rPr sz="1100" b="0" i="0">
                 <a:solidFill>
-                  <a:srgbClr val="90A4AE"/>
-                </a:solidFill>
-                <a:latin typeface="Calibri"/>
+                  <a:srgbClr val="8A8A8A"/>
+                </a:solidFill>
+                <a:latin typeface="Red Hat Text"/>
               </a:rPr>
               <a:t>63 / 67</a:t>
             </a:r>
@@ -31596,9 +31596,9 @@
             <a:r>
               <a:rPr sz="2800" b="1" i="0">
                 <a:solidFill>
-                  <a:srgbClr val="1A2B3C"/>
-                </a:solidFill>
-                <a:latin typeface="Calibri"/>
+                  <a:srgbClr val="151515"/>
+                </a:solidFill>
+                <a:latin typeface="Red Hat Display"/>
               </a:rPr>
               <a:t>The cgroup helper, in one line</a:t>
             </a:r>
@@ -31637,7 +31637,7 @@
                 <a:solidFill>
                   <a:srgbClr val="E84855"/>
                 </a:solidFill>
-                <a:latin typeface="Calibri"/>
+                <a:latin typeface="Red Hat Text"/>
               </a:rPr>
               <a:t>Why the vendored helper exists</a:t>
             </a:r>
@@ -31653,7 +31653,7 @@
                 <a:solidFill>
                   <a:srgbClr val="1A2B3C"/>
                 </a:solidFill>
-                <a:latin typeface="Calibri"/>
+                <a:latin typeface="Red Hat Text"/>
               </a:rPr>
               <a:t>•  hardware_concurrency() reports host cores — wrong under a cgroup</a:t>
             </a:r>
@@ -31669,7 +31669,7 @@
                 <a:solidFill>
                   <a:srgbClr val="1A2B3C"/>
                 </a:solidFill>
-                <a:latin typeface="Calibri"/>
+                <a:latin typeface="Red Hat Text"/>
               </a:rPr>
               <a:t>•  cpu_limit_cores() reads cgroup v2 cpu.max → the real budget</a:t>
             </a:r>
@@ -31685,7 +31685,7 @@
                 <a:solidFill>
                   <a:srgbClr val="1A2B3C"/>
                 </a:solidFill>
-                <a:latin typeface="Calibri"/>
+                <a:latin typeface="Red Hat Text"/>
               </a:rPr>
               <a:t>•  Under --cpus=0.5: helper reads 0.5 while hardware_concurrency() still says 22</a:t>
             </a:r>
@@ -31701,7 +31701,7 @@
                 <a:solidFill>
                   <a:srgbClr val="1A2B3C"/>
                 </a:solidFill>
-                <a:latin typeface="Calibri"/>
+                <a:latin typeface="Red Hat Text"/>
               </a:rPr>
               <a:t>•  That gap is the whole reason to read the cgroup — and Demo 11 makes it visible</a:t>
             </a:r>
@@ -31749,7 +31749,7 @@
             <a:avLst/>
           </a:prstGeom>
           <a:solidFill>
-            <a:srgbClr val="1E6FC8"/>
+            <a:srgbClr val="EE0000"/>
           </a:solidFill>
           <a:ln>
             <a:noFill/>
@@ -31805,7 +31805,7 @@
                 <a:solidFill>
                   <a:srgbClr val="FFFFFF"/>
                 </a:solidFill>
-                <a:latin typeface="Calibri"/>
+                <a:latin typeface="Red Hat Display"/>
               </a:rPr>
               <a:t>Build tooling &amp; vendored helpers</a:t>
             </a:r>
@@ -31829,7 +31829,7 @@
             </a:avLst>
           </a:prstGeom>
           <a:solidFill>
-            <a:srgbClr val="1A2B3C"/>
+            <a:srgbClr val="151515"/>
           </a:solidFill>
           <a:ln>
             <a:noFill/>
@@ -31885,7 +31885,7 @@
                 <a:solidFill>
                   <a:srgbClr val="FFFFFF"/>
                 </a:solidFill>
-                <a:latin typeface="Calibri"/>
+                <a:latin typeface="Red Hat Display"/>
               </a:rPr>
               <a:t>§11</a:t>
             </a:r>
@@ -31918,11 +31918,11 @@
             <a:r>
               <a:rPr sz="1100" b="0" i="0">
                 <a:solidFill>
-                  <a:srgbClr val="90A4AE"/>
-                </a:solidFill>
-                <a:latin typeface="Calibri"/>
-              </a:rPr>
-              <a:t>Optimizing Modern C++ with Containers   |   Build tooling &amp; vendored helpers</a:t>
+                  <a:srgbClr val="8A8A8A"/>
+                </a:solidFill>
+                <a:latin typeface="Red Hat Text"/>
+              </a:rPr>
+              <a:t>Stateless C++ Services   |   Build tooling &amp; vendored helpers</a:t>
             </a:r>
           </a:p>
         </p:txBody>
@@ -31953,9 +31953,9 @@
             <a:r>
               <a:rPr sz="1100" b="0" i="0">
                 <a:solidFill>
-                  <a:srgbClr val="90A4AE"/>
-                </a:solidFill>
-                <a:latin typeface="Calibri"/>
+                  <a:srgbClr val="8A8A8A"/>
+                </a:solidFill>
+                <a:latin typeface="Red Hat Text"/>
               </a:rPr>
               <a:t>64 / 67</a:t>
             </a:r>
@@ -31988,9 +31988,9 @@
             <a:r>
               <a:rPr sz="2800" b="1" i="0">
                 <a:solidFill>
-                  <a:srgbClr val="1A2B3C"/>
-                </a:solidFill>
-                <a:latin typeface="Calibri"/>
+                  <a:srgbClr val="151515"/>
+                </a:solidFill>
+                <a:latin typeface="Red Hat Display"/>
               </a:rPr>
               <a:t>C++23 feature support is a version question</a:t>
             </a:r>
@@ -32029,7 +32029,7 @@
                 <a:solidFill>
                   <a:srgbClr val="1E6FC8"/>
                 </a:solidFill>
-                <a:latin typeface="Calibri"/>
+                <a:latin typeface="Red Hat Text"/>
               </a:rPr>
               <a:t>The toolchain decides what you can use</a:t>
             </a:r>
@@ -32045,7 +32045,7 @@
                 <a:solidFill>
                   <a:srgbClr val="1A2B3C"/>
                 </a:solidFill>
-                <a:latin typeface="Calibri"/>
+                <a:latin typeface="Red Hat Text"/>
               </a:rPr>
               <a:t>•  std::expected — GCC 12+, Clang 16+</a:t>
             </a:r>
@@ -32061,7 +32061,7 @@
                 <a:solidFill>
                   <a:srgbClr val="1A2B3C"/>
                 </a:solidFill>
-                <a:latin typeface="Calibri"/>
+                <a:latin typeface="Red Hat Text"/>
               </a:rPr>
               <a:t>•  &lt;stacktrace&gt; — GCC 14+ (link libstdc++_libbacktrace), Clang 18+</a:t>
             </a:r>
@@ -32077,7 +32077,7 @@
                 <a:solidFill>
                   <a:srgbClr val="1A2B3C"/>
                 </a:solidFill>
-                <a:latin typeface="Calibri"/>
+                <a:latin typeface="Red Hat Text"/>
               </a:rPr>
               <a:t>•  std::flat_map / flat_set — GCC 15+; not in libc++ yet (use absl::btree_map)</a:t>
             </a:r>
@@ -32093,7 +32093,7 @@
                 <a:solidFill>
                   <a:srgbClr val="1A2B3C"/>
                 </a:solidFill>
-                <a:latin typeface="Calibri"/>
+                <a:latin typeface="Red Hat Text"/>
               </a:rPr>
               <a:t>•  std::print / println — GCC 14+, Clang 18+ (partial)</a:t>
             </a:r>
@@ -32109,7 +32109,7 @@
                 <a:solidFill>
                   <a:srgbClr val="90A4AE"/>
                 </a:solidFill>
-                <a:latin typeface="Calibri"/>
+                <a:latin typeface="Red Hat Text"/>
               </a:rPr>
               <a:t>GCC 14 + libstdc++ on glibc 2.35+ is the recommended 2026 baseline.</a:t>
             </a:r>
@@ -32157,7 +32157,7 @@
             <a:avLst/>
           </a:prstGeom>
           <a:solidFill>
-            <a:srgbClr val="1E6FC8"/>
+            <a:srgbClr val="EE0000"/>
           </a:solidFill>
           <a:ln>
             <a:noFill/>
@@ -32213,7 +32213,7 @@
                 <a:solidFill>
                   <a:srgbClr val="FFFFFF"/>
                 </a:solidFill>
-                <a:latin typeface="Calibri"/>
+                <a:latin typeface="Red Hat Display"/>
               </a:rPr>
               <a:t>Build tooling &amp; vendored helpers</a:t>
             </a:r>
@@ -32237,7 +32237,7 @@
             </a:avLst>
           </a:prstGeom>
           <a:solidFill>
-            <a:srgbClr val="1A2B3C"/>
+            <a:srgbClr val="151515"/>
           </a:solidFill>
           <a:ln>
             <a:noFill/>
@@ -32293,7 +32293,7 @@
                 <a:solidFill>
                   <a:srgbClr val="FFFFFF"/>
                 </a:solidFill>
-                <a:latin typeface="Calibri"/>
+                <a:latin typeface="Red Hat Display"/>
               </a:rPr>
               <a:t>§11</a:t>
             </a:r>
@@ -32326,11 +32326,11 @@
             <a:r>
               <a:rPr sz="1100" b="0" i="0">
                 <a:solidFill>
-                  <a:srgbClr val="90A4AE"/>
-                </a:solidFill>
-                <a:latin typeface="Calibri"/>
-              </a:rPr>
-              <a:t>Optimizing Modern C++ with Containers   |   Build tooling &amp; vendored helpers</a:t>
+                  <a:srgbClr val="8A8A8A"/>
+                </a:solidFill>
+                <a:latin typeface="Red Hat Text"/>
+              </a:rPr>
+              <a:t>Stateless C++ Services   |   Build tooling &amp; vendored helpers</a:t>
             </a:r>
           </a:p>
         </p:txBody>
@@ -32361,9 +32361,9 @@
             <a:r>
               <a:rPr sz="1100" b="0" i="0">
                 <a:solidFill>
-                  <a:srgbClr val="90A4AE"/>
-                </a:solidFill>
-                <a:latin typeface="Calibri"/>
+                  <a:srgbClr val="8A8A8A"/>
+                </a:solidFill>
+                <a:latin typeface="Red Hat Text"/>
               </a:rPr>
               <a:t>65 / 67</a:t>
             </a:r>
@@ -32396,9 +32396,9 @@
             <a:r>
               <a:rPr sz="2800" b="1" i="0">
                 <a:solidFill>
-                  <a:srgbClr val="1A2B3C"/>
-                </a:solidFill>
-                <a:latin typeface="Calibri"/>
+                  <a:srgbClr val="151515"/>
+                </a:solidFill>
+                <a:latin typeface="Red Hat Display"/>
               </a:rPr>
               <a:t>Build-tooling gotchas worth memorizing</a:t>
             </a:r>
@@ -32437,7 +32437,7 @@
                 <a:solidFill>
                   <a:srgbClr val="E84855"/>
                 </a:solidFill>
-                <a:latin typeface="Calibri"/>
+                <a:latin typeface="Red Hat Text"/>
               </a:rPr>
               <a:t>The traps that cost an afternoon</a:t>
             </a:r>
@@ -32453,7 +32453,7 @@
                 <a:solidFill>
                   <a:srgbClr val="1A2B3C"/>
                 </a:solidFill>
-                <a:latin typeface="Calibri"/>
+                <a:latin typeface="Red Hat Text"/>
               </a:rPr>
               <a:t>•  protobuf and gRPC versions MUST match across Conan deps → else duplicate symbols</a:t>
             </a:r>
@@ -32469,7 +32469,7 @@
                 <a:solidFill>
                   <a:srgbClr val="1A2B3C"/>
                 </a:solidFill>
-                <a:latin typeface="Calibri"/>
+                <a:latin typeface="Red Hat Text"/>
               </a:rPr>
               <a:t>•  Always compiler.libcxx=libstdc++11 (the post-GCC-5 ABI); mixing crashes</a:t>
             </a:r>
@@ -32485,7 +32485,7 @@
                 <a:solidFill>
                   <a:srgbClr val="1A2B3C"/>
                 </a:solidFill>
-                <a:latin typeface="Calibri"/>
+                <a:latin typeface="Red Hat Text"/>
               </a:rPr>
               <a:t>•  Run CMake via the Conan preset/toolchain or find_package can't see deps</a:t>
             </a:r>
@@ -32501,7 +32501,7 @@
                 <a:solidFill>
                   <a:srgbClr val="1A2B3C"/>
                 </a:solidFill>
-                <a:latin typeface="Calibri"/>
+                <a:latin typeface="Red Hat Text"/>
               </a:rPr>
               <a:t>•  libpqxx's bundled CMake breaks this toolchain → use libpq (G-67)</a:t>
             </a:r>
@@ -32522,7 +32522,7 @@
     <p:bg>
       <p:bgPr>
         <a:solidFill>
-          <a:srgbClr val="0A1628"/>
+          <a:srgbClr val="AB0000"/>
         </a:solidFill>
         <a:effectLst/>
       </p:bgPr>
@@ -32551,7 +32551,7 @@
             </a:avLst>
           </a:prstGeom>
           <a:solidFill>
-            <a:srgbClr val="27AE60"/>
+            <a:srgbClr val="FFA000"/>
           </a:solidFill>
           <a:ln>
             <a:noFill/>
@@ -32607,7 +32607,7 @@
                 <a:solidFill>
                   <a:srgbClr val="FFFFFF"/>
                 </a:solidFill>
-                <a:latin typeface="Calibri"/>
+                <a:latin typeface="Red Hat Display"/>
               </a:rPr>
               <a:t>▶ DEMO 11</a:t>
             </a:r>
@@ -32642,7 +32642,7 @@
                 <a:solidFill>
                   <a:srgbClr val="FFFFFF"/>
                 </a:solidFill>
-                <a:latin typeface="Calibri"/>
+                <a:latin typeface="Red Hat Display"/>
               </a:rPr>
               <a:t>Demo — Vendored helpers</a:t>
             </a:r>
@@ -32675,9 +32675,9 @@
             <a:r>
               <a:rPr sz="2000" b="0" i="0">
                 <a:solidFill>
-                  <a:srgbClr val="ECF0F1"/>
-                </a:solidFill>
-                <a:latin typeface="Calibri"/>
+                  <a:srgbClr val="F4F4F4"/>
+                </a:solidFill>
+                <a:latin typeface="Red Hat Text"/>
               </a:rPr>
               <a:t>cgroup_helper and psi_reader built as static libraries, unit-tested with GoogleTest over their pure parsers, and a binary swept under --cpus / --memory caps so cpu_limit_cores() is shown tracking the cgroup while hardware_concurrency() does not.</a:t>
             </a:r>
@@ -32699,7 +32699,7 @@
             <a:avLst/>
           </a:prstGeom>
           <a:solidFill>
-            <a:srgbClr val="0D2137"/>
+            <a:srgbClr val="151515"/>
           </a:solidFill>
           <a:ln>
             <a:noFill/>
@@ -32753,9 +32753,9 @@
             <a:r>
               <a:rPr sz="1800" b="0" i="0">
                 <a:solidFill>
-                  <a:srgbClr val="00BCD4"/>
-                </a:solidFill>
-                <a:latin typeface="Consolas"/>
+                  <a:srgbClr val="EE0000"/>
+                </a:solidFill>
+                <a:latin typeface="Red Hat Mono"/>
               </a:rPr>
               <a:t>$ cd examples/statelessness/11-build-tooling &amp;&amp; ./demo.sh</a:t>
             </a:r>
@@ -32788,9 +32788,9 @@
             <a:r>
               <a:rPr sz="1100" b="0" i="0">
                 <a:solidFill>
-                  <a:srgbClr val="90A4AE"/>
-                </a:solidFill>
-                <a:latin typeface="Consolas"/>
+                  <a:srgbClr val="8A8A8A"/>
+                </a:solidFill>
+                <a:latin typeface="Red Hat Mono"/>
               </a:rPr>
               <a:t>  source on site: patterncatalyst.github.io/cpp-statelessness/examples/statelessness-11-build-tooling/</a:t>
             </a:r>
@@ -32823,9 +32823,9 @@
             <a:r>
               <a:rPr sz="1100" b="0" i="0">
                 <a:solidFill>
-                  <a:srgbClr val="90A4AE"/>
-                </a:solidFill>
-                <a:latin typeface="Calibri"/>
+                  <a:srgbClr val="8A8A8A"/>
+                </a:solidFill>
+                <a:latin typeface="Red Hat Text"/>
               </a:rPr>
               <a:t>66 / 67</a:t>
             </a:r>
@@ -32846,7 +32846,7 @@
     <p:bg>
       <p:bgPr>
         <a:solidFill>
-          <a:srgbClr val="1A2B3C"/>
+          <a:srgbClr val="151515"/>
         </a:solidFill>
         <a:effectLst/>
       </p:bgPr>
@@ -32886,7 +32886,7 @@
                 <a:solidFill>
                   <a:srgbClr val="FFFFFF"/>
                 </a:solidFill>
-                <a:latin typeface="Calibri"/>
+                <a:latin typeface="Red Hat Display"/>
               </a:rPr>
               <a:t>The whole arc, runnable.</a:t>
             </a:r>
@@ -32923,9 +32923,9 @@
             <a:r>
               <a:rPr sz="1800" b="0" i="0">
                 <a:solidFill>
-                  <a:srgbClr val="ECF0F1"/>
-                </a:solidFill>
-                <a:latin typeface="Calibri"/>
+                  <a:srgbClr val="F4F4F4"/>
+                </a:solidFill>
+                <a:latin typeface="Red Hat Text"/>
               </a:rPr>
               <a:t>Statelessness is a deployment posture; the same binary earns it by where it keeps state.</a:t>
             </a:r>
@@ -32942,9 +32942,9 @@
             <a:r>
               <a:rPr sz="1800" b="0" i="0">
                 <a:solidFill>
-                  <a:srgbClr val="ECF0F1"/>
-                </a:solidFill>
-                <a:latin typeface="Calibri"/>
+                  <a:srgbClr val="F4F4F4"/>
+                </a:solidFill>
+                <a:latin typeface="Red Hat Text"/>
               </a:rPr>
               <a:t>Request scope → RAII + PMR. Process scope → owned in main(). Authoritative state → externalized.</a:t>
             </a:r>
@@ -32961,9 +32961,9 @@
             <a:r>
               <a:rPr sz="1800" b="0" i="0">
                 <a:solidFill>
-                  <a:srgbClr val="00BCD4"/>
-                </a:solidFill>
-                <a:latin typeface="Calibri"/>
+                  <a:srgbClr val="EE0000"/>
+                </a:solidFill>
+                <a:latin typeface="Red Hat Text"/>
               </a:rPr>
               <a:t>It all composes in the capstone — and examples 02–11 are host-verified on Fedora 44.</a:t>
             </a:r>
@@ -32996,9 +32996,9 @@
             <a:r>
               <a:rPr sz="1600" b="0" i="0">
                 <a:solidFill>
-                  <a:srgbClr val="90A4AE"/>
-                </a:solidFill>
-                <a:latin typeface="Calibri"/>
+                  <a:srgbClr val="8A8A8A"/>
+                </a:solidFill>
+                <a:latin typeface="Red Hat Text"/>
               </a:rPr>
               <a:t>Read the compendium  •  run the demos  •  the source is on the repo</a:t>
             </a:r>
@@ -33031,9 +33031,9 @@
             <a:r>
               <a:rPr sz="1100" b="0" i="0">
                 <a:solidFill>
-                  <a:srgbClr val="90A4AE"/>
-                </a:solidFill>
-                <a:latin typeface="Consolas"/>
+                  <a:srgbClr val="8A8A8A"/>
+                </a:solidFill>
+                <a:latin typeface="Red Hat Mono"/>
               </a:rPr>
               <a:t>github.com/patterncatalyst/cpp-statelessness</a:t>
             </a:r>
@@ -33081,7 +33081,7 @@
             <a:avLst/>
           </a:prstGeom>
           <a:solidFill>
-            <a:srgbClr val="1E6FC8"/>
+            <a:srgbClr val="EE0000"/>
           </a:solidFill>
           <a:ln>
             <a:noFill/>
@@ -33137,7 +33137,7 @@
                 <a:solidFill>
                   <a:srgbClr val="FFFFFF"/>
                 </a:solidFill>
-                <a:latin typeface="Calibri"/>
+                <a:latin typeface="Red Hat Display"/>
               </a:rPr>
               <a:t>Statelessness as deployment posture</a:t>
             </a:r>
@@ -33161,7 +33161,7 @@
             </a:avLst>
           </a:prstGeom>
           <a:solidFill>
-            <a:srgbClr val="1A2B3C"/>
+            <a:srgbClr val="151515"/>
           </a:solidFill>
           <a:ln>
             <a:noFill/>
@@ -33217,7 +33217,7 @@
                 <a:solidFill>
                   <a:srgbClr val="FFFFFF"/>
                 </a:solidFill>
-                <a:latin typeface="Calibri"/>
+                <a:latin typeface="Red Hat Display"/>
               </a:rPr>
               <a:t>§1</a:t>
             </a:r>
@@ -33250,11 +33250,11 @@
             <a:r>
               <a:rPr sz="1100" b="0" i="0">
                 <a:solidFill>
-                  <a:srgbClr val="90A4AE"/>
-                </a:solidFill>
-                <a:latin typeface="Calibri"/>
-              </a:rPr>
-              <a:t>Optimizing Modern C++ with Containers   |   Statelessness as deployment posture</a:t>
+                  <a:srgbClr val="8A8A8A"/>
+                </a:solidFill>
+                <a:latin typeface="Red Hat Text"/>
+              </a:rPr>
+              <a:t>Stateless C++ Services   |   Statelessness as deployment posture</a:t>
             </a:r>
           </a:p>
         </p:txBody>
@@ -33285,9 +33285,9 @@
             <a:r>
               <a:rPr sz="1100" b="0" i="0">
                 <a:solidFill>
-                  <a:srgbClr val="90A4AE"/>
-                </a:solidFill>
-                <a:latin typeface="Calibri"/>
+                  <a:srgbClr val="8A8A8A"/>
+                </a:solidFill>
+                <a:latin typeface="Red Hat Text"/>
               </a:rPr>
               <a:t>7 / 67</a:t>
             </a:r>
@@ -33320,9 +33320,9 @@
             <a:r>
               <a:rPr sz="2800" b="1" i="0">
                 <a:solidFill>
-                  <a:srgbClr val="1A2B3C"/>
-                </a:solidFill>
-                <a:latin typeface="Calibri"/>
+                  <a:srgbClr val="151515"/>
+                </a:solidFill>
+                <a:latin typeface="Red Hat Display"/>
               </a:rPr>
               <a:t>The State Architecture Table</a:t>
             </a:r>
@@ -33361,7 +33361,7 @@
                 <a:solidFill>
                   <a:srgbClr val="27AE60"/>
                 </a:solidFill>
-                <a:latin typeface="Calibri"/>
+                <a:latin typeface="Red Hat Text"/>
               </a:rPr>
               <a:t>Decide, per piece of state, where it lives</a:t>
             </a:r>
@@ -33377,7 +33377,7 @@
                 <a:solidFill>
                   <a:srgbClr val="1A2B3C"/>
                 </a:solidFill>
-                <a:latin typeface="Calibri"/>
+                <a:latin typeface="Red Hat Text"/>
               </a:rPr>
               <a:t>•  Session / auth context → externalized (cache tier), never in-process</a:t>
             </a:r>
@@ -33393,7 +33393,7 @@
                 <a:solidFill>
                   <a:srgbClr val="1A2B3C"/>
                 </a:solidFill>
-                <a:latin typeface="Calibri"/>
+                <a:latin typeface="Red Hat Text"/>
               </a:rPr>
               <a:t>•  Counters, sequences → the database, atomic; not a process-local int</a:t>
             </a:r>
@@ -33409,7 +33409,7 @@
                 <a:solidFill>
                   <a:srgbClr val="1A2B3C"/>
                 </a:solidFill>
-                <a:latin typeface="Calibri"/>
+                <a:latin typeface="Red Hat Text"/>
               </a:rPr>
               <a:t>•  Durable workflow → the database or a workflow engine</a:t>
             </a:r>
@@ -33425,7 +33425,7 @@
                 <a:solidFill>
                   <a:srgbClr val="1A2B3C"/>
                 </a:solidFill>
-                <a:latin typeface="Calibri"/>
+                <a:latin typeface="Red Hat Text"/>
               </a:rPr>
               <a:t>•  Connection pools, channels, parsed config → process scope, owned in main()</a:t>
             </a:r>
@@ -33441,7 +33441,7 @@
                 <a:solidFill>
                   <a:srgbClr val="1A2B3C"/>
                 </a:solidFill>
-                <a:latin typeface="Calibri"/>
+                <a:latin typeface="Red Hat Text"/>
               </a:rPr>
               <a:t>•  Per-request scratch → request scope, the PMR arena</a:t>
             </a:r>
@@ -33457,7 +33457,7 @@
                 <a:solidFill>
                   <a:srgbClr val="90A4AE"/>
                 </a:solidFill>
-                <a:latin typeface="Calibri"/>
+                <a:latin typeface="Red Hat Text"/>
               </a:rPr>
               <a:t>The table is the design exercise: enumerate every piece of state and assign it a scope.</a:t>
             </a:r>
@@ -33478,7 +33478,7 @@
     <p:bg>
       <p:bgPr>
         <a:solidFill>
-          <a:srgbClr val="0A1628"/>
+          <a:srgbClr val="AB0000"/>
         </a:solidFill>
         <a:effectLst/>
       </p:bgPr>
@@ -33516,9 +33516,9 @@
             <a:r>
               <a:rPr sz="18000" b="1" i="0">
                 <a:solidFill>
-                  <a:srgbClr val="00BCD4"/>
-                </a:solidFill>
-                <a:latin typeface="Calibri"/>
+                  <a:srgbClr val="EE0000"/>
+                </a:solidFill>
+                <a:latin typeface="Red Hat Display"/>
               </a:rPr>
               <a:t>§2</a:t>
             </a:r>
@@ -33553,7 +33553,7 @@
                 <a:solidFill>
                   <a:srgbClr val="FFFFFF"/>
                 </a:solidFill>
-                <a:latin typeface="Calibri"/>
+                <a:latin typeface="Red Hat Display"/>
               </a:rPr>
               <a:t>RAII as the foundation</a:t>
             </a:r>
@@ -33586,9 +33586,9 @@
             <a:r>
               <a:rPr sz="2000" b="0" i="1">
                 <a:solidFill>
-                  <a:srgbClr val="90A4AE"/>
-                </a:solidFill>
-                <a:latin typeface="Calibri"/>
+                  <a:srgbClr val="8A8A8A"/>
+                </a:solidFill>
+                <a:latin typeface="Red Hat Text"/>
               </a:rPr>
               <a:t>Bind resource lifetime to scope; the destructor is the contract.</a:t>
             </a:r>
@@ -33621,9 +33621,9 @@
             <a:r>
               <a:rPr sz="1100" b="0" i="0">
                 <a:solidFill>
-                  <a:srgbClr val="90A4AE"/>
-                </a:solidFill>
-                <a:latin typeface="Calibri"/>
+                  <a:srgbClr val="8A8A8A"/>
+                </a:solidFill>
+                <a:latin typeface="Red Hat Text"/>
               </a:rPr>
               <a:t>8 / 67</a:t>
             </a:r>
@@ -33671,7 +33671,7 @@
             <a:avLst/>
           </a:prstGeom>
           <a:solidFill>
-            <a:srgbClr val="1E6FC8"/>
+            <a:srgbClr val="EE0000"/>
           </a:solidFill>
           <a:ln>
             <a:noFill/>
@@ -33727,7 +33727,7 @@
                 <a:solidFill>
                   <a:srgbClr val="FFFFFF"/>
                 </a:solidFill>
-                <a:latin typeface="Calibri"/>
+                <a:latin typeface="Red Hat Display"/>
               </a:rPr>
               <a:t>RAII as the foundation</a:t>
             </a:r>
@@ -33751,7 +33751,7 @@
             </a:avLst>
           </a:prstGeom>
           <a:solidFill>
-            <a:srgbClr val="1A2B3C"/>
+            <a:srgbClr val="151515"/>
           </a:solidFill>
           <a:ln>
             <a:noFill/>
@@ -33807,7 +33807,7 @@
                 <a:solidFill>
                   <a:srgbClr val="FFFFFF"/>
                 </a:solidFill>
-                <a:latin typeface="Calibri"/>
+                <a:latin typeface="Red Hat Display"/>
               </a:rPr>
               <a:t>§2</a:t>
             </a:r>
@@ -33840,11 +33840,11 @@
             <a:r>
               <a:rPr sz="1100" b="0" i="0">
                 <a:solidFill>
-                  <a:srgbClr val="90A4AE"/>
-                </a:solidFill>
-                <a:latin typeface="Calibri"/>
-              </a:rPr>
-              <a:t>Optimizing Modern C++ with Containers   |   RAII as the foundation</a:t>
+                  <a:srgbClr val="8A8A8A"/>
+                </a:solidFill>
+                <a:latin typeface="Red Hat Text"/>
+              </a:rPr>
+              <a:t>Stateless C++ Services   |   RAII as the foundation</a:t>
             </a:r>
           </a:p>
         </p:txBody>
@@ -33875,9 +33875,9 @@
             <a:r>
               <a:rPr sz="1100" b="0" i="0">
                 <a:solidFill>
-                  <a:srgbClr val="90A4AE"/>
-                </a:solidFill>
-                <a:latin typeface="Calibri"/>
+                  <a:srgbClr val="8A8A8A"/>
+                </a:solidFill>
+                <a:latin typeface="Red Hat Text"/>
               </a:rPr>
               <a:t>9 / 67</a:t>
             </a:r>
@@ -33910,9 +33910,9 @@
             <a:r>
               <a:rPr sz="2800" b="1" i="0">
                 <a:solidFill>
-                  <a:srgbClr val="1A2B3C"/>
-                </a:solidFill>
-                <a:latin typeface="Calibri"/>
+                  <a:srgbClr val="151515"/>
+                </a:solidFill>
+                <a:latin typeface="Red Hat Display"/>
               </a:rPr>
               <a:t>The RequestContext pattern</a:t>
             </a:r>
@@ -33951,7 +33951,7 @@
                 <a:solidFill>
                   <a:srgbClr val="1E6FC8"/>
                 </a:solidFill>
-                <a:latin typeface="Calibri"/>
+                <a:latin typeface="Red Hat Text"/>
               </a:rPr>
               <a:t>One RAII type bundles per-request state</a:t>
             </a:r>
@@ -33967,7 +33967,7 @@
                 <a:solidFill>
                   <a:srgbClr val="1A2B3C"/>
                 </a:solidFill>
-                <a:latin typeface="Calibri"/>
+                <a:latin typeface="Red Hat Text"/>
               </a:rPr>
               <a:t>•  Constructed at the top of the handler; destroyed on return</a:t>
             </a:r>
@@ -33983,7 +33983,7 @@
                 <a:solidFill>
                   <a:srgbClr val="1A2B3C"/>
                 </a:solidFill>
-                <a:latin typeface="Calibri"/>
+                <a:latin typeface="Red Hat Text"/>
               </a:rPr>
               <a:t>•  Bundles the deadline, correlation id, a per-request arena, the span scope</a:t>
             </a:r>
@@ -33999,7 +33999,7 @@
                 <a:solidFill>
                   <a:srgbClr val="1A2B3C"/>
                 </a:solidFill>
-                <a:latin typeface="Calibri"/>
+                <a:latin typeface="Red Hat Text"/>
               </a:rPr>
               <a:t>•  Members destruct in reverse declaration order — cleanup ordering built in</a:t>
             </a:r>
@@ -34015,7 +34015,7 @@
                 <a:solidFill>
                   <a:srgbClr val="1A2B3C"/>
                 </a:solidFill>
-                <a:latin typeface="Calibri"/>
+                <a:latin typeface="Red Hat Text"/>
               </a:rPr>
               <a:t>•  The three exception-safety guarantees: basic, strong, nothrow</a:t>
             </a:r>
@@ -34031,7 +34031,7 @@
                 <a:solidFill>
                   <a:srgbClr val="90A4AE"/>
                 </a:solidFill>
-                <a:latin typeface="Calibri"/>
+                <a:latin typeface="Red Hat Text"/>
               </a:rPr>
               <a:t>All cleanup is RAII; the handler's try/catch is for error-to-status translation, not resource management.</a:t>
             </a:r>

--- a/presentation/cpp-statelessness-compendium.pptx
+++ b/presentation/cpp-statelessness-compendium.pptx
@@ -72,6 +72,7 @@
     <p:sldId id="320" r:id="rId72"/>
     <p:sldId id="321" r:id="rId73"/>
     <p:sldId id="322" r:id="rId74"/>
+    <p:sldId id="323" r:id="rId75"/>
   </p:sldIdLst>
   <p:sldSz cx="12191695" cy="6858000" type="screen4x3"/>
   <p:notesSz cx="6858000" cy="9144000"/>
@@ -33040,6 +33041,428 @@
           </a:p>
         </p:txBody>
       </p:sp>
+    </p:spTree>
+  </p:cSld>
+  <p:clrMapOvr>
+    <a:masterClrMapping/>
+  </p:clrMapOvr>
+</p:sld>
+</file>
+
+<file path=ppt/slides/slide68.xml><?xml version="1.0" encoding="utf-8"?>
+<p:sld xmlns:a="http://schemas.openxmlformats.org/drawingml/2006/main" xmlns:p="http://schemas.openxmlformats.org/presentationml/2006/main" xmlns:r="http://schemas.openxmlformats.org/officeDocument/2006/relationships">
+  <p:bg>
+    <p:bgPr>
+      <a:solidFill>
+        <a:srgbClr val="FFFFFF"/>
+      </a:solidFill>
+      <a:effectLst/>
+    </p:bgPr>
+  </p:bg>
+  <p:cSld>
+    <p:spTree>
+      <p:nvGrpSpPr>
+        <p:cNvPr id="1" name=""/>
+        <p:cNvGrpSpPr/>
+        <p:nvPr/>
+      </p:nvGrpSpPr>
+      <p:grpSpPr/>
+      <p:sp>
+        <p:nvSpPr>
+          <p:cNvPr id="2" name="TextBox 1"/>
+          <p:cNvSpPr txBox="1"/>
+          <p:nvPr/>
+        </p:nvSpPr>
+        <p:spPr>
+          <a:xfrm>
+            <a:off x="566927" y="384047"/>
+            <a:ext cx="11055095" cy="292607"/>
+          </a:xfrm>
+          <a:prstGeom prst="rect">
+            <a:avLst/>
+          </a:prstGeom>
+          <a:noFill/>
+        </p:spPr>
+        <p:txBody>
+          <a:bodyPr wrap="square" lIns="0" rIns="0" tIns="0" bIns="0" anchor="ctr">
+            <a:spAutoFit/>
+          </a:bodyPr>
+          <a:lstStyle/>
+          <a:p>
+            <a:pPr algn="l"/>
+            <a:r>
+              <a:rPr sz="1199" b="1" i="0" spc="399">
+                <a:solidFill>
+                  <a:srgbClr val="EE0000"/>
+                </a:solidFill>
+                <a:latin typeface="Overpass"/>
+                <a:cs typeface="Overpass"/>
+              </a:rPr>
+              <a:t>SCAN TO EXPLORE</a:t>
+            </a:r>
+          </a:p>
+        </p:txBody>
+      </p:sp>
+      <p:sp>
+        <p:nvSpPr>
+          <p:cNvPr id="3" name="TextBox 2"/>
+          <p:cNvSpPr txBox="1"/>
+          <p:nvPr/>
+        </p:nvSpPr>
+        <p:spPr>
+          <a:xfrm>
+            <a:off x="566927" y="676655"/>
+            <a:ext cx="11055095" cy="1005839"/>
+          </a:xfrm>
+          <a:prstGeom prst="rect">
+            <a:avLst/>
+          </a:prstGeom>
+          <a:noFill/>
+        </p:spPr>
+        <p:txBody>
+          <a:bodyPr wrap="square" lIns="0" rIns="0" tIns="0" bIns="0" anchor="t">
+            <a:spAutoFit/>
+          </a:bodyPr>
+          <a:lstStyle/>
+          <a:p>
+            <a:pPr algn="l"/>
+            <a:r>
+              <a:rPr sz="2999" b="1" i="0">
+                <a:solidFill>
+                  <a:srgbClr val="151515"/>
+                </a:solidFill>
+                <a:latin typeface="Overpass"/>
+                <a:cs typeface="Overpass"/>
+              </a:rPr>
+              <a:t>Take it with you</a:t>
+            </a:r>
+          </a:p>
+        </p:txBody>
+      </p:sp>
+      <p:pic>
+        <p:nvPicPr>
+          <p:cNvPr id="4" name="Picture 3" descr="qr-cpps-site.png"/>
+          <p:cNvPicPr>
+            <a:picLocks noChangeAspect="1"/>
+          </p:cNvPicPr>
+          <p:nvPr/>
+        </p:nvPicPr>
+        <p:blipFill>
+          <a:blip r:embed="rId2"/>
+          <a:stretch>
+            <a:fillRect/>
+          </a:stretch>
+        </p:blipFill>
+        <p:spPr>
+          <a:xfrm>
+            <a:off x="2103119" y="1627631"/>
+            <a:ext cx="2834639" cy="2834639"/>
+          </a:xfrm>
+          <a:prstGeom prst="rect">
+            <a:avLst/>
+          </a:prstGeom>
+        </p:spPr>
+      </p:pic>
+      <p:sp>
+        <p:nvSpPr>
+          <p:cNvPr id="5" name="TextBox 4"/>
+          <p:cNvSpPr txBox="1"/>
+          <p:nvPr/>
+        </p:nvSpPr>
+        <p:spPr>
+          <a:xfrm>
+            <a:off x="1417319" y="4553711"/>
+            <a:ext cx="4206239" cy="365759"/>
+          </a:xfrm>
+          <a:prstGeom prst="rect">
+            <a:avLst/>
+          </a:prstGeom>
+          <a:noFill/>
+        </p:spPr>
+        <p:txBody>
+          <a:bodyPr wrap="square" lIns="0" rIns="0" tIns="0" bIns="0" anchor="ctr">
+            <a:spAutoFit/>
+          </a:bodyPr>
+          <a:lstStyle/>
+          <a:p>
+            <a:pPr algn="ctr"/>
+            <a:r>
+              <a:rPr sz="1799" b="1" i="0">
+                <a:solidFill>
+                  <a:srgbClr val="151515"/>
+                </a:solidFill>
+                <a:latin typeface="Overpass"/>
+                <a:cs typeface="Overpass"/>
+              </a:rPr>
+              <a:t>The site</a:t>
+            </a:r>
+          </a:p>
+        </p:txBody>
+      </p:sp>
+      <p:sp>
+        <p:nvSpPr>
+          <p:cNvPr id="6" name="TextBox 5"/>
+          <p:cNvSpPr txBox="1"/>
+          <p:nvPr/>
+        </p:nvSpPr>
+        <p:spPr>
+          <a:xfrm>
+            <a:off x="1325879" y="4937759"/>
+            <a:ext cx="4389119" cy="658367"/>
+          </a:xfrm>
+          <a:prstGeom prst="rect">
+            <a:avLst/>
+          </a:prstGeom>
+          <a:noFill/>
+        </p:spPr>
+        <p:txBody>
+          <a:bodyPr wrap="square" lIns="0" rIns="0" tIns="0" bIns="0" anchor="t">
+            <a:spAutoFit/>
+          </a:bodyPr>
+          <a:lstStyle/>
+          <a:p>
+            <a:pPr algn="ctr"/>
+            <a:r>
+              <a:rPr sz="1299" b="0" i="1">
+                <a:solidFill>
+                  <a:srgbClr val="5A5A5A"/>
+                </a:solidFill>
+                <a:latin typeface="Red Hat Text"/>
+                <a:cs typeface="Red Hat Text"/>
+              </a:rPr>
+              <a:t>Chapters, the runnable C++ examples, and the benchmarks</a:t>
+            </a:r>
+          </a:p>
+        </p:txBody>
+      </p:sp>
+      <p:sp>
+        <p:nvSpPr>
+          <p:cNvPr id="7" name="TextBox 6"/>
+          <p:cNvSpPr txBox="1"/>
+          <p:nvPr/>
+        </p:nvSpPr>
+        <p:spPr>
+          <a:xfrm>
+            <a:off x="1325879" y="5596127"/>
+            <a:ext cx="4389119" cy="292607"/>
+          </a:xfrm>
+          <a:prstGeom prst="rect">
+            <a:avLst/>
+          </a:prstGeom>
+          <a:noFill/>
+        </p:spPr>
+        <p:txBody>
+          <a:bodyPr wrap="square" lIns="0" rIns="0" tIns="0" bIns="0" anchor="ctr">
+            <a:spAutoFit/>
+          </a:bodyPr>
+          <a:lstStyle/>
+          <a:p>
+            <a:pPr algn="ctr"/>
+            <a:r>
+              <a:rPr sz="999" b="0" i="0">
+                <a:solidFill>
+                  <a:srgbClr val="EE0000"/>
+                </a:solidFill>
+                <a:latin typeface="Red Hat Mono"/>
+                <a:cs typeface="Red Hat Mono"/>
+              </a:rPr>
+              <a:t>patterncatalyst.github.io/cpp-statelessness</a:t>
+            </a:r>
+          </a:p>
+        </p:txBody>
+      </p:sp>
+      <p:pic>
+        <p:nvPicPr>
+          <p:cNvPr id="8" name="Picture 7" descr="qr-hub.png"/>
+          <p:cNvPicPr>
+            <a:picLocks noChangeAspect="1"/>
+          </p:cNvPicPr>
+          <p:nvPr/>
+        </p:nvPicPr>
+        <p:blipFill>
+          <a:blip r:embed="rId3"/>
+          <a:stretch>
+            <a:fillRect/>
+          </a:stretch>
+        </p:blipFill>
+        <p:spPr>
+          <a:xfrm>
+            <a:off x="7251191" y="1627631"/>
+            <a:ext cx="2834639" cy="2834639"/>
+          </a:xfrm>
+          <a:prstGeom prst="rect">
+            <a:avLst/>
+          </a:prstGeom>
+        </p:spPr>
+      </p:pic>
+      <p:sp>
+        <p:nvSpPr>
+          <p:cNvPr id="9" name="TextBox 8"/>
+          <p:cNvSpPr txBox="1"/>
+          <p:nvPr/>
+        </p:nvSpPr>
+        <p:spPr>
+          <a:xfrm>
+            <a:off x="6565391" y="4553711"/>
+            <a:ext cx="4206239" cy="365759"/>
+          </a:xfrm>
+          <a:prstGeom prst="rect">
+            <a:avLst/>
+          </a:prstGeom>
+          <a:noFill/>
+        </p:spPr>
+        <p:txBody>
+          <a:bodyPr wrap="square" lIns="0" rIns="0" tIns="0" bIns="0" anchor="ctr">
+            <a:spAutoFit/>
+          </a:bodyPr>
+          <a:lstStyle/>
+          <a:p>
+            <a:pPr algn="ctr"/>
+            <a:r>
+              <a:rPr sz="1799" b="1" i="0">
+                <a:solidFill>
+                  <a:srgbClr val="151515"/>
+                </a:solidFill>
+                <a:latin typeface="Overpass"/>
+                <a:cs typeface="Overpass"/>
+              </a:rPr>
+              <a:t>Workshops &amp; Tutorials</a:t>
+            </a:r>
+          </a:p>
+        </p:txBody>
+      </p:sp>
+      <p:sp>
+        <p:nvSpPr>
+          <p:cNvPr id="10" name="TextBox 9"/>
+          <p:cNvSpPr txBox="1"/>
+          <p:nvPr/>
+        </p:nvSpPr>
+        <p:spPr>
+          <a:xfrm>
+            <a:off x="6473951" y="4937759"/>
+            <a:ext cx="4389119" cy="658367"/>
+          </a:xfrm>
+          <a:prstGeom prst="rect">
+            <a:avLst/>
+          </a:prstGeom>
+          <a:noFill/>
+        </p:spPr>
+        <p:txBody>
+          <a:bodyPr wrap="square" lIns="0" rIns="0" tIns="0" bIns="0" anchor="t">
+            <a:spAutoFit/>
+          </a:bodyPr>
+          <a:lstStyle/>
+          <a:p>
+            <a:pPr algn="ctr"/>
+            <a:r>
+              <a:rPr sz="1299" b="0" i="1">
+                <a:solidFill>
+                  <a:srgbClr val="5A5A5A"/>
+                </a:solidFill>
+                <a:latin typeface="Red Hat Text"/>
+                <a:cs typeface="Red Hat Text"/>
+              </a:rPr>
+              <a:t>The whole series: every workshop, tutorial, and deck in one place</a:t>
+            </a:r>
+          </a:p>
+        </p:txBody>
+      </p:sp>
+      <p:sp>
+        <p:nvSpPr>
+          <p:cNvPr id="11" name="TextBox 10"/>
+          <p:cNvSpPr txBox="1"/>
+          <p:nvPr/>
+        </p:nvSpPr>
+        <p:spPr>
+          <a:xfrm>
+            <a:off x="6473951" y="5596127"/>
+            <a:ext cx="4389119" cy="292607"/>
+          </a:xfrm>
+          <a:prstGeom prst="rect">
+            <a:avLst/>
+          </a:prstGeom>
+          <a:noFill/>
+        </p:spPr>
+        <p:txBody>
+          <a:bodyPr wrap="square" lIns="0" rIns="0" tIns="0" bIns="0" anchor="ctr">
+            <a:spAutoFit/>
+          </a:bodyPr>
+          <a:lstStyle/>
+          <a:p>
+            <a:pPr algn="ctr"/>
+            <a:r>
+              <a:rPr sz="899" b="0" i="0">
+                <a:solidFill>
+                  <a:srgbClr val="EE0000"/>
+                </a:solidFill>
+                <a:latin typeface="Red Hat Mono"/>
+                <a:cs typeface="Red Hat Mono"/>
+              </a:rPr>
+              <a:t>patterncatalyst.github.io/patterncatalyst-workshops-tutorials-list</a:t>
+            </a:r>
+          </a:p>
+        </p:txBody>
+      </p:sp>
+      <p:sp>
+        <p:nvSpPr>
+          <p:cNvPr id="12" name="TextBox 11"/>
+          <p:cNvSpPr txBox="1"/>
+          <p:nvPr/>
+        </p:nvSpPr>
+        <p:spPr>
+          <a:xfrm>
+            <a:off x="566927" y="6364223"/>
+            <a:ext cx="914399" cy="274319"/>
+          </a:xfrm>
+          <a:prstGeom prst="rect">
+            <a:avLst/>
+          </a:prstGeom>
+          <a:noFill/>
+        </p:spPr>
+        <p:txBody>
+          <a:bodyPr wrap="square" lIns="0" rIns="0" tIns="0" bIns="0" anchor="ctr">
+            <a:spAutoFit/>
+          </a:bodyPr>
+          <a:lstStyle/>
+          <a:p>
+            <a:pPr algn="l"/>
+            <a:r>
+              <a:rPr sz="999" b="0" i="0">
+                <a:solidFill>
+                  <a:srgbClr val="8A8A8A"/>
+                </a:solidFill>
+                <a:latin typeface="Red Hat Text"/>
+                <a:cs typeface="Red Hat Text"/>
+              </a:rPr>
+              <a:t>68</a:t>
+            </a:r>
+          </a:p>
+        </p:txBody>
+      </p:sp>
+      <p:pic>
+        <p:nvPicPr>
+          <p:cNvPr id="13" name="Picture 12" descr="logo-candidate-2.png"/>
+          <p:cNvPicPr>
+            <a:picLocks noChangeAspect="1"/>
+          </p:cNvPicPr>
+          <p:nvPr/>
+        </p:nvPicPr>
+        <p:blipFill>
+          <a:blip r:embed="rId4"/>
+          <a:stretch>
+            <a:fillRect/>
+          </a:stretch>
+        </p:blipFill>
+        <p:spPr>
+          <a:xfrm>
+            <a:off x="10561319" y="6355079"/>
+            <a:ext cx="1033271" cy="246887"/>
+          </a:xfrm>
+          <a:prstGeom prst="rect">
+            <a:avLst/>
+          </a:prstGeom>
+        </p:spPr>
+      </p:pic>
     </p:spTree>
   </p:cSld>
   <p:clrMapOvr>
